--- a/V2授课PPT/W15-第14次课-ResNet迁移学习（下.pptx
+++ b/V2授课PPT/W15-第14次课-ResNet迁移学习（下.pptx
@@ -12,6 +12,9 @@
     <p:sldId id="318" r:id="rId70"/>
     <p:sldId id="366" r:id="rId16"/>
     <p:sldId id="367" r:id="rId17"/>
+    <p:sldId id="368" r:id="rId18"/>
+    <p:sldId id="369" r:id="rId19"/>
+    <p:sldId id="370" r:id="rId20"/>
     <p:sldId id="365" r:id="rId15"/>
     <p:sldId id="363" r:id="rId115"/>
     <p:sldId id="364" r:id="rId116"/>
@@ -4670,6 +4673,2590 @@
 </p:sld>
 </file>
 
+<file path=ppt/slides/slide11.xml><?xml version="1.0" encoding="utf-8"?>
+<p:sld xmlns:a="http://schemas.openxmlformats.org/drawingml/2006/main" xmlns:p="http://schemas.openxmlformats.org/presentationml/2006/main" xmlns:r="http://schemas.openxmlformats.org/officeDocument/2006/relationships">
+  <p:cSld>
+    <p:spTree>
+      <p:nvGrpSpPr>
+        <p:cNvPr id="1" name=""/>
+        <p:cNvGrpSpPr/>
+        <p:nvPr/>
+      </p:nvGrpSpPr>
+      <p:grpSpPr/>
+      <p:sp>
+        <p:nvSpPr>
+          <p:cNvPr id="2" name="Rectangle 1"/>
+          <p:cNvSpPr/>
+          <p:nvPr/>
+        </p:nvSpPr>
+        <p:spPr>
+          <a:xfrm>
+            <a:off x="0" y="0"/>
+            <a:ext cx="12192000" cy="1150000"/>
+          </a:xfrm>
+          <a:prstGeom prst="rect">
+            <a:avLst/>
+          </a:prstGeom>
+          <a:solidFill>
+            <a:srgbClr val="010328"/>
+          </a:solidFill>
+          <a:ln>
+            <a:noFill/>
+          </a:ln>
+          <a:effectLst/>
+        </p:spPr>
+        <p:style>
+          <a:lnRef idx="1">
+            <a:schemeClr val="accent1"/>
+          </a:lnRef>
+          <a:fillRef idx="3">
+            <a:schemeClr val="accent1"/>
+          </a:fillRef>
+          <a:effectRef idx="2">
+            <a:schemeClr val="accent1"/>
+          </a:effectRef>
+          <a:fontRef idx="minor">
+            <a:schemeClr val="lt1"/>
+          </a:fontRef>
+        </p:style>
+        <p:txBody>
+          <a:bodyPr rtlCol="0" anchor="ctr"/>
+          <a:lstStyle/>
+          <a:p>
+            <a:pPr algn="ctr"/>
+          </a:p>
+        </p:txBody>
+      </p:sp>
+      <p:sp>
+        <p:nvSpPr>
+          <p:cNvPr id="3" name="Rectangle 2"/>
+          <p:cNvSpPr/>
+          <p:nvPr/>
+        </p:nvSpPr>
+        <p:spPr>
+          <a:xfrm>
+            <a:off x="0" y="1150000"/>
+            <a:ext cx="2600000" cy="70000"/>
+          </a:xfrm>
+          <a:prstGeom prst="rect">
+            <a:avLst/>
+          </a:prstGeom>
+          <a:solidFill>
+            <a:srgbClr val="F5670F"/>
+          </a:solidFill>
+          <a:ln>
+            <a:noFill/>
+          </a:ln>
+          <a:effectLst/>
+        </p:spPr>
+        <p:style>
+          <a:lnRef idx="1">
+            <a:schemeClr val="accent1"/>
+          </a:lnRef>
+          <a:fillRef idx="3">
+            <a:schemeClr val="accent1"/>
+          </a:fillRef>
+          <a:effectRef idx="2">
+            <a:schemeClr val="accent1"/>
+          </a:effectRef>
+          <a:fontRef idx="minor">
+            <a:schemeClr val="lt1"/>
+          </a:fontRef>
+        </p:style>
+        <p:txBody>
+          <a:bodyPr rtlCol="0" anchor="ctr"/>
+          <a:lstStyle/>
+          <a:p>
+            <a:pPr algn="ctr"/>
+          </a:p>
+        </p:txBody>
+      </p:sp>
+      <p:sp>
+        <p:nvSpPr>
+          <p:cNvPr id="4" name="TextBox 3"/>
+          <p:cNvSpPr txBox="1"/>
+          <p:nvPr/>
+        </p:nvSpPr>
+        <p:spPr>
+          <a:xfrm>
+            <a:off x="700000" y="300000"/>
+            <a:ext cx="10792000" cy="700000"/>
+          </a:xfrm>
+          <a:prstGeom prst="rect">
+            <a:avLst/>
+          </a:prstGeom>
+          <a:noFill/>
+        </p:spPr>
+        <p:txBody>
+          <a:bodyPr wrap="square" anchor="t">
+            <a:spAutoFit/>
+          </a:bodyPr>
+          <a:lstStyle/>
+          <a:p>
+            <a:pPr algn="l">
+              <a:lnSpc>
+                <a:spcPct val="110000"/>
+              </a:lnSpc>
+              <a:spcAft>
+                <a:spcPts val="600"/>
+              </a:spcAft>
+            </a:pPr>
+            <a:r>
+              <a:rPr sz="2400" b="1">
+                <a:solidFill>
+                  <a:srgbClr val="FFFFFF"/>
+                </a:solidFill>
+                <a:latin typeface="微软雅黑"/>
+              </a:rPr>
+              <a:t>实测验收 · m31_transfer</a:t>
+            </a:r>
+          </a:p>
+        </p:txBody>
+      </p:sp>
+      <p:sp>
+        <p:nvSpPr>
+          <p:cNvPr id="11" name="Rectangle 10"/>
+          <p:cNvSpPr/>
+          <p:nvPr/>
+        </p:nvSpPr>
+        <p:spPr>
+          <a:xfrm>
+            <a:off x="500000" y="6500000"/>
+            <a:ext cx="11100000" cy="20000"/>
+          </a:xfrm>
+          <a:prstGeom prst="rect">
+            <a:avLst/>
+          </a:prstGeom>
+          <a:solidFill>
+            <a:srgbClr val="C9D4EE"/>
+          </a:solidFill>
+          <a:ln>
+            <a:noFill/>
+          </a:ln>
+          <a:effectLst/>
+        </p:spPr>
+        <p:style>
+          <a:lnRef idx="1">
+            <a:schemeClr val="accent1"/>
+          </a:lnRef>
+          <a:fillRef idx="3">
+            <a:schemeClr val="accent1"/>
+          </a:fillRef>
+          <a:effectRef idx="2">
+            <a:schemeClr val="accent1"/>
+          </a:effectRef>
+          <a:fontRef idx="minor">
+            <a:schemeClr val="lt1"/>
+          </a:fontRef>
+        </p:style>
+        <p:txBody>
+          <a:bodyPr rtlCol="0" anchor="ctr"/>
+          <a:lstStyle/>
+          <a:p>
+            <a:pPr algn="ctr"/>
+          </a:p>
+        </p:txBody>
+      </p:sp>
+      <p:sp>
+        <p:nvSpPr>
+          <p:cNvPr id="12" name="TextBox 11"/>
+          <p:cNvSpPr txBox="1"/>
+          <p:nvPr/>
+        </p:nvSpPr>
+        <p:spPr>
+          <a:xfrm>
+            <a:off x="500000" y="6540000"/>
+            <a:ext cx="7000000" cy="300000"/>
+          </a:xfrm>
+          <a:prstGeom prst="rect">
+            <a:avLst/>
+          </a:prstGeom>
+          <a:noFill/>
+        </p:spPr>
+        <p:txBody>
+          <a:bodyPr wrap="square" anchor="t">
+            <a:spAutoFit/>
+          </a:bodyPr>
+          <a:lstStyle/>
+          <a:p>
+            <a:pPr algn="l">
+              <a:lnSpc>
+                <a:spcPct val="110000"/>
+              </a:lnSpc>
+              <a:spcAft>
+                <a:spcPts val="600"/>
+              </a:spcAft>
+            </a:pPr>
+            <a:r>
+              <a:rPr sz="1000" b="0">
+                <a:solidFill>
+                  <a:srgbClr val="8A97B5"/>
+                </a:solidFill>
+                <a:latin typeface="微软雅黑"/>
+              </a:rPr>
+              <a:t>两江智造集团 · AI应用基础48课时版</a:t>
+            </a:r>
+          </a:p>
+        </p:txBody>
+      </p:sp>
+      <p:sp>
+        <p:nvSpPr>
+          <p:cNvPr id="13" name="TextBox 12"/>
+          <p:cNvSpPr txBox="1"/>
+          <p:nvPr/>
+        </p:nvSpPr>
+        <p:spPr>
+          <a:xfrm>
+            <a:off x="10600000" y="6540000"/>
+            <a:ext cx="1000000" cy="300000"/>
+          </a:xfrm>
+          <a:prstGeom prst="rect">
+            <a:avLst/>
+          </a:prstGeom>
+          <a:noFill/>
+        </p:spPr>
+        <p:txBody>
+          <a:bodyPr wrap="square" anchor="t">
+            <a:spAutoFit/>
+          </a:bodyPr>
+          <a:lstStyle/>
+          <a:p>
+            <a:pPr algn="r">
+              <a:lnSpc>
+                <a:spcPct val="110000"/>
+              </a:lnSpc>
+              <a:spcAft>
+                <a:spcPts val="600"/>
+              </a:spcAft>
+            </a:pPr>
+            <a:r>
+              <a:rPr sz="1000" b="0">
+                <a:solidFill>
+                  <a:srgbClr val="8A97B5"/>
+                </a:solidFill>
+                <a:latin typeface="微软雅黑"/>
+              </a:rPr>
+              <a:t>8 / 13</a:t>
+            </a:r>
+          </a:p>
+        </p:txBody>
+      </p:sp>
+      <p:sp>
+        <p:nvSpPr>
+          <p:cNvPr id="14" name="Rectangle 13"/>
+          <p:cNvSpPr/>
+          <p:nvPr/>
+        </p:nvSpPr>
+        <p:spPr>
+          <a:xfrm>
+            <a:off x="0" y="1371600"/>
+            <a:ext cx="12188952" cy="713232"/>
+          </a:xfrm>
+          <a:prstGeom prst="rect">
+            <a:avLst/>
+          </a:prstGeom>
+          <a:solidFill>
+            <a:srgbClr val="F2F5F9"/>
+          </a:solidFill>
+          <a:ln>
+            <a:noFill/>
+          </a:ln>
+          <a:effectLst/>
+        </p:spPr>
+        <p:style>
+          <a:lnRef idx="1">
+            <a:schemeClr val="accent1"/>
+          </a:lnRef>
+          <a:fillRef idx="3">
+            <a:schemeClr val="accent1"/>
+          </a:fillRef>
+          <a:effectRef idx="2">
+            <a:schemeClr val="accent1"/>
+          </a:effectRef>
+          <a:fontRef idx="minor">
+            <a:schemeClr val="lt1"/>
+          </a:fontRef>
+        </p:style>
+        <p:txBody>
+          <a:bodyPr rtlCol="0" anchor="ctr" wrap="square"/>
+          <a:lstStyle/>
+          <a:p>
+            <a:pPr algn="ctr"/>
+          </a:p>
+        </p:txBody>
+      </p:sp>
+      <p:sp>
+        <p:nvSpPr>
+          <p:cNvPr id="15" name="TextBox 14"/>
+          <p:cNvSpPr txBox="1"/>
+          <p:nvPr/>
+        </p:nvSpPr>
+        <p:spPr>
+          <a:xfrm>
+            <a:off x="457200" y="1426464"/>
+            <a:ext cx="2651760" cy="566928"/>
+          </a:xfrm>
+          <a:prstGeom prst="rect">
+            <a:avLst/>
+          </a:prstGeom>
+          <a:noFill/>
+        </p:spPr>
+        <p:txBody>
+          <a:bodyPr wrap="square">
+            <a:spAutoFit/>
+          </a:bodyPr>
+          <a:lstStyle/>
+          <a:p>
+            <a:r>
+              <a:rPr sz="1400" b="1">
+                <a:solidFill>
+                  <a:srgbClr val="2E7D46"/>
+                </a:solidFill>
+                <a:latin typeface="微软雅黑"/>
+              </a:rPr>
+              <a:t>实测达成档位</a:t>
+            </a:r>
+          </a:p>
+          <a:p>
+            <a:r>
+              <a:rPr sz="1400" b="1">
+                <a:solidFill>
+                  <a:srgbClr val="2E7D46"/>
+                </a:solidFill>
+                <a:latin typeface="微软雅黑"/>
+              </a:rPr>
+              <a:t>优(A)</a:t>
+            </a:r>
+          </a:p>
+        </p:txBody>
+      </p:sp>
+      <p:sp>
+        <p:nvSpPr>
+          <p:cNvPr id="16" name="Rectangle 15"/>
+          <p:cNvSpPr/>
+          <p:nvPr/>
+        </p:nvSpPr>
+        <p:spPr>
+          <a:xfrm>
+            <a:off x="3200400" y="1426464"/>
+            <a:ext cx="1627632" cy="603504"/>
+          </a:xfrm>
+          <a:prstGeom prst="rect">
+            <a:avLst/>
+          </a:prstGeom>
+          <a:solidFill>
+            <a:srgbClr val="FFFFFF"/>
+          </a:solidFill>
+          <a:ln>
+            <a:solidFill>
+              <a:srgbClr val="D6DCE4"/>
+            </a:solidFill>
+          </a:ln>
+          <a:effectLst/>
+        </p:spPr>
+        <p:style>
+          <a:lnRef idx="1">
+            <a:schemeClr val="accent1"/>
+          </a:lnRef>
+          <a:fillRef idx="3">
+            <a:schemeClr val="accent1"/>
+          </a:fillRef>
+          <a:effectRef idx="2">
+            <a:schemeClr val="accent1"/>
+          </a:effectRef>
+          <a:fontRef idx="minor">
+            <a:schemeClr val="lt1"/>
+          </a:fontRef>
+        </p:style>
+        <p:txBody>
+          <a:bodyPr rtlCol="0" anchor="ctr" wrap="square"/>
+          <a:lstStyle/>
+          <a:p>
+            <a:pPr algn="ctr"/>
+          </a:p>
+        </p:txBody>
+      </p:sp>
+      <p:sp>
+        <p:nvSpPr>
+          <p:cNvPr id="17" name="TextBox 16"/>
+          <p:cNvSpPr txBox="1"/>
+          <p:nvPr/>
+        </p:nvSpPr>
+        <p:spPr>
+          <a:xfrm>
+            <a:off x="3246120" y="1463040"/>
+            <a:ext cx="1536192" cy="548640"/>
+          </a:xfrm>
+          <a:prstGeom prst="rect">
+            <a:avLst/>
+          </a:prstGeom>
+          <a:noFill/>
+        </p:spPr>
+        <p:txBody>
+          <a:bodyPr wrap="square">
+            <a:spAutoFit/>
+          </a:bodyPr>
+          <a:lstStyle/>
+          <a:p>
+            <a:r>
+              <a:rPr sz="900" b="0">
+                <a:solidFill>
+                  <a:srgbClr val="35506E"/>
+                </a:solidFill>
+                <a:latin typeface="微软雅黑"/>
+              </a:rPr>
+              <a:t>实测最优准确率 1.0000</a:t>
+            </a:r>
+          </a:p>
+        </p:txBody>
+      </p:sp>
+      <p:sp>
+        <p:nvSpPr>
+          <p:cNvPr id="18" name="Rectangle 17"/>
+          <p:cNvSpPr/>
+          <p:nvPr/>
+        </p:nvSpPr>
+        <p:spPr>
+          <a:xfrm>
+            <a:off x="4901184" y="1426464"/>
+            <a:ext cx="1627632" cy="603504"/>
+          </a:xfrm>
+          <a:prstGeom prst="rect">
+            <a:avLst/>
+          </a:prstGeom>
+          <a:solidFill>
+            <a:srgbClr val="FFFFFF"/>
+          </a:solidFill>
+          <a:ln>
+            <a:solidFill>
+              <a:srgbClr val="D6DCE4"/>
+            </a:solidFill>
+          </a:ln>
+          <a:effectLst/>
+        </p:spPr>
+        <p:style>
+          <a:lnRef idx="1">
+            <a:schemeClr val="accent1"/>
+          </a:lnRef>
+          <a:fillRef idx="3">
+            <a:schemeClr val="accent1"/>
+          </a:fillRef>
+          <a:effectRef idx="2">
+            <a:schemeClr val="accent1"/>
+          </a:effectRef>
+          <a:fontRef idx="minor">
+            <a:schemeClr val="lt1"/>
+          </a:fontRef>
+        </p:style>
+        <p:txBody>
+          <a:bodyPr rtlCol="0" anchor="ctr" wrap="square"/>
+          <a:lstStyle/>
+          <a:p>
+            <a:pPr algn="ctr"/>
+          </a:p>
+        </p:txBody>
+      </p:sp>
+      <p:sp>
+        <p:nvSpPr>
+          <p:cNvPr id="19" name="TextBox 18"/>
+          <p:cNvSpPr txBox="1"/>
+          <p:nvPr/>
+        </p:nvSpPr>
+        <p:spPr>
+          <a:xfrm>
+            <a:off x="4946904" y="1463040"/>
+            <a:ext cx="1536192" cy="548640"/>
+          </a:xfrm>
+          <a:prstGeom prst="rect">
+            <a:avLst/>
+          </a:prstGeom>
+          <a:noFill/>
+        </p:spPr>
+        <p:txBody>
+          <a:bodyPr wrap="square">
+            <a:spAutoFit/>
+          </a:bodyPr>
+          <a:lstStyle/>
+          <a:p>
+            <a:r>
+              <a:rPr sz="900" b="0">
+                <a:solidFill>
+                  <a:srgbClr val="35506E"/>
+                </a:solidFill>
+                <a:latin typeface="微软雅黑"/>
+              </a:rPr>
+              <a:t>规范率 97.39%</a:t>
+            </a:r>
+          </a:p>
+        </p:txBody>
+      </p:sp>
+      <p:sp>
+        <p:nvSpPr>
+          <p:cNvPr id="20" name="Rectangle 19"/>
+          <p:cNvSpPr/>
+          <p:nvPr/>
+        </p:nvSpPr>
+        <p:spPr>
+          <a:xfrm>
+            <a:off x="6601968" y="1426464"/>
+            <a:ext cx="1627632" cy="603504"/>
+          </a:xfrm>
+          <a:prstGeom prst="rect">
+            <a:avLst/>
+          </a:prstGeom>
+          <a:solidFill>
+            <a:srgbClr val="FFFFFF"/>
+          </a:solidFill>
+          <a:ln>
+            <a:solidFill>
+              <a:srgbClr val="D6DCE4"/>
+            </a:solidFill>
+          </a:ln>
+          <a:effectLst/>
+        </p:spPr>
+        <p:style>
+          <a:lnRef idx="1">
+            <a:schemeClr val="accent1"/>
+          </a:lnRef>
+          <a:fillRef idx="3">
+            <a:schemeClr val="accent1"/>
+          </a:fillRef>
+          <a:effectRef idx="2">
+            <a:schemeClr val="accent1"/>
+          </a:effectRef>
+          <a:fontRef idx="minor">
+            <a:schemeClr val="lt1"/>
+          </a:fontRef>
+        </p:style>
+        <p:txBody>
+          <a:bodyPr rtlCol="0" anchor="ctr" wrap="square"/>
+          <a:lstStyle/>
+          <a:p>
+            <a:pPr algn="ctr"/>
+          </a:p>
+        </p:txBody>
+      </p:sp>
+      <p:sp>
+        <p:nvSpPr>
+          <p:cNvPr id="21" name="TextBox 20"/>
+          <p:cNvSpPr txBox="1"/>
+          <p:nvPr/>
+        </p:nvSpPr>
+        <p:spPr>
+          <a:xfrm>
+            <a:off x="6647688" y="1463040"/>
+            <a:ext cx="1536192" cy="548640"/>
+          </a:xfrm>
+          <a:prstGeom prst="rect">
+            <a:avLst/>
+          </a:prstGeom>
+          <a:noFill/>
+        </p:spPr>
+        <p:txBody>
+          <a:bodyPr wrap="square">
+            <a:spAutoFit/>
+          </a:bodyPr>
+          <a:lstStyle/>
+          <a:p>
+            <a:r>
+              <a:rPr sz="900" b="0">
+                <a:solidFill>
+                  <a:srgbClr val="35506E"/>
+                </a:solidFill>
+                <a:latin typeface="微软雅黑"/>
+              </a:rPr>
+              <a:t>对照表实测行 4 条</a:t>
+            </a:r>
+          </a:p>
+        </p:txBody>
+      </p:sp>
+      <p:sp>
+        <p:nvSpPr>
+          <p:cNvPr id="22" name="Rectangle 21"/>
+          <p:cNvSpPr/>
+          <p:nvPr/>
+        </p:nvSpPr>
+        <p:spPr>
+          <a:xfrm>
+            <a:off x="8302752" y="1426464"/>
+            <a:ext cx="1627632" cy="603504"/>
+          </a:xfrm>
+          <a:prstGeom prst="rect">
+            <a:avLst/>
+          </a:prstGeom>
+          <a:solidFill>
+            <a:srgbClr val="FFFFFF"/>
+          </a:solidFill>
+          <a:ln>
+            <a:solidFill>
+              <a:srgbClr val="D6DCE4"/>
+            </a:solidFill>
+          </a:ln>
+          <a:effectLst/>
+        </p:spPr>
+        <p:style>
+          <a:lnRef idx="1">
+            <a:schemeClr val="accent1"/>
+          </a:lnRef>
+          <a:fillRef idx="3">
+            <a:schemeClr val="accent1"/>
+          </a:fillRef>
+          <a:effectRef idx="2">
+            <a:schemeClr val="accent1"/>
+          </a:effectRef>
+          <a:fontRef idx="minor">
+            <a:schemeClr val="lt1"/>
+          </a:fontRef>
+        </p:style>
+        <p:txBody>
+          <a:bodyPr rtlCol="0" anchor="ctr" wrap="square"/>
+          <a:lstStyle/>
+          <a:p>
+            <a:pPr algn="ctr"/>
+          </a:p>
+        </p:txBody>
+      </p:sp>
+      <p:sp>
+        <p:nvSpPr>
+          <p:cNvPr id="23" name="TextBox 22"/>
+          <p:cNvSpPr txBox="1"/>
+          <p:nvPr/>
+        </p:nvSpPr>
+        <p:spPr>
+          <a:xfrm>
+            <a:off x="8348472" y="1463040"/>
+            <a:ext cx="1536192" cy="548640"/>
+          </a:xfrm>
+          <a:prstGeom prst="rect">
+            <a:avLst/>
+          </a:prstGeom>
+          <a:noFill/>
+        </p:spPr>
+        <p:txBody>
+          <a:bodyPr wrap="square">
+            <a:spAutoFit/>
+          </a:bodyPr>
+          <a:lstStyle/>
+          <a:p>
+            <a:r>
+              <a:rPr sz="900" b="0">
+                <a:solidFill>
+                  <a:srgbClr val="35506E"/>
+                </a:solidFill>
+                <a:latin typeface="微软雅黑"/>
+              </a:rPr>
+              <a:t>增强增益 冻结 -0.0050/微调 +0.4850</a:t>
+            </a:r>
+          </a:p>
+        </p:txBody>
+      </p:sp>
+      <p:sp>
+        <p:nvSpPr>
+          <p:cNvPr id="24" name="Rectangle 23"/>
+          <p:cNvSpPr/>
+          <p:nvPr/>
+        </p:nvSpPr>
+        <p:spPr>
+          <a:xfrm>
+            <a:off x="10003536" y="1426464"/>
+            <a:ext cx="1627632" cy="603504"/>
+          </a:xfrm>
+          <a:prstGeom prst="rect">
+            <a:avLst/>
+          </a:prstGeom>
+          <a:solidFill>
+            <a:srgbClr val="FFFFFF"/>
+          </a:solidFill>
+          <a:ln>
+            <a:solidFill>
+              <a:srgbClr val="D6DCE4"/>
+            </a:solidFill>
+          </a:ln>
+          <a:effectLst/>
+        </p:spPr>
+        <p:style>
+          <a:lnRef idx="1">
+            <a:schemeClr val="accent1"/>
+          </a:lnRef>
+          <a:fillRef idx="3">
+            <a:schemeClr val="accent1"/>
+          </a:fillRef>
+          <a:effectRef idx="2">
+            <a:schemeClr val="accent1"/>
+          </a:effectRef>
+          <a:fontRef idx="minor">
+            <a:schemeClr val="lt1"/>
+          </a:fontRef>
+        </p:style>
+        <p:txBody>
+          <a:bodyPr rtlCol="0" anchor="ctr" wrap="square"/>
+          <a:lstStyle/>
+          <a:p>
+            <a:pPr algn="ctr"/>
+          </a:p>
+        </p:txBody>
+      </p:sp>
+      <p:sp>
+        <p:nvSpPr>
+          <p:cNvPr id="25" name="TextBox 24"/>
+          <p:cNvSpPr txBox="1"/>
+          <p:nvPr/>
+        </p:nvSpPr>
+        <p:spPr>
+          <a:xfrm>
+            <a:off x="10049256" y="1463040"/>
+            <a:ext cx="1536192" cy="548640"/>
+          </a:xfrm>
+          <a:prstGeom prst="rect">
+            <a:avLst/>
+          </a:prstGeom>
+          <a:noFill/>
+        </p:spPr>
+        <p:txBody>
+          <a:bodyPr wrap="square">
+            <a:spAutoFit/>
+          </a:bodyPr>
+          <a:lstStyle/>
+          <a:p>
+            <a:r>
+              <a:rPr sz="900" b="0">
+                <a:solidFill>
+                  <a:srgbClr val="35506E"/>
+                </a:solidFill>
+                <a:latin typeface="微软雅黑"/>
+              </a:rPr>
+              <a:t>决策记录 1 条</a:t>
+            </a:r>
+          </a:p>
+        </p:txBody>
+      </p:sp>
+      <p:graphicFrame>
+        <p:nvGraphicFramePr>
+          <p:cNvPr id="26" name="Table 25"/>
+          <p:cNvGraphicFramePr>
+            <a:graphicFrameLocks noGrp="1"/>
+          </p:cNvGraphicFramePr>
+          <p:nvPr/>
+        </p:nvGraphicFramePr>
+        <p:xfrm>
+          <a:off x="457200" y="2212848"/>
+          <a:ext cx="11274552" cy="2834640"/>
+        </p:xfrm>
+        <a:graphic>
+          <a:graphicData uri="http://schemas.openxmlformats.org/drawingml/2006/table">
+            <a:tbl>
+              <a:tblPr firstRow="1" bandRow="1">
+                <a:tableStyleId>{5C22544A-7EE6-4342-B048-85BDC9FD1C3A}</a:tableStyleId>
+              </a:tblPr>
+              <a:tblGrid>
+                <a:gridCol w="1188720"/>
+                <a:gridCol w="5120640"/>
+                <a:gridCol w="3886200"/>
+                <a:gridCol w="1078992"/>
+              </a:tblGrid>
+              <a:tr h="566928">
+                <a:tc>
+                  <a:txBody>
+                    <a:bodyPr/>
+                    <a:lstStyle/>
+                    <a:p>
+                      <a:r>
+                        <a:rPr sz="1050" b="1">
+                          <a:solidFill>
+                            <a:srgbClr val="FFFFFF"/>
+                          </a:solidFill>
+                          <a:latin typeface="微软雅黑"/>
+                        </a:rPr>
+                        <a:t>档位</a:t>
+                      </a:r>
+                    </a:p>
+                  </a:txBody>
+                  <a:tcPr>
+                    <a:solidFill>
+                      <a:srgbClr val="010328"/>
+                    </a:solidFill>
+                  </a:tcPr>
+                </a:tc>
+                <a:tc>
+                  <a:txBody>
+                    <a:bodyPr/>
+                    <a:lstStyle/>
+                    <a:p>
+                      <a:r>
+                        <a:rPr sz="1050" b="1">
+                          <a:solidFill>
+                            <a:srgbClr val="FFFFFF"/>
+                          </a:solidFill>
+                          <a:latin typeface="微软雅黑"/>
+                        </a:rPr>
+                        <a:t>工单验收标准（原文）</a:t>
+                      </a:r>
+                    </a:p>
+                  </a:txBody>
+                  <a:tcPr>
+                    <a:solidFill>
+                      <a:srgbClr val="010328"/>
+                    </a:solidFill>
+                  </a:tcPr>
+                </a:tc>
+                <a:tc>
+                  <a:txBody>
+                    <a:bodyPr/>
+                    <a:lstStyle/>
+                    <a:p>
+                      <a:r>
+                        <a:rPr sz="1050" b="1">
+                          <a:solidFill>
+                            <a:srgbClr val="FFFFFF"/>
+                          </a:solidFill>
+                          <a:latin typeface="微软雅黑"/>
+                        </a:rPr>
+                        <a:t>本次实测判定</a:t>
+                      </a:r>
+                    </a:p>
+                  </a:txBody>
+                  <a:tcPr>
+                    <a:solidFill>
+                      <a:srgbClr val="010328"/>
+                    </a:solidFill>
+                  </a:tcPr>
+                </a:tc>
+                <a:tc>
+                  <a:txBody>
+                    <a:bodyPr/>
+                    <a:lstStyle/>
+                    <a:p>
+                      <a:r>
+                        <a:rPr sz="1050" b="1">
+                          <a:solidFill>
+                            <a:srgbClr val="FFFFFF"/>
+                          </a:solidFill>
+                          <a:latin typeface="微软雅黑"/>
+                        </a:rPr>
+                        <a:t>判定</a:t>
+                      </a:r>
+                    </a:p>
+                  </a:txBody>
+                  <a:tcPr>
+                    <a:solidFill>
+                      <a:srgbClr val="010328"/>
+                    </a:solidFill>
+                  </a:tcPr>
+                </a:tc>
+              </a:tr>
+              <a:tr h="566928">
+                <a:tc>
+                  <a:txBody>
+                    <a:bodyPr/>
+                    <a:lstStyle/>
+                    <a:p>
+                      <a:r>
+                        <a:rPr sz="1000" b="1">
+                          <a:solidFill>
+                            <a:srgbClr val="2B2F36"/>
+                          </a:solidFill>
+                          <a:latin typeface="微软雅黑"/>
+                        </a:rPr>
+                        <a:t>及格(D)</a:t>
+                      </a:r>
+                    </a:p>
+                  </a:txBody>
+                  <a:tcPr>
+                    <a:solidFill>
+                      <a:srgbClr val="FFFFFF"/>
+                    </a:solidFill>
+                  </a:tcPr>
+                </a:tc>
+                <a:tc>
+                  <a:txBody>
+                    <a:bodyPr/>
+                    <a:lstStyle/>
+                    <a:p>
+                      <a:r>
+                        <a:rPr sz="950" b="0">
+                          <a:solidFill>
+                            <a:srgbClr val="2B2F36"/>
+                          </a:solidFill>
+                          <a:latin typeface="微软雅黑"/>
+                        </a:rPr>
+                        <a:t>准确率门槛≥0.7（实测 1.0000）</a:t>
+                      </a:r>
+                    </a:p>
+                  </a:txBody>
+                  <a:tcPr>
+                    <a:solidFill>
+                      <a:srgbClr val="FFFFFF"/>
+                    </a:solidFill>
+                  </a:tcPr>
+                </a:tc>
+                <a:tc>
+                  <a:txBody>
+                    <a:bodyPr/>
+                    <a:lstStyle/>
+                    <a:p>
+                      <a:r>
+                        <a:rPr sz="950" b="0">
+                          <a:solidFill>
+                            <a:srgbClr val="2B2F36"/>
+                          </a:solidFill>
+                          <a:latin typeface="微软雅黑"/>
+                        </a:rPr>
+                        <a:t>规范率门槛≥70% [达标] ｜ 功能OK</a:t>
+                      </a:r>
+                    </a:p>
+                  </a:txBody>
+                  <a:tcPr>
+                    <a:solidFill>
+                      <a:srgbClr val="FFFFFF"/>
+                    </a:solidFill>
+                  </a:tcPr>
+                </a:tc>
+                <a:tc>
+                  <a:txBody>
+                    <a:bodyPr/>
+                    <a:lstStyle/>
+                    <a:p>
+                      <a:r>
+                        <a:rPr sz="1000" b="1">
+                          <a:solidFill>
+                            <a:srgbClr val="2E7D46"/>
+                          </a:solidFill>
+                          <a:latin typeface="微软雅黑"/>
+                        </a:rPr>
+                        <a:t>✓ 达标</a:t>
+                      </a:r>
+                    </a:p>
+                  </a:txBody>
+                  <a:tcPr>
+                    <a:solidFill>
+                      <a:srgbClr val="FFFFFF"/>
+                    </a:solidFill>
+                  </a:tcPr>
+                </a:tc>
+              </a:tr>
+              <a:tr h="566928">
+                <a:tc>
+                  <a:txBody>
+                    <a:bodyPr/>
+                    <a:lstStyle/>
+                    <a:p>
+                      <a:r>
+                        <a:rPr sz="1000" b="1">
+                          <a:solidFill>
+                            <a:srgbClr val="2B2F36"/>
+                          </a:solidFill>
+                          <a:latin typeface="微软雅黑"/>
+                        </a:rPr>
+                        <a:t>良好(C)</a:t>
+                      </a:r>
+                    </a:p>
+                  </a:txBody>
+                  <a:tcPr>
+                    <a:solidFill>
+                      <a:srgbClr val="F7F9FB"/>
+                    </a:solidFill>
+                  </a:tcPr>
+                </a:tc>
+                <a:tc>
+                  <a:txBody>
+                    <a:bodyPr/>
+                    <a:lstStyle/>
+                    <a:p>
+                      <a:r>
+                        <a:rPr sz="950" b="0">
+                          <a:solidFill>
+                            <a:srgbClr val="2B2F36"/>
+                          </a:solidFill>
+                          <a:latin typeface="微软雅黑"/>
+                        </a:rPr>
+                        <a:t>准确率≥0.75 且对照行≥2（实测 1.0000 / 4 行）</a:t>
+                      </a:r>
+                    </a:p>
+                  </a:txBody>
+                  <a:tcPr>
+                    <a:solidFill>
+                      <a:srgbClr val="F7F9FB"/>
+                    </a:solidFill>
+                  </a:tcPr>
+                </a:tc>
+                <a:tc>
+                  <a:txBody>
+                    <a:bodyPr/>
+                    <a:lstStyle/>
+                    <a:p>
+                      <a:r>
+                        <a:rPr sz="950" b="0">
+                          <a:solidFill>
+                            <a:srgbClr val="2B2F36"/>
+                          </a:solidFill>
+                          <a:latin typeface="微软雅黑"/>
+                        </a:rPr>
+                        <a:t>规范率门槛≥70% [达标] ｜ 功能OK</a:t>
+                      </a:r>
+                    </a:p>
+                  </a:txBody>
+                  <a:tcPr>
+                    <a:solidFill>
+                      <a:srgbClr val="F7F9FB"/>
+                    </a:solidFill>
+                  </a:tcPr>
+                </a:tc>
+                <a:tc>
+                  <a:txBody>
+                    <a:bodyPr/>
+                    <a:lstStyle/>
+                    <a:p>
+                      <a:r>
+                        <a:rPr sz="1000" b="1">
+                          <a:solidFill>
+                            <a:srgbClr val="2E7D46"/>
+                          </a:solidFill>
+                          <a:latin typeface="微软雅黑"/>
+                        </a:rPr>
+                        <a:t>✓ 达标</a:t>
+                      </a:r>
+                    </a:p>
+                  </a:txBody>
+                  <a:tcPr>
+                    <a:solidFill>
+                      <a:srgbClr val="F7F9FB"/>
+                    </a:solidFill>
+                  </a:tcPr>
+                </a:tc>
+              </a:tr>
+              <a:tr h="566928">
+                <a:tc>
+                  <a:txBody>
+                    <a:bodyPr/>
+                    <a:lstStyle/>
+                    <a:p>
+                      <a:r>
+                        <a:rPr sz="1000" b="1">
+                          <a:solidFill>
+                            <a:srgbClr val="2B2F36"/>
+                          </a:solidFill>
+                          <a:latin typeface="微软雅黑"/>
+                        </a:rPr>
+                        <a:t>优秀(B)</a:t>
+                      </a:r>
+                    </a:p>
+                  </a:txBody>
+                  <a:tcPr>
+                    <a:solidFill>
+                      <a:srgbClr val="FFFFFF"/>
+                    </a:solidFill>
+                  </a:tcPr>
+                </a:tc>
+                <a:tc>
+                  <a:txBody>
+                    <a:bodyPr/>
+                    <a:lstStyle/>
+                    <a:p>
+                      <a:r>
+                        <a:rPr sz="950" b="0">
+                          <a:solidFill>
+                            <a:srgbClr val="2B2F36"/>
+                          </a:solidFill>
+                          <a:latin typeface="微软雅黑"/>
+                        </a:rPr>
+                        <a:t>准确率≥0.8 或增强有效（增益见上行）且决策记录≥1（实测 1）</a:t>
+                      </a:r>
+                    </a:p>
+                  </a:txBody>
+                  <a:tcPr>
+                    <a:solidFill>
+                      <a:srgbClr val="FFFFFF"/>
+                    </a:solidFill>
+                  </a:tcPr>
+                </a:tc>
+                <a:tc>
+                  <a:txBody>
+                    <a:bodyPr/>
+                    <a:lstStyle/>
+                    <a:p>
+                      <a:r>
+                        <a:rPr sz="950" b="0">
+                          <a:solidFill>
+                            <a:srgbClr val="2B2F36"/>
+                          </a:solidFill>
+                          <a:latin typeface="微软雅黑"/>
+                        </a:rPr>
+                        <a:t>规范率门槛≥70% [达标] ｜ 功能OK</a:t>
+                      </a:r>
+                    </a:p>
+                  </a:txBody>
+                  <a:tcPr>
+                    <a:solidFill>
+                      <a:srgbClr val="FFFFFF"/>
+                    </a:solidFill>
+                  </a:tcPr>
+                </a:tc>
+                <a:tc>
+                  <a:txBody>
+                    <a:bodyPr/>
+                    <a:lstStyle/>
+                    <a:p>
+                      <a:r>
+                        <a:rPr sz="1000" b="1">
+                          <a:solidFill>
+                            <a:srgbClr val="2E7D46"/>
+                          </a:solidFill>
+                          <a:latin typeface="微软雅黑"/>
+                        </a:rPr>
+                        <a:t>✓ 达标</a:t>
+                      </a:r>
+                    </a:p>
+                  </a:txBody>
+                  <a:tcPr>
+                    <a:solidFill>
+                      <a:srgbClr val="FFFFFF"/>
+                    </a:solidFill>
+                  </a:tcPr>
+                </a:tc>
+              </a:tr>
+              <a:tr h="566928">
+                <a:tc>
+                  <a:txBody>
+                    <a:bodyPr/>
+                    <a:lstStyle/>
+                    <a:p>
+                      <a:r>
+                        <a:rPr sz="1000" b="1">
+                          <a:solidFill>
+                            <a:srgbClr val="2B2F36"/>
+                          </a:solidFill>
+                          <a:latin typeface="微软雅黑"/>
+                        </a:rPr>
+                        <a:t>优(A)</a:t>
+                      </a:r>
+                    </a:p>
+                  </a:txBody>
+                  <a:tcPr>
+                    <a:solidFill>
+                      <a:srgbClr val="F7F9FB"/>
+                    </a:solidFill>
+                  </a:tcPr>
+                </a:tc>
+                <a:tc>
+                  <a:txBody>
+                    <a:bodyPr/>
+                    <a:lstStyle/>
+                    <a:p>
+                      <a:r>
+                        <a:rPr sz="950" b="0">
+                          <a:solidFill>
+                            <a:srgbClr val="2B2F36"/>
+                          </a:solidFill>
+                          <a:latin typeface="微软雅黑"/>
+                        </a:rPr>
+                        <a:t>准确率≥0.85 且有训练曲线（实测 1.0000 / 1 张）</a:t>
+                      </a:r>
+                    </a:p>
+                  </a:txBody>
+                  <a:tcPr>
+                    <a:solidFill>
+                      <a:srgbClr val="F7F9FB"/>
+                    </a:solidFill>
+                  </a:tcPr>
+                </a:tc>
+                <a:tc>
+                  <a:txBody>
+                    <a:bodyPr/>
+                    <a:lstStyle/>
+                    <a:p>
+                      <a:r>
+                        <a:rPr sz="950" b="0">
+                          <a:solidFill>
+                            <a:srgbClr val="2B2F36"/>
+                          </a:solidFill>
+                          <a:latin typeface="微软雅黑"/>
+                        </a:rPr>
+                        <a:t>规范率门槛≥70% [达标] ｜ 功能OK</a:t>
+                      </a:r>
+                    </a:p>
+                  </a:txBody>
+                  <a:tcPr>
+                    <a:solidFill>
+                      <a:srgbClr val="F7F9FB"/>
+                    </a:solidFill>
+                  </a:tcPr>
+                </a:tc>
+                <a:tc>
+                  <a:txBody>
+                    <a:bodyPr/>
+                    <a:lstStyle/>
+                    <a:p>
+                      <a:r>
+                        <a:rPr sz="1000" b="1">
+                          <a:solidFill>
+                            <a:srgbClr val="2E7D46"/>
+                          </a:solidFill>
+                          <a:latin typeface="微软雅黑"/>
+                        </a:rPr>
+                        <a:t>✓ 达标</a:t>
+                      </a:r>
+                    </a:p>
+                  </a:txBody>
+                  <a:tcPr>
+                    <a:solidFill>
+                      <a:srgbClr val="F7F9FB"/>
+                    </a:solidFill>
+                  </a:tcPr>
+                </a:tc>
+              </a:tr>
+            </a:tbl>
+          </a:graphicData>
+        </a:graphic>
+      </p:graphicFrame>
+      <p:sp>
+        <p:nvSpPr>
+          <p:cNvPr id="27" name="Rectangle 26"/>
+          <p:cNvSpPr/>
+          <p:nvPr/>
+        </p:nvSpPr>
+        <p:spPr>
+          <a:xfrm>
+            <a:off x="457200" y="5138928"/>
+            <a:ext cx="11274552" cy="1261872"/>
+          </a:xfrm>
+          <a:prstGeom prst="rect">
+            <a:avLst/>
+          </a:prstGeom>
+          <a:solidFill>
+            <a:srgbClr val="FFF7E8"/>
+          </a:solidFill>
+          <a:ln>
+            <a:solidFill>
+              <a:srgbClr val="E8C88A"/>
+            </a:solidFill>
+          </a:ln>
+          <a:effectLst/>
+        </p:spPr>
+        <p:style>
+          <a:lnRef idx="1">
+            <a:schemeClr val="accent1"/>
+          </a:lnRef>
+          <a:fillRef idx="3">
+            <a:schemeClr val="accent1"/>
+          </a:fillRef>
+          <a:effectRef idx="2">
+            <a:schemeClr val="accent1"/>
+          </a:effectRef>
+          <a:fontRef idx="minor">
+            <a:schemeClr val="lt1"/>
+          </a:fontRef>
+        </p:style>
+        <p:txBody>
+          <a:bodyPr rtlCol="0" anchor="ctr" wrap="square"/>
+          <a:lstStyle/>
+          <a:p>
+            <a:pPr algn="ctr"/>
+          </a:p>
+        </p:txBody>
+      </p:sp>
+      <p:sp>
+        <p:nvSpPr>
+          <p:cNvPr id="28" name="TextBox 27"/>
+          <p:cNvSpPr txBox="1"/>
+          <p:nvPr/>
+        </p:nvSpPr>
+        <p:spPr>
+          <a:xfrm>
+            <a:off x="621792" y="5212080"/>
+            <a:ext cx="10927080" cy="1133856"/>
+          </a:xfrm>
+          <a:prstGeom prst="rect">
+            <a:avLst/>
+          </a:prstGeom>
+          <a:noFill/>
+        </p:spPr>
+        <p:txBody>
+          <a:bodyPr wrap="square">
+            <a:spAutoFit/>
+          </a:bodyPr>
+          <a:lstStyle/>
+          <a:p>
+            <a:r>
+              <a:rPr sz="950" b="0">
+                <a:solidFill>
+                  <a:srgbClr val="6B4E16"/>
+                </a:solidFill>
+                <a:latin typeface="微软雅黑"/>
+              </a:rPr>
+              <a:t>人工答辩项 3 条（代码不代判，答辩现场确认）：决策结论与理由的口头陈述（工单：答辩必答）；企业元验收栏签认（功能可用/参数留痕/数据可信，值班师傅签字）；底座口径是否可接受（真ResNet=本地缓存离线载入 / 兜底=本地CNN，实测证据见报告底座口径段）</a:t>
+            </a:r>
+          </a:p>
+          <a:p>
+            <a:r>
+              <a:rPr sz="950" b="0">
+                <a:solidFill>
+                  <a:srgbClr val="6B4E16"/>
+                </a:solidFill>
+                <a:latin typeface="微软雅黑"/>
+              </a:rPr>
+              <a:t>档位是算出来的：判定值由 run.py 本次真跑产生；工单未给数字的门槛在报告里标注为「兜底口径·非工单数字」。</a:t>
+            </a:r>
+          </a:p>
+          <a:p>
+            <a:r>
+              <a:rPr sz="950" b="0">
+                <a:solidFill>
+                  <a:srgbClr val="6B4E16"/>
+                </a:solidFill>
+                <a:latin typeface="微软雅黑"/>
+              </a:rPr>
+              <a:t>实测值共 6 项，本页只列前 5 项，其余见下页 report.txt 截图。</a:t>
+            </a:r>
+          </a:p>
+        </p:txBody>
+      </p:sp>
+    </p:spTree>
+  </p:cSld>
+  <p:clrMapOvr>
+    <a:masterClrMapping/>
+  </p:clrMapOvr>
+</p:sld>
+</file>
+
+<file path=ppt/slides/slide12.xml><?xml version="1.0" encoding="utf-8"?>
+<p:sld xmlns:a="http://schemas.openxmlformats.org/drawingml/2006/main" xmlns:p="http://schemas.openxmlformats.org/presentationml/2006/main" xmlns:r="http://schemas.openxmlformats.org/officeDocument/2006/relationships">
+  <p:cSld>
+    <p:spTree>
+      <p:nvGrpSpPr>
+        <p:cNvPr id="1" name=""/>
+        <p:cNvGrpSpPr/>
+        <p:nvPr/>
+      </p:nvGrpSpPr>
+      <p:grpSpPr/>
+      <p:sp>
+        <p:nvSpPr>
+          <p:cNvPr id="2" name="Rectangle 1"/>
+          <p:cNvSpPr/>
+          <p:nvPr/>
+        </p:nvSpPr>
+        <p:spPr>
+          <a:xfrm>
+            <a:off x="0" y="0"/>
+            <a:ext cx="12192000" cy="1150000"/>
+          </a:xfrm>
+          <a:prstGeom prst="rect">
+            <a:avLst/>
+          </a:prstGeom>
+          <a:solidFill>
+            <a:srgbClr val="010328"/>
+          </a:solidFill>
+          <a:ln>
+            <a:noFill/>
+          </a:ln>
+          <a:effectLst/>
+        </p:spPr>
+        <p:style>
+          <a:lnRef idx="1">
+            <a:schemeClr val="accent1"/>
+          </a:lnRef>
+          <a:fillRef idx="3">
+            <a:schemeClr val="accent1"/>
+          </a:fillRef>
+          <a:effectRef idx="2">
+            <a:schemeClr val="accent1"/>
+          </a:effectRef>
+          <a:fontRef idx="minor">
+            <a:schemeClr val="lt1"/>
+          </a:fontRef>
+        </p:style>
+        <p:txBody>
+          <a:bodyPr rtlCol="0" anchor="ctr"/>
+          <a:lstStyle/>
+          <a:p>
+            <a:pPr algn="ctr"/>
+          </a:p>
+        </p:txBody>
+      </p:sp>
+      <p:sp>
+        <p:nvSpPr>
+          <p:cNvPr id="3" name="Rectangle 2"/>
+          <p:cNvSpPr/>
+          <p:nvPr/>
+        </p:nvSpPr>
+        <p:spPr>
+          <a:xfrm>
+            <a:off x="0" y="1150000"/>
+            <a:ext cx="2600000" cy="70000"/>
+          </a:xfrm>
+          <a:prstGeom prst="rect">
+            <a:avLst/>
+          </a:prstGeom>
+          <a:solidFill>
+            <a:srgbClr val="F5670F"/>
+          </a:solidFill>
+          <a:ln>
+            <a:noFill/>
+          </a:ln>
+          <a:effectLst/>
+        </p:spPr>
+        <p:style>
+          <a:lnRef idx="1">
+            <a:schemeClr val="accent1"/>
+          </a:lnRef>
+          <a:fillRef idx="3">
+            <a:schemeClr val="accent1"/>
+          </a:fillRef>
+          <a:effectRef idx="2">
+            <a:schemeClr val="accent1"/>
+          </a:effectRef>
+          <a:fontRef idx="minor">
+            <a:schemeClr val="lt1"/>
+          </a:fontRef>
+        </p:style>
+        <p:txBody>
+          <a:bodyPr rtlCol="0" anchor="ctr"/>
+          <a:lstStyle/>
+          <a:p>
+            <a:pPr algn="ctr"/>
+          </a:p>
+        </p:txBody>
+      </p:sp>
+      <p:sp>
+        <p:nvSpPr>
+          <p:cNvPr id="4" name="TextBox 3"/>
+          <p:cNvSpPr txBox="1"/>
+          <p:nvPr/>
+        </p:nvSpPr>
+        <p:spPr>
+          <a:xfrm>
+            <a:off x="700000" y="300000"/>
+            <a:ext cx="10792000" cy="700000"/>
+          </a:xfrm>
+          <a:prstGeom prst="rect">
+            <a:avLst/>
+          </a:prstGeom>
+          <a:noFill/>
+        </p:spPr>
+        <p:txBody>
+          <a:bodyPr wrap="square" anchor="t">
+            <a:spAutoFit/>
+          </a:bodyPr>
+          <a:lstStyle/>
+          <a:p>
+            <a:pPr algn="l">
+              <a:lnSpc>
+                <a:spcPct val="110000"/>
+              </a:lnSpc>
+              <a:spcAft>
+                <a:spcPts val="600"/>
+              </a:spcAft>
+            </a:pPr>
+            <a:r>
+              <a:rPr sz="2400" b="1">
+                <a:solidFill>
+                  <a:srgbClr val="FFFFFF"/>
+                </a:solidFill>
+                <a:latin typeface="微软雅黑"/>
+              </a:rPr>
+              <a:t>实跑截图证据 · m31_transfer</a:t>
+            </a:r>
+          </a:p>
+        </p:txBody>
+      </p:sp>
+      <p:sp>
+        <p:nvSpPr>
+          <p:cNvPr id="11" name="Rectangle 10"/>
+          <p:cNvSpPr/>
+          <p:nvPr/>
+        </p:nvSpPr>
+        <p:spPr>
+          <a:xfrm>
+            <a:off x="500000" y="6500000"/>
+            <a:ext cx="11100000" cy="20000"/>
+          </a:xfrm>
+          <a:prstGeom prst="rect">
+            <a:avLst/>
+          </a:prstGeom>
+          <a:solidFill>
+            <a:srgbClr val="C9D4EE"/>
+          </a:solidFill>
+          <a:ln>
+            <a:noFill/>
+          </a:ln>
+          <a:effectLst/>
+        </p:spPr>
+        <p:style>
+          <a:lnRef idx="1">
+            <a:schemeClr val="accent1"/>
+          </a:lnRef>
+          <a:fillRef idx="3">
+            <a:schemeClr val="accent1"/>
+          </a:fillRef>
+          <a:effectRef idx="2">
+            <a:schemeClr val="accent1"/>
+          </a:effectRef>
+          <a:fontRef idx="minor">
+            <a:schemeClr val="lt1"/>
+          </a:fontRef>
+        </p:style>
+        <p:txBody>
+          <a:bodyPr rtlCol="0" anchor="ctr"/>
+          <a:lstStyle/>
+          <a:p>
+            <a:pPr algn="ctr"/>
+          </a:p>
+        </p:txBody>
+      </p:sp>
+      <p:sp>
+        <p:nvSpPr>
+          <p:cNvPr id="12" name="TextBox 11"/>
+          <p:cNvSpPr txBox="1"/>
+          <p:nvPr/>
+        </p:nvSpPr>
+        <p:spPr>
+          <a:xfrm>
+            <a:off x="500000" y="6540000"/>
+            <a:ext cx="7000000" cy="300000"/>
+          </a:xfrm>
+          <a:prstGeom prst="rect">
+            <a:avLst/>
+          </a:prstGeom>
+          <a:noFill/>
+        </p:spPr>
+        <p:txBody>
+          <a:bodyPr wrap="square" anchor="t">
+            <a:spAutoFit/>
+          </a:bodyPr>
+          <a:lstStyle/>
+          <a:p>
+            <a:pPr algn="l">
+              <a:lnSpc>
+                <a:spcPct val="110000"/>
+              </a:lnSpc>
+              <a:spcAft>
+                <a:spcPts val="600"/>
+              </a:spcAft>
+            </a:pPr>
+            <a:r>
+              <a:rPr sz="1000" b="0">
+                <a:solidFill>
+                  <a:srgbClr val="8A97B5"/>
+                </a:solidFill>
+                <a:latin typeface="微软雅黑"/>
+              </a:rPr>
+              <a:t>两江智造集团 · AI应用基础48课时版</a:t>
+            </a:r>
+          </a:p>
+        </p:txBody>
+      </p:sp>
+      <p:sp>
+        <p:nvSpPr>
+          <p:cNvPr id="13" name="TextBox 12"/>
+          <p:cNvSpPr txBox="1"/>
+          <p:nvPr/>
+        </p:nvSpPr>
+        <p:spPr>
+          <a:xfrm>
+            <a:off x="10600000" y="6540000"/>
+            <a:ext cx="1000000" cy="300000"/>
+          </a:xfrm>
+          <a:prstGeom prst="rect">
+            <a:avLst/>
+          </a:prstGeom>
+          <a:noFill/>
+        </p:spPr>
+        <p:txBody>
+          <a:bodyPr wrap="square" anchor="t">
+            <a:spAutoFit/>
+          </a:bodyPr>
+          <a:lstStyle/>
+          <a:p>
+            <a:pPr algn="r">
+              <a:lnSpc>
+                <a:spcPct val="110000"/>
+              </a:lnSpc>
+              <a:spcAft>
+                <a:spcPts val="600"/>
+              </a:spcAft>
+            </a:pPr>
+            <a:r>
+              <a:rPr sz="1000" b="0">
+                <a:solidFill>
+                  <a:srgbClr val="8A97B5"/>
+                </a:solidFill>
+                <a:latin typeface="微软雅黑"/>
+              </a:rPr>
+              <a:t>9 / 13</a:t>
+            </a:r>
+          </a:p>
+        </p:txBody>
+      </p:sp>
+      <p:sp>
+        <p:nvSpPr>
+          <p:cNvPr id="14" name="Rectangle 13"/>
+          <p:cNvSpPr/>
+          <p:nvPr/>
+        </p:nvSpPr>
+        <p:spPr>
+          <a:xfrm>
+            <a:off x="457200" y="1481328"/>
+            <a:ext cx="5486400" cy="2304288"/>
+          </a:xfrm>
+          <a:prstGeom prst="rect">
+            <a:avLst/>
+          </a:prstGeom>
+          <a:solidFill>
+            <a:srgbClr val="FFFFFF"/>
+          </a:solidFill>
+          <a:ln>
+            <a:solidFill>
+              <a:srgbClr val="D6DCE4"/>
+            </a:solidFill>
+          </a:ln>
+          <a:effectLst/>
+        </p:spPr>
+        <p:style>
+          <a:lnRef idx="1">
+            <a:schemeClr val="accent1"/>
+          </a:lnRef>
+          <a:fillRef idx="3">
+            <a:schemeClr val="accent1"/>
+          </a:fillRef>
+          <a:effectRef idx="2">
+            <a:schemeClr val="accent1"/>
+          </a:effectRef>
+          <a:fontRef idx="minor">
+            <a:schemeClr val="lt1"/>
+          </a:fontRef>
+        </p:style>
+        <p:txBody>
+          <a:bodyPr rtlCol="0" anchor="ctr" wrap="square"/>
+          <a:lstStyle/>
+          <a:p>
+            <a:pPr algn="ctr"/>
+          </a:p>
+        </p:txBody>
+      </p:sp>
+      <p:sp>
+        <p:nvSpPr>
+          <p:cNvPr id="15" name="TextBox 14"/>
+          <p:cNvSpPr txBox="1"/>
+          <p:nvPr/>
+        </p:nvSpPr>
+        <p:spPr>
+          <a:xfrm>
+            <a:off x="530352" y="1517904"/>
+            <a:ext cx="5340096" cy="237744"/>
+          </a:xfrm>
+          <a:prstGeom prst="rect">
+            <a:avLst/>
+          </a:prstGeom>
+          <a:noFill/>
+        </p:spPr>
+        <p:txBody>
+          <a:bodyPr wrap="square">
+            <a:spAutoFit/>
+          </a:bodyPr>
+          <a:lstStyle/>
+          <a:p>
+            <a:r>
+              <a:rPr sz="950" b="1">
+                <a:solidFill>
+                  <a:srgbClr val="010328"/>
+                </a:solidFill>
+                <a:latin typeface="微软雅黑"/>
+              </a:rPr>
+              <a:t>① run.py 实跑终端输出（逐字捕获）</a:t>
+            </a:r>
+          </a:p>
+        </p:txBody>
+      </p:sp>
+      <p:pic>
+        <p:nvPicPr>
+          <p:cNvPr id="16" name="Picture 15" descr="shot_run.png"/>
+          <p:cNvPicPr>
+            <a:picLocks noChangeAspect="1"/>
+          </p:cNvPicPr>
+          <p:nvPr/>
+        </p:nvPicPr>
+        <p:blipFill>
+          <a:blip r:embed="rId2"/>
+          <a:stretch>
+            <a:fillRect/>
+          </a:stretch>
+        </p:blipFill>
+        <p:spPr>
+          <a:xfrm>
+            <a:off x="964038" y="1773936"/>
+            <a:ext cx="4472722" cy="1956816"/>
+          </a:xfrm>
+          <a:prstGeom prst="rect">
+            <a:avLst/>
+          </a:prstGeom>
+        </p:spPr>
+      </p:pic>
+      <p:sp>
+        <p:nvSpPr>
+          <p:cNvPr id="17" name="Rectangle 16"/>
+          <p:cNvSpPr/>
+          <p:nvPr/>
+        </p:nvSpPr>
+        <p:spPr>
+          <a:xfrm>
+            <a:off x="6327648" y="1481328"/>
+            <a:ext cx="5486400" cy="2304288"/>
+          </a:xfrm>
+          <a:prstGeom prst="rect">
+            <a:avLst/>
+          </a:prstGeom>
+          <a:solidFill>
+            <a:srgbClr val="FFFFFF"/>
+          </a:solidFill>
+          <a:ln>
+            <a:solidFill>
+              <a:srgbClr val="D6DCE4"/>
+            </a:solidFill>
+          </a:ln>
+          <a:effectLst/>
+        </p:spPr>
+        <p:style>
+          <a:lnRef idx="1">
+            <a:schemeClr val="accent1"/>
+          </a:lnRef>
+          <a:fillRef idx="3">
+            <a:schemeClr val="accent1"/>
+          </a:fillRef>
+          <a:effectRef idx="2">
+            <a:schemeClr val="accent1"/>
+          </a:effectRef>
+          <a:fontRef idx="minor">
+            <a:schemeClr val="lt1"/>
+          </a:fontRef>
+        </p:style>
+        <p:txBody>
+          <a:bodyPr rtlCol="0" anchor="ctr" wrap="square"/>
+          <a:lstStyle/>
+          <a:p>
+            <a:pPr algn="ctr"/>
+          </a:p>
+        </p:txBody>
+      </p:sp>
+      <p:sp>
+        <p:nvSpPr>
+          <p:cNvPr id="18" name="TextBox 17"/>
+          <p:cNvSpPr txBox="1"/>
+          <p:nvPr/>
+        </p:nvSpPr>
+        <p:spPr>
+          <a:xfrm>
+            <a:off x="6400800" y="1517904"/>
+            <a:ext cx="5340096" cy="237744"/>
+          </a:xfrm>
+          <a:prstGeom prst="rect">
+            <a:avLst/>
+          </a:prstGeom>
+          <a:noFill/>
+        </p:spPr>
+        <p:txBody>
+          <a:bodyPr wrap="square">
+            <a:spAutoFit/>
+          </a:bodyPr>
+          <a:lstStyle/>
+          <a:p>
+            <a:r>
+              <a:rPr sz="950" b="1">
+                <a:solidFill>
+                  <a:srgbClr val="010328"/>
+                </a:solidFill>
+                <a:latin typeface="微软雅黑"/>
+              </a:rPr>
+              <a:t>② pytest 全绿终端输出（逐字捕获）</a:t>
+            </a:r>
+          </a:p>
+        </p:txBody>
+      </p:sp>
+      <p:pic>
+        <p:nvPicPr>
+          <p:cNvPr id="19" name="Picture 18" descr="shot_test.png"/>
+          <p:cNvPicPr>
+            <a:picLocks noChangeAspect="1"/>
+          </p:cNvPicPr>
+          <p:nvPr/>
+        </p:nvPicPr>
+        <p:blipFill>
+          <a:blip r:embed="rId3"/>
+          <a:stretch>
+            <a:fillRect/>
+          </a:stretch>
+        </p:blipFill>
+        <p:spPr>
+          <a:xfrm>
+            <a:off x="6834486" y="1773936"/>
+            <a:ext cx="4472722" cy="1956816"/>
+          </a:xfrm>
+          <a:prstGeom prst="rect">
+            <a:avLst/>
+          </a:prstGeom>
+        </p:spPr>
+      </p:pic>
+      <p:sp>
+        <p:nvSpPr>
+          <p:cNvPr id="20" name="Rectangle 19"/>
+          <p:cNvSpPr/>
+          <p:nvPr/>
+        </p:nvSpPr>
+        <p:spPr>
+          <a:xfrm>
+            <a:off x="457200" y="3877056"/>
+            <a:ext cx="5486400" cy="2304288"/>
+          </a:xfrm>
+          <a:prstGeom prst="rect">
+            <a:avLst/>
+          </a:prstGeom>
+          <a:solidFill>
+            <a:srgbClr val="FFFFFF"/>
+          </a:solidFill>
+          <a:ln>
+            <a:solidFill>
+              <a:srgbClr val="D6DCE4"/>
+            </a:solidFill>
+          </a:ln>
+          <a:effectLst/>
+        </p:spPr>
+        <p:style>
+          <a:lnRef idx="1">
+            <a:schemeClr val="accent1"/>
+          </a:lnRef>
+          <a:fillRef idx="3">
+            <a:schemeClr val="accent1"/>
+          </a:fillRef>
+          <a:effectRef idx="2">
+            <a:schemeClr val="accent1"/>
+          </a:effectRef>
+          <a:fontRef idx="minor">
+            <a:schemeClr val="lt1"/>
+          </a:fontRef>
+        </p:style>
+        <p:txBody>
+          <a:bodyPr rtlCol="0" anchor="ctr" wrap="square"/>
+          <a:lstStyle/>
+          <a:p>
+            <a:pPr algn="ctr"/>
+          </a:p>
+        </p:txBody>
+      </p:sp>
+      <p:sp>
+        <p:nvSpPr>
+          <p:cNvPr id="21" name="TextBox 20"/>
+          <p:cNvSpPr txBox="1"/>
+          <p:nvPr/>
+        </p:nvSpPr>
+        <p:spPr>
+          <a:xfrm>
+            <a:off x="530352" y="3913632"/>
+            <a:ext cx="5340096" cy="237744"/>
+          </a:xfrm>
+          <a:prstGeom prst="rect">
+            <a:avLst/>
+          </a:prstGeom>
+          <a:noFill/>
+        </p:spPr>
+        <p:txBody>
+          <a:bodyPr wrap="square">
+            <a:spAutoFit/>
+          </a:bodyPr>
+          <a:lstStyle/>
+          <a:p>
+            <a:r>
+              <a:rPr sz="950" b="1">
+                <a:solidFill>
+                  <a:srgbClr val="010328"/>
+                </a:solidFill>
+                <a:latin typeface="微软雅黑"/>
+              </a:rPr>
+              <a:t>③ report.txt「验收档位判定（实测）」段</a:t>
+            </a:r>
+          </a:p>
+        </p:txBody>
+      </p:sp>
+      <p:pic>
+        <p:nvPicPr>
+          <p:cNvPr id="22" name="Picture 21" descr="shot_report.png"/>
+          <p:cNvPicPr>
+            <a:picLocks noChangeAspect="1"/>
+          </p:cNvPicPr>
+          <p:nvPr/>
+        </p:nvPicPr>
+        <p:blipFill>
+          <a:blip r:embed="rId4"/>
+          <a:stretch>
+            <a:fillRect/>
+          </a:stretch>
+        </p:blipFill>
+        <p:spPr>
+          <a:xfrm>
+            <a:off x="964038" y="4169664"/>
+            <a:ext cx="4472722" cy="1956816"/>
+          </a:xfrm>
+          <a:prstGeom prst="rect">
+            <a:avLst/>
+          </a:prstGeom>
+        </p:spPr>
+      </p:pic>
+      <p:sp>
+        <p:nvSpPr>
+          <p:cNvPr id="23" name="Rectangle 22"/>
+          <p:cNvSpPr/>
+          <p:nvPr/>
+        </p:nvSpPr>
+        <p:spPr>
+          <a:xfrm>
+            <a:off x="6327648" y="3877056"/>
+            <a:ext cx="5486400" cy="2304288"/>
+          </a:xfrm>
+          <a:prstGeom prst="rect">
+            <a:avLst/>
+          </a:prstGeom>
+          <a:solidFill>
+            <a:srgbClr val="F7F9FB"/>
+          </a:solidFill>
+          <a:ln>
+            <a:solidFill>
+              <a:srgbClr val="D6DCE4"/>
+            </a:solidFill>
+          </a:ln>
+          <a:effectLst/>
+        </p:spPr>
+        <p:style>
+          <a:lnRef idx="1">
+            <a:schemeClr val="accent1"/>
+          </a:lnRef>
+          <a:fillRef idx="3">
+            <a:schemeClr val="accent1"/>
+          </a:fillRef>
+          <a:effectRef idx="2">
+            <a:schemeClr val="accent1"/>
+          </a:effectRef>
+          <a:fontRef idx="minor">
+            <a:schemeClr val="lt1"/>
+          </a:fontRef>
+        </p:style>
+        <p:txBody>
+          <a:bodyPr rtlCol="0" anchor="ctr" wrap="square"/>
+          <a:lstStyle/>
+          <a:p>
+            <a:pPr algn="ctr"/>
+          </a:p>
+        </p:txBody>
+      </p:sp>
+      <p:sp>
+        <p:nvSpPr>
+          <p:cNvPr id="24" name="TextBox 23"/>
+          <p:cNvSpPr txBox="1"/>
+          <p:nvPr/>
+        </p:nvSpPr>
+        <p:spPr>
+          <a:xfrm>
+            <a:off x="6400800" y="3913632"/>
+            <a:ext cx="5340096" cy="237744"/>
+          </a:xfrm>
+          <a:prstGeom prst="rect">
+            <a:avLst/>
+          </a:prstGeom>
+          <a:noFill/>
+        </p:spPr>
+        <p:txBody>
+          <a:bodyPr wrap="square">
+            <a:spAutoFit/>
+          </a:bodyPr>
+          <a:lstStyle/>
+          <a:p>
+            <a:r>
+              <a:rPr sz="950" b="1">
+                <a:solidFill>
+                  <a:srgbClr val="010328"/>
+                </a:solidFill>
+                <a:latin typeface="微软雅黑"/>
+              </a:rPr>
+              <a:t>④ 采集口径（可复现）</a:t>
+            </a:r>
+          </a:p>
+        </p:txBody>
+      </p:sp>
+      <p:sp>
+        <p:nvSpPr>
+          <p:cNvPr id="25" name="TextBox 24"/>
+          <p:cNvSpPr txBox="1"/>
+          <p:nvPr/>
+        </p:nvSpPr>
+        <p:spPr>
+          <a:xfrm>
+            <a:off x="6437376" y="4187952"/>
+            <a:ext cx="5266944" cy="1920240"/>
+          </a:xfrm>
+          <a:prstGeom prst="rect">
+            <a:avLst/>
+          </a:prstGeom>
+          <a:noFill/>
+        </p:spPr>
+        <p:txBody>
+          <a:bodyPr wrap="square">
+            <a:spAutoFit/>
+          </a:bodyPr>
+          <a:lstStyle/>
+          <a:p>
+            <a:r>
+              <a:rPr sz="950" b="0">
+                <a:solidFill>
+                  <a:srgbClr val="2B2F36"/>
+                </a:solidFill>
+                <a:latin typeface="微软雅黑"/>
+              </a:rPr>
+              <a:t>项目：05-AI应用基础48课时版/工程化项目/m31_transfer/</a:t>
+            </a:r>
+          </a:p>
+          <a:p>
+            <a:r>
+              <a:rPr sz="950" b="0">
+                <a:solidFill>
+                  <a:srgbClr val="2B2F36"/>
+                </a:solidFill>
+                <a:latin typeface="微软雅黑"/>
+              </a:rPr>
+              <a:t>命令：/opt/anaconda3/bin/python run.py ｜ /opt/anaconda3/bin/python -m pytest -q</a:t>
+            </a:r>
+          </a:p>
+          <a:p>
+            <a:r>
+              <a:rPr sz="950" b="0">
+                <a:solidFill>
+                  <a:srgbClr val="2B2F36"/>
+                </a:solidFill>
+                <a:latin typeface="微软雅黑"/>
+              </a:rPr>
+              <a:t>采集：工具/ppt97/capture97.py（2026-10-28 10:50 真跑逐字捕获输出）</a:t>
+            </a:r>
+          </a:p>
+          <a:p>
+            <a:r>
+              <a:rPr sz="950" b="0">
+                <a:solidFill>
+                  <a:srgbClr val="2B2F36"/>
+                </a:solidFill>
+                <a:latin typeface="微软雅黑"/>
+              </a:rPr>
+              <a:t>渲染：工具/ppt97/terminal_png.py（终端截图，不改写任何数字）</a:t>
+            </a:r>
+          </a:p>
+          <a:p>
+            <a:r>
+              <a:rPr sz="950" b="0">
+                <a:solidFill>
+                  <a:srgbClr val="2B2F36"/>
+                </a:solidFill>
+                <a:latin typeface="微软雅黑"/>
+              </a:rPr>
+              <a:t>退出码：run=0 ｜ pytest=0</a:t>
+            </a:r>
+          </a:p>
+          <a:p>
+            <a:r>
+              <a:rPr sz="950" b="0">
+                <a:solidFill>
+                  <a:srgbClr val="2B2F36"/>
+                </a:solidFill>
+                <a:latin typeface="微软雅黑"/>
+              </a:rPr>
+              <a:t>档位判定取自 output/report.txt「验收档位判定（实测）」段</a:t>
+            </a:r>
+          </a:p>
+        </p:txBody>
+      </p:sp>
+      <p:sp>
+        <p:nvSpPr>
+          <p:cNvPr id="26" name="TextBox 25"/>
+          <p:cNvSpPr txBox="1"/>
+          <p:nvPr/>
+        </p:nvSpPr>
+        <p:spPr>
+          <a:xfrm>
+            <a:off x="457200" y="6254496"/>
+            <a:ext cx="11247120" cy="201168"/>
+          </a:xfrm>
+          <a:prstGeom prst="rect">
+            <a:avLst/>
+          </a:prstGeom>
+          <a:noFill/>
+        </p:spPr>
+        <p:txBody>
+          <a:bodyPr wrap="square">
+            <a:spAutoFit/>
+          </a:bodyPr>
+          <a:lstStyle/>
+          <a:p>
+            <a:r>
+              <a:rPr sz="900" b="0">
+                <a:solidFill>
+                  <a:srgbClr val="7A8698"/>
+                </a:solidFill>
+                <a:latin typeface="微软雅黑"/>
+              </a:rPr>
+              <a:t>截图内容逐字取自 工具/ppt97/evidence/m31_transfer/（capture97.py 真跑捕获，未改写数字）</a:t>
+            </a:r>
+          </a:p>
+        </p:txBody>
+      </p:sp>
+    </p:spTree>
+  </p:cSld>
+  <p:clrMapOvr>
+    <a:masterClrMapping/>
+  </p:clrMapOvr>
+</p:sld>
+</file>
+
+<file path=ppt/slides/slide13.xml><?xml version="1.0" encoding="utf-8"?>
+<p:sld xmlns:a="http://schemas.openxmlformats.org/drawingml/2006/main" xmlns:p="http://schemas.openxmlformats.org/presentationml/2006/main" xmlns:r="http://schemas.openxmlformats.org/officeDocument/2006/relationships">
+  <p:cSld>
+    <p:spTree>
+      <p:nvGrpSpPr>
+        <p:cNvPr id="1" name=""/>
+        <p:cNvGrpSpPr/>
+        <p:nvPr/>
+      </p:nvGrpSpPr>
+      <p:grpSpPr/>
+      <p:sp>
+        <p:nvSpPr>
+          <p:cNvPr id="2" name="Rectangle 1"/>
+          <p:cNvSpPr/>
+          <p:nvPr/>
+        </p:nvSpPr>
+        <p:spPr>
+          <a:xfrm>
+            <a:off x="0" y="0"/>
+            <a:ext cx="12192000" cy="1150000"/>
+          </a:xfrm>
+          <a:prstGeom prst="rect">
+            <a:avLst/>
+          </a:prstGeom>
+          <a:solidFill>
+            <a:srgbClr val="010328"/>
+          </a:solidFill>
+          <a:ln>
+            <a:noFill/>
+          </a:ln>
+          <a:effectLst/>
+        </p:spPr>
+        <p:style>
+          <a:lnRef idx="1">
+            <a:schemeClr val="accent1"/>
+          </a:lnRef>
+          <a:fillRef idx="3">
+            <a:schemeClr val="accent1"/>
+          </a:fillRef>
+          <a:effectRef idx="2">
+            <a:schemeClr val="accent1"/>
+          </a:effectRef>
+          <a:fontRef idx="minor">
+            <a:schemeClr val="lt1"/>
+          </a:fontRef>
+        </p:style>
+        <p:txBody>
+          <a:bodyPr rtlCol="0" anchor="ctr"/>
+          <a:lstStyle/>
+          <a:p>
+            <a:pPr algn="ctr"/>
+          </a:p>
+        </p:txBody>
+      </p:sp>
+      <p:sp>
+        <p:nvSpPr>
+          <p:cNvPr id="3" name="Rectangle 2"/>
+          <p:cNvSpPr/>
+          <p:nvPr/>
+        </p:nvSpPr>
+        <p:spPr>
+          <a:xfrm>
+            <a:off x="0" y="1150000"/>
+            <a:ext cx="2600000" cy="70000"/>
+          </a:xfrm>
+          <a:prstGeom prst="rect">
+            <a:avLst/>
+          </a:prstGeom>
+          <a:solidFill>
+            <a:srgbClr val="F5670F"/>
+          </a:solidFill>
+          <a:ln>
+            <a:noFill/>
+          </a:ln>
+          <a:effectLst/>
+        </p:spPr>
+        <p:style>
+          <a:lnRef idx="1">
+            <a:schemeClr val="accent1"/>
+          </a:lnRef>
+          <a:fillRef idx="3">
+            <a:schemeClr val="accent1"/>
+          </a:fillRef>
+          <a:effectRef idx="2">
+            <a:schemeClr val="accent1"/>
+          </a:effectRef>
+          <a:fontRef idx="minor">
+            <a:schemeClr val="lt1"/>
+          </a:fontRef>
+        </p:style>
+        <p:txBody>
+          <a:bodyPr rtlCol="0" anchor="ctr"/>
+          <a:lstStyle/>
+          <a:p>
+            <a:pPr algn="ctr"/>
+          </a:p>
+        </p:txBody>
+      </p:sp>
+      <p:sp>
+        <p:nvSpPr>
+          <p:cNvPr id="4" name="TextBox 3"/>
+          <p:cNvSpPr txBox="1"/>
+          <p:nvPr/>
+        </p:nvSpPr>
+        <p:spPr>
+          <a:xfrm>
+            <a:off x="700000" y="300000"/>
+            <a:ext cx="10792000" cy="700000"/>
+          </a:xfrm>
+          <a:prstGeom prst="rect">
+            <a:avLst/>
+          </a:prstGeom>
+          <a:noFill/>
+        </p:spPr>
+        <p:txBody>
+          <a:bodyPr wrap="square" anchor="t">
+            <a:spAutoFit/>
+          </a:bodyPr>
+          <a:lstStyle/>
+          <a:p>
+            <a:pPr algn="l">
+              <a:lnSpc>
+                <a:spcPct val="110000"/>
+              </a:lnSpc>
+              <a:spcAft>
+                <a:spcPts val="600"/>
+              </a:spcAft>
+            </a:pPr>
+            <a:r>
+              <a:rPr sz="2400" b="1">
+                <a:solidFill>
+                  <a:srgbClr val="FFFFFF"/>
+                </a:solidFill>
+                <a:latin typeface="微软雅黑"/>
+              </a:rPr>
+              <a:t>产出图证据 · m31_transfer</a:t>
+            </a:r>
+          </a:p>
+        </p:txBody>
+      </p:sp>
+      <p:sp>
+        <p:nvSpPr>
+          <p:cNvPr id="11" name="Rectangle 10"/>
+          <p:cNvSpPr/>
+          <p:nvPr/>
+        </p:nvSpPr>
+        <p:spPr>
+          <a:xfrm>
+            <a:off x="500000" y="6500000"/>
+            <a:ext cx="11100000" cy="20000"/>
+          </a:xfrm>
+          <a:prstGeom prst="rect">
+            <a:avLst/>
+          </a:prstGeom>
+          <a:solidFill>
+            <a:srgbClr val="C9D4EE"/>
+          </a:solidFill>
+          <a:ln>
+            <a:noFill/>
+          </a:ln>
+          <a:effectLst/>
+        </p:spPr>
+        <p:style>
+          <a:lnRef idx="1">
+            <a:schemeClr val="accent1"/>
+          </a:lnRef>
+          <a:fillRef idx="3">
+            <a:schemeClr val="accent1"/>
+          </a:fillRef>
+          <a:effectRef idx="2">
+            <a:schemeClr val="accent1"/>
+          </a:effectRef>
+          <a:fontRef idx="minor">
+            <a:schemeClr val="lt1"/>
+          </a:fontRef>
+        </p:style>
+        <p:txBody>
+          <a:bodyPr rtlCol="0" anchor="ctr"/>
+          <a:lstStyle/>
+          <a:p>
+            <a:pPr algn="ctr"/>
+          </a:p>
+        </p:txBody>
+      </p:sp>
+      <p:sp>
+        <p:nvSpPr>
+          <p:cNvPr id="12" name="TextBox 11"/>
+          <p:cNvSpPr txBox="1"/>
+          <p:nvPr/>
+        </p:nvSpPr>
+        <p:spPr>
+          <a:xfrm>
+            <a:off x="500000" y="6540000"/>
+            <a:ext cx="7000000" cy="300000"/>
+          </a:xfrm>
+          <a:prstGeom prst="rect">
+            <a:avLst/>
+          </a:prstGeom>
+          <a:noFill/>
+        </p:spPr>
+        <p:txBody>
+          <a:bodyPr wrap="square" anchor="t">
+            <a:spAutoFit/>
+          </a:bodyPr>
+          <a:lstStyle/>
+          <a:p>
+            <a:pPr algn="l">
+              <a:lnSpc>
+                <a:spcPct val="110000"/>
+              </a:lnSpc>
+              <a:spcAft>
+                <a:spcPts val="600"/>
+              </a:spcAft>
+            </a:pPr>
+            <a:r>
+              <a:rPr sz="1000" b="0">
+                <a:solidFill>
+                  <a:srgbClr val="8A97B5"/>
+                </a:solidFill>
+                <a:latin typeface="微软雅黑"/>
+              </a:rPr>
+              <a:t>两江智造集团 · AI应用基础48课时版</a:t>
+            </a:r>
+          </a:p>
+        </p:txBody>
+      </p:sp>
+      <p:sp>
+        <p:nvSpPr>
+          <p:cNvPr id="13" name="TextBox 12"/>
+          <p:cNvSpPr txBox="1"/>
+          <p:nvPr/>
+        </p:nvSpPr>
+        <p:spPr>
+          <a:xfrm>
+            <a:off x="10600000" y="6540000"/>
+            <a:ext cx="1000000" cy="300000"/>
+          </a:xfrm>
+          <a:prstGeom prst="rect">
+            <a:avLst/>
+          </a:prstGeom>
+          <a:noFill/>
+        </p:spPr>
+        <p:txBody>
+          <a:bodyPr wrap="square" anchor="t">
+            <a:spAutoFit/>
+          </a:bodyPr>
+          <a:lstStyle/>
+          <a:p>
+            <a:pPr algn="r">
+              <a:lnSpc>
+                <a:spcPct val="110000"/>
+              </a:lnSpc>
+              <a:spcAft>
+                <a:spcPts val="600"/>
+              </a:spcAft>
+            </a:pPr>
+            <a:r>
+              <a:rPr sz="1000" b="0">
+                <a:solidFill>
+                  <a:srgbClr val="8A97B5"/>
+                </a:solidFill>
+                <a:latin typeface="微软雅黑"/>
+              </a:rPr>
+              <a:t>10 / 13</a:t>
+            </a:r>
+          </a:p>
+        </p:txBody>
+      </p:sp>
+      <p:sp>
+        <p:nvSpPr>
+          <p:cNvPr id="14" name="Rectangle 13"/>
+          <p:cNvSpPr/>
+          <p:nvPr/>
+        </p:nvSpPr>
+        <p:spPr>
+          <a:xfrm>
+            <a:off x="457200" y="1481328"/>
+            <a:ext cx="11356848" cy="4663440"/>
+          </a:xfrm>
+          <a:prstGeom prst="rect">
+            <a:avLst/>
+          </a:prstGeom>
+          <a:solidFill>
+            <a:srgbClr val="FFFFFF"/>
+          </a:solidFill>
+          <a:ln>
+            <a:solidFill>
+              <a:srgbClr val="D6DCE4"/>
+            </a:solidFill>
+          </a:ln>
+          <a:effectLst/>
+        </p:spPr>
+        <p:style>
+          <a:lnRef idx="1">
+            <a:schemeClr val="accent1"/>
+          </a:lnRef>
+          <a:fillRef idx="3">
+            <a:schemeClr val="accent1"/>
+          </a:fillRef>
+          <a:effectRef idx="2">
+            <a:schemeClr val="accent1"/>
+          </a:effectRef>
+          <a:fontRef idx="minor">
+            <a:schemeClr val="lt1"/>
+          </a:fontRef>
+        </p:style>
+        <p:txBody>
+          <a:bodyPr rtlCol="0" anchor="ctr" wrap="square"/>
+          <a:lstStyle/>
+          <a:p>
+            <a:pPr algn="ctr"/>
+          </a:p>
+        </p:txBody>
+      </p:sp>
+      <p:sp>
+        <p:nvSpPr>
+          <p:cNvPr id="15" name="TextBox 14"/>
+          <p:cNvSpPr txBox="1"/>
+          <p:nvPr/>
+        </p:nvSpPr>
+        <p:spPr>
+          <a:xfrm>
+            <a:off x="530352" y="1517904"/>
+            <a:ext cx="11210544" cy="237744"/>
+          </a:xfrm>
+          <a:prstGeom prst="rect">
+            <a:avLst/>
+          </a:prstGeom>
+          <a:noFill/>
+        </p:spPr>
+        <p:txBody>
+          <a:bodyPr wrap="square">
+            <a:spAutoFit/>
+          </a:bodyPr>
+          <a:lstStyle/>
+          <a:p>
+            <a:r>
+              <a:rPr sz="950" b="1">
+                <a:solidFill>
+                  <a:srgbClr val="010328"/>
+                </a:solidFill>
+                <a:latin typeface="微软雅黑"/>
+              </a:rPr>
+              <a:t>产出图 · training_curves.png</a:t>
+            </a:r>
+          </a:p>
+        </p:txBody>
+      </p:sp>
+      <p:sp>
+        <p:nvSpPr>
+          <p:cNvPr id="16" name="TextBox 15"/>
+          <p:cNvSpPr txBox="1"/>
+          <p:nvPr/>
+        </p:nvSpPr>
+        <p:spPr>
+          <a:xfrm>
+            <a:off x="530352" y="1755648"/>
+            <a:ext cx="11210544" cy="201168"/>
+          </a:xfrm>
+          <a:prstGeom prst="rect">
+            <a:avLst/>
+          </a:prstGeom>
+          <a:noFill/>
+        </p:spPr>
+        <p:txBody>
+          <a:bodyPr wrap="square">
+            <a:spAutoFit/>
+          </a:bodyPr>
+          <a:lstStyle/>
+          <a:p>
+            <a:r>
+              <a:rPr sz="850" b="0">
+                <a:solidFill>
+                  <a:srgbClr val="7A8698"/>
+                </a:solidFill>
+                <a:latin typeface="微软雅黑"/>
+              </a:rPr>
+              <a:t>output/training_curves.png ｜ 48 KB ｜ run.py 本次落盘</a:t>
+            </a:r>
+          </a:p>
+        </p:txBody>
+      </p:sp>
+      <p:pic>
+        <p:nvPicPr>
+          <p:cNvPr id="17" name="Picture 16" descr="training_curves.png"/>
+          <p:cNvPicPr>
+            <a:picLocks noChangeAspect="1"/>
+          </p:cNvPicPr>
+          <p:nvPr/>
+        </p:nvPicPr>
+        <p:blipFill>
+          <a:blip r:embed="rId2"/>
+          <a:stretch>
+            <a:fillRect/>
+          </a:stretch>
+        </p:blipFill>
+        <p:spPr>
+          <a:xfrm>
+            <a:off x="2963672" y="1993392"/>
+            <a:ext cx="6343904" cy="4078224"/>
+          </a:xfrm>
+          <a:prstGeom prst="rect">
+            <a:avLst/>
+          </a:prstGeom>
+        </p:spPr>
+      </p:pic>
+      <p:sp>
+        <p:nvSpPr>
+          <p:cNvPr id="18" name="TextBox 17"/>
+          <p:cNvSpPr txBox="1"/>
+          <p:nvPr/>
+        </p:nvSpPr>
+        <p:spPr>
+          <a:xfrm>
+            <a:off x="457200" y="6254496"/>
+            <a:ext cx="11247120" cy="201168"/>
+          </a:xfrm>
+          <a:prstGeom prst="rect">
+            <a:avLst/>
+          </a:prstGeom>
+          <a:noFill/>
+        </p:spPr>
+        <p:txBody>
+          <a:bodyPr wrap="square">
+            <a:spAutoFit/>
+          </a:bodyPr>
+          <a:lstStyle/>
+          <a:p>
+            <a:r>
+              <a:rPr sz="900" b="0">
+                <a:solidFill>
+                  <a:srgbClr val="7A8698"/>
+                </a:solidFill>
+                <a:latin typeface="微软雅黑"/>
+              </a:rPr>
+              <a:t>以上图像由 run.py 本次运行落盘到 output/，非外部素材。</a:t>
+            </a:r>
+          </a:p>
+        </p:txBody>
+      </p:sp>
+    </p:spTree>
+  </p:cSld>
+  <p:clrMapOvr>
+    <a:masterClrMapping/>
+  </p:clrMapOvr>
+</p:sld>
+</file>
+
 <file path=ppt/slides/slide2.xml><?xml version="1.0" encoding="utf-8"?>
 <p:sld xmlns:a="http://schemas.openxmlformats.org/drawingml/2006/main" xmlns:p="http://schemas.openxmlformats.org/presentationml/2006/main" xmlns:r="http://schemas.openxmlformats.org/officeDocument/2006/relationships">
   <p:cSld>
@@ -5143,7 +7730,7 @@
                 </a:solidFill>
                 <a:latin typeface="微软雅黑"/>
               </a:rPr>
-              <a:t>2 / 10</a:t>
+              <a:t>2 / 13</a:t>
             </a:r>
           </a:p>
         </p:txBody>
@@ -5617,7 +8204,7 @@
                 </a:solidFill>
                 <a:latin typeface="微软雅黑"/>
               </a:rPr>
-              <a:t>3 / 10</a:t>
+              <a:t>3 / 13</a:t>
             </a:r>
           </a:p>
         </p:txBody>
@@ -6409,7 +8996,7 @@
                 </a:solidFill>
                 <a:latin typeface="微软雅黑"/>
               </a:rPr>
-              <a:t>4 / 10</a:t>
+              <a:t>4 / 13</a:t>
             </a:r>
           </a:p>
         </p:txBody>
@@ -7080,7 +9667,7 @@
                 </a:solidFill>
                 <a:latin typeface="微软雅黑"/>
               </a:rPr>
-              <a:t>5 / 10</a:t>
+              <a:t>5 / 13</a:t>
             </a:r>
           </a:p>
         </p:txBody>
@@ -7356,7 +9943,7 @@
                 </a:solidFill>
                 <a:latin typeface="微软雅黑"/>
               </a:rPr>
-              <a:t>6 / 10</a:t>
+              <a:t>6 / 13</a:t>
             </a:r>
           </a:p>
         </p:txBody>
@@ -7528,127 +10115,97 @@
                   <a:srgbClr val="0545E8"/>
                 </a:solidFill>
               </a:rPr>
-              <a:t>① 参考实现真实运行输出（本工单完成态）</a:t>
-            </a:r>
-          </a:p>
-          <a:p>
-            <a:pPr algn="l">
-              <a:spcBef>
-                <a:spcPts val="100"/>
-              </a:spcBef>
-            </a:pPr>
-            <a:r>
-              <a:rPr sz="1000" b="0">
-                <a:solidFill>
-                  <a:srgbClr val="010328"/>
-                </a:solidFill>
-              </a:rPr>
-              <a:t>=== 工单 M3-1 ResNet迁移学习（概念版）· 完成态 ===</a:t>
-            </a:r>
-          </a:p>
-          <a:p>
-            <a:pPr algn="l">
-              <a:spcBef>
-                <a:spcPts val="100"/>
-              </a:spcBef>
-            </a:pPr>
-            <a:r>
-              <a:rPr sz="1000" b="0">
-                <a:solidFill>
-                  <a:srgbClr val="010328"/>
-                </a:solidFill>
-              </a:rPr>
-              <a:t>世界: 海量无标注 2000 条 / 少量标注 16 条 / 测试 200 条</a:t>
-            </a:r>
-          </a:p>
-          <a:p>
-            <a:pPr algn="l">
-              <a:spcBef>
-                <a:spcPts val="100"/>
-              </a:spcBef>
-            </a:pPr>
-            <a:r>
-              <a:rPr sz="1000" b="0">
-                <a:solidFill>
-                  <a:srgbClr val="010328"/>
-                </a:solidFill>
-              </a:rPr>
-              <a:t>预训练特征提取器: PCA(8维) 在海量数据上一次性学成并**冻结**</a:t>
-            </a:r>
-          </a:p>
-          <a:p>
-            <a:pPr algn="l">
-              <a:spcBef>
-                <a:spcPts val="100"/>
-              </a:spcBef>
-            </a:pPr>
-            <a:r>
-              <a:rPr sz="1000" b="0">
-                <a:solidFill>
-                  <a:srgbClr val="010328"/>
-                </a:solidFill>
-              </a:rPr>
-              <a:t>  冻结特征累计解释方差 = 0.330</a:t>
-            </a:r>
-          </a:p>
-          <a:p>
-            <a:pPr algn="l">
-              <a:spcBef>
-                <a:spcPts val="100"/>
-              </a:spcBef>
-            </a:pPr>
-            <a:r>
-              <a:rPr sz="1000" b="0">
-                <a:solidFill>
-                  <a:srgbClr val="010328"/>
-                </a:solidFill>
-              </a:rPr>
-              <a:t>对照（16条样本直连 192 维训头）: 测试准确率 = 0.915</a:t>
-            </a:r>
-          </a:p>
-          <a:p>
-            <a:pPr algn="l">
-              <a:spcBef>
-                <a:spcPts val="100"/>
-              </a:spcBef>
-            </a:pPr>
-            <a:r>
-              <a:rPr sz="1000" b="0">
-                <a:solidFill>
-                  <a:srgbClr val="010328"/>
-                </a:solidFill>
-              </a:rPr>
-              <a:t>迁移（冻结8维特征 + 只训分类头）: 测试准确率 = 0.960</a:t>
-            </a:r>
-          </a:p>
-          <a:p>
-            <a:pPr algn="l">
-              <a:spcBef>
-                <a:spcPts val="100"/>
-              </a:spcBef>
-            </a:pPr>
-            <a:r>
-              <a:rPr sz="1000" b="0">
-                <a:solidFill>
-                  <a:srgbClr val="010328"/>
-                </a:solidFill>
-              </a:rPr>
-              <a:t>增益 = +0.045 → 迁移显著胜出，预训练特征是维度灾难的解药</a:t>
-            </a:r>
-          </a:p>
-          <a:p>
-            <a:pPr algn="l">
-              <a:spcBef>
-                <a:spcPts val="100"/>
-              </a:spcBef>
-            </a:pPr>
-            <a:r>
-              <a:rPr sz="1000" b="0">
-                <a:solidFill>
-                  <a:srgbClr val="010328"/>
-                </a:solidFill>
-              </a:rPr>
-              <a:t>结论: 真实规律仅藏在少数测点维（其余为环境噪声维）；冻结+小样本头 是 ResNet 微调思想的最小可运行模型。</a:t>
+              <a:t>① 本次真跑实测输出（逐字取自 output/report.txt）</a:t>
+            </a:r>
+          </a:p>
+          <a:p>
+            <a:r>
+              <a:rPr sz="1400" b="1">
+                <a:solidFill>
+                  <a:srgbClr val="0545E8"/>
+                </a:solidFill>
+              </a:rPr>
+              <a:t>实测达成档位: 优(A) ｜ 实测最优准确率 1.0000 ｜ 规范率 97.39% ｜ 对照表实测行 4 条 ｜ 增强增益 冻结 -0.0050/微调 +0.4850 ｜ 决策记录 1 条 ｜ 曲线 1 张</a:t>
+            </a:r>
+          </a:p>
+          <a:p>
+            <a:r>
+              <a:rPr sz="1400" b="1">
+                <a:solidFill>
+                  <a:srgbClr val="0545E8"/>
+                </a:solidFill>
+              </a:rPr>
+              <a:t>及格(D)    规范率门槛≥70% [达标] ｜ 功能OK ｜ 准确率门槛≥0.7（实测 1.0000）</a:t>
+            </a:r>
+          </a:p>
+          <a:p>
+            <a:r>
+              <a:rPr sz="1400" b="1">
+                <a:solidFill>
+                  <a:srgbClr val="0545E8"/>
+                </a:solidFill>
+              </a:rPr>
+              <a:t>良好(C)    规范率门槛≥70% [达标] ｜ 功能OK ｜ 准确率≥0.75 且对照行≥2（实测 1.0000 / 4 行）</a:t>
+            </a:r>
+          </a:p>
+          <a:p>
+            <a:r>
+              <a:rPr sz="1400" b="1">
+                <a:solidFill>
+                  <a:srgbClr val="0545E8"/>
+                </a:solidFill>
+              </a:rPr>
+              <a:t>优秀(B)    规范率门槛≥70% [达标] ｜ 功能OK ｜ 准确率≥0.8 或增强有效（增益见上行）且决策记录≥1（实测 1）</a:t>
+            </a:r>
+          </a:p>
+          <a:p>
+            <a:r>
+              <a:rPr sz="1400" b="1">
+                <a:solidFill>
+                  <a:srgbClr val="0545E8"/>
+                </a:solidFill>
+              </a:rPr>
+              <a:t>优(A)     规范率门槛≥70% [达标] ｜ 功能OK ｜ 准确率≥0.85 且有训练曲线（实测 1.0000 / 1 张）</a:t>
+            </a:r>
+          </a:p>
+          <a:p>
+            <a:r>
+              <a:rPr sz="1400" b="1">
+                <a:solidFill>
+                  <a:srgbClr val="0545E8"/>
+                </a:solidFill>
+              </a:rPr>
+              <a:t>人工答辩项 3 条，教师答辩时确认：</a:t>
+            </a:r>
+          </a:p>
+          <a:p>
+            <a:r>
+              <a:rPr sz="1400" b="1">
+                <a:solidFill>
+                  <a:srgbClr val="0545E8"/>
+                </a:solidFill>
+              </a:rPr>
+              <a:t>- 决策结论与理由的口头陈述（工单：答辩必答）</a:t>
+            </a:r>
+          </a:p>
+          <a:p>
+            <a:r>
+              <a:rPr sz="1400" b="1">
+                <a:solidFill>
+                  <a:srgbClr val="0545E8"/>
+                </a:solidFill>
+              </a:rPr>
+              <a:t>- 企业元验收栏签认（功能可用/参数留痕/数据可信，值班师傅签字）</a:t>
+            </a:r>
+          </a:p>
+          <a:p>
+            <a:r>
+              <a:rPr sz="1400" b="1">
+                <a:solidFill>
+                  <a:srgbClr val="0545E8"/>
+                </a:solidFill>
+              </a:rPr>
+              <a:t>- 底座口径是否可接受（真ResNet=本地缓存离线载入 / 兜底=本地CNN，实测证据见报告底座口径段）</a:t>
             </a:r>
           </a:p>
         </p:txBody>
@@ -8022,7 +10579,7 @@
                 </a:solidFill>
                 <a:latin typeface="微软雅黑"/>
               </a:rPr>
-              <a:t>7 / 10</a:t>
+              <a:t>7 / 13</a:t>
             </a:r>
           </a:p>
         </p:txBody>
@@ -8637,7 +11194,7 @@
                 </a:solidFill>
                 <a:latin typeface="微软雅黑"/>
               </a:rPr>
-              <a:t>8 / 10</a:t>
+              <a:t>11 / 13</a:t>
             </a:r>
           </a:p>
         </p:txBody>
@@ -9387,7 +11944,7 @@
                 </a:solidFill>
                 <a:latin typeface="微软雅黑"/>
               </a:rPr>
-              <a:t>9 / 10</a:t>
+              <a:t>12 / 13</a:t>
             </a:r>
           </a:p>
         </p:txBody>

--- a/V2授课PPT/W15-第14次课-ResNet迁移学习（下.pptx
+++ b/V2授课PPT/W15-第14次课-ResNet迁移学习（下.pptx
@@ -13,6 +13,8 @@
     <p:sldId id="374" r:id="rId24"/>
     <p:sldId id="375" r:id="rId25"/>
     <p:sldId id="376" r:id="rId14"/>
+    <p:sldId id="377" r:id="rId27"/>
+    <p:sldId id="378" r:id="rId28"/>
     <p:sldId id="318" r:id="rId70"/>
     <p:sldId id="366" r:id="rId16"/>
     <p:sldId id="367" r:id="rId17"/>
@@ -4421,14 +4423,14 @@
       </p:sp>
       <p:sp>
         <p:nvSpPr>
-          <p:cNvPr id="4" name="TextBox 3"/>
+          <p:cNvPr id="6" name="TextBox 5"/>
           <p:cNvSpPr txBox="1"/>
           <p:nvPr/>
         </p:nvSpPr>
         <p:spPr>
           <a:xfrm>
-            <a:off x="700000" y="300000"/>
-            <a:ext cx="10792000" cy="700000"/>
+            <a:off x="1500000" y="300000"/>
+            <a:ext cx="9992000" cy="700000"/>
           </a:xfrm>
           <a:prstGeom prst="rect">
             <a:avLst/>
@@ -4456,14 +4458,14 @@
                 </a:solidFill>
                 <a:latin typeface="微软雅黑"/>
               </a:rPr>
-              <a:t>工单完成效果图 · 先看终点（本课目标预览）</a:t>
-            </a:r>
-          </a:p>
-        </p:txBody>
-      </p:sp>
-      <p:sp>
-        <p:nvSpPr>
-          <p:cNvPr id="11" name="Rectangle 10"/>
+              <a:t>下次课预告 · 带着问题去下一讲</a:t>
+            </a:r>
+          </a:p>
+        </p:txBody>
+      </p:sp>
+      <p:sp>
+        <p:nvSpPr>
+          <p:cNvPr id="17" name="Rectangle 16"/>
           <p:cNvSpPr/>
           <p:nvPr/>
         </p:nvSpPr>
@@ -4507,7 +4509,7 @@
       </p:sp>
       <p:sp>
         <p:nvSpPr>
-          <p:cNvPr id="12" name="TextBox 11"/>
+          <p:cNvPr id="18" name="TextBox 17"/>
           <p:cNvSpPr txBox="1"/>
           <p:nvPr/>
         </p:nvSpPr>
@@ -4549,7 +4551,7 @@
       </p:sp>
       <p:sp>
         <p:nvSpPr>
-          <p:cNvPr id="13" name="TextBox 12"/>
+          <p:cNvPr id="19" name="TextBox 18"/>
           <p:cNvSpPr txBox="1"/>
           <p:nvPr/>
         </p:nvSpPr>
@@ -4584,33 +4586,65 @@
                 </a:solidFill>
                 <a:latin typeface="微软雅黑"/>
               </a:rPr>
-              <a:t>10 / 19</a:t>
-            </a:r>
-          </a:p>
-        </p:txBody>
-      </p:sp>
-      <p:sp>
-        <p:nvSpPr>
-          <p:cNvPr id="14" name="Rounded Rectangle 13"/>
+              <a:t>10 / 21</a:t>
+            </a:r>
+          </a:p>
+        </p:txBody>
+      </p:sp>
+      <p:sp>
+        <p:nvSpPr>
+          <p:cNvPr id="20" name="TextBox 19"/>
+          <p:cNvSpPr txBox="1"/>
+          <p:nvPr/>
+        </p:nvSpPr>
+        <p:spPr>
+          <a:xfrm>
+            <a:off x="457200" y="1389888"/>
+            <a:ext cx="11274552" cy="274320"/>
+          </a:xfrm>
+          <a:prstGeom prst="rect">
+            <a:avLst/>
+          </a:prstGeom>
+          <a:noFill/>
+        </p:spPr>
+        <p:txBody>
+          <a:bodyPr wrap="square">
+            <a:spAutoFit/>
+          </a:bodyPr>
+          <a:lstStyle/>
+          <a:p>
+            <a:r>
+              <a:rPr sz="1050" b="0">
+                <a:solidFill>
+                  <a:srgbClr val="6B7280"/>
+                </a:solidFill>
+                <a:latin typeface="微软雅黑"/>
+              </a:rPr>
+              <a:t>带着问题去下一讲——预习任务与自测问题逐字取自课程安排，课前完成。</a:t>
+            </a:r>
+          </a:p>
+        </p:txBody>
+      </p:sp>
+      <p:sp>
+        <p:nvSpPr>
+          <p:cNvPr id="21" name="Rectangle 20"/>
           <p:cNvSpPr/>
           <p:nvPr/>
         </p:nvSpPr>
         <p:spPr>
           <a:xfrm>
-            <a:off x="758952" y="1801368"/>
-            <a:ext cx="10899648" cy="2286000"/>
-          </a:xfrm>
-          <a:prstGeom prst="roundRect">
-            <a:avLst>
-              <a:gd name="adj" fmla="val 6000"/>
-            </a:avLst>
+            <a:off x="457200" y="1920240"/>
+            <a:ext cx="11274552" cy="960120"/>
+          </a:xfrm>
+          <a:prstGeom prst="rect">
+            <a:avLst/>
           </a:prstGeom>
           <a:solidFill>
-            <a:srgbClr val="F3F6FD"/>
+            <a:srgbClr val="F7F9FC"/>
           </a:solidFill>
-          <a:ln w="9525">
+          <a:ln>
             <a:solidFill>
-              <a:srgbClr val="C9D4EE"/>
+              <a:srgbClr val="D6DCE4"/>
             </a:solidFill>
           </a:ln>
           <a:effectLst/>
@@ -4630,34 +4664,32 @@
           </a:fontRef>
         </p:style>
         <p:txBody>
-          <a:bodyPr rtlCol="0" anchor="ctr"/>
-          <a:lstStyle/>
-          <a:p/>
-        </p:txBody>
-      </p:sp>
-      <p:sp>
-        <p:nvSpPr>
-          <p:cNvPr id="15" name="Rounded Rectangle 14"/>
+          <a:bodyPr rtlCol="0" anchor="ctr" wrap="square"/>
+          <a:lstStyle/>
+          <a:p>
+            <a:pPr algn="ctr"/>
+          </a:p>
+        </p:txBody>
+      </p:sp>
+      <p:sp>
+        <p:nvSpPr>
+          <p:cNvPr id="22" name="Rectangle 21"/>
           <p:cNvSpPr/>
           <p:nvPr/>
         </p:nvSpPr>
         <p:spPr>
           <a:xfrm>
-            <a:off x="758952" y="4178808"/>
-            <a:ext cx="10899648" cy="1051560"/>
-          </a:xfrm>
-          <a:prstGeom prst="roundRect">
-            <a:avLst>
-              <a:gd name="adj" fmla="val 6000"/>
-            </a:avLst>
+            <a:off x="457200" y="1920240"/>
+            <a:ext cx="82296" cy="960120"/>
+          </a:xfrm>
+          <a:prstGeom prst="rect">
+            <a:avLst/>
           </a:prstGeom>
           <a:solidFill>
-            <a:srgbClr val="FFFFFF"/>
+            <a:srgbClr val="2F5D8C"/>
           </a:solidFill>
-          <a:ln w="9525">
-            <a:solidFill>
-              <a:srgbClr val="C9D4EE"/>
-            </a:solidFill>
+          <a:ln>
+            <a:noFill/>
           </a:ln>
           <a:effectLst/>
         </p:spPr>
@@ -4676,33 +4708,67 @@
           </a:fontRef>
         </p:style>
         <p:txBody>
-          <a:bodyPr rtlCol="0" anchor="ctr"/>
-          <a:lstStyle/>
-          <a:p/>
-        </p:txBody>
-      </p:sp>
-      <p:sp>
-        <p:nvSpPr>
-          <p:cNvPr id="16" name="Rounded Rectangle 15"/>
+          <a:bodyPr rtlCol="0" anchor="ctr" wrap="square"/>
+          <a:lstStyle/>
+          <a:p>
+            <a:pPr algn="ctr"/>
+          </a:p>
+        </p:txBody>
+      </p:sp>
+      <p:sp>
+        <p:nvSpPr>
+          <p:cNvPr id="23" name="TextBox 22"/>
+          <p:cNvSpPr txBox="1"/>
+          <p:nvPr/>
+        </p:nvSpPr>
+        <p:spPr>
+          <a:xfrm>
+            <a:off x="685800" y="2084832"/>
+            <a:ext cx="10881360" cy="685800"/>
+          </a:xfrm>
+          <a:prstGeom prst="rect">
+            <a:avLst/>
+          </a:prstGeom>
+          <a:noFill/>
+        </p:spPr>
+        <p:txBody>
+          <a:bodyPr wrap="square">
+            <a:spAutoFit/>
+          </a:bodyPr>
+          <a:lstStyle/>
+          <a:p>
+            <a:r>
+              <a:rPr sz="1050" b="0">
+                <a:solidFill>
+                  <a:srgbClr val="2B2F36"/>
+                </a:solidFill>
+                <a:latin typeface="微软雅黑"/>
+              </a:rPr>
+              <a:t>主题：能部署CPU预训练YOLO推理——应用：见工单s</a:t>
+            </a:r>
+          </a:p>
+        </p:txBody>
+      </p:sp>
+      <p:sp>
+        <p:nvSpPr>
+          <p:cNvPr id="24" name="Rectangle 23"/>
           <p:cNvSpPr/>
           <p:nvPr/>
         </p:nvSpPr>
         <p:spPr>
           <a:xfrm>
-            <a:off x="758952" y="5321808"/>
-            <a:ext cx="10899648" cy="1005840"/>
-          </a:xfrm>
-          <a:prstGeom prst="roundRect">
-            <a:avLst>
-              <a:gd name="adj" fmla="val 6000"/>
-            </a:avLst>
+            <a:off x="457200" y="3026664"/>
+            <a:ext cx="11274552" cy="960120"/>
+          </a:xfrm>
+          <a:prstGeom prst="rect">
+            <a:avLst/>
           </a:prstGeom>
           <a:solidFill>
-            <a:srgbClr val="FFFFFF"/>
+            <a:srgbClr val="F7F9FC"/>
           </a:solidFill>
-          <a:ln w="9525">
+          <a:ln>
             <a:solidFill>
-              <a:srgbClr val="C9D4EE"/>
+              <a:srgbClr val="D6DCE4"/>
             </a:solidFill>
           </a:ln>
           <a:effectLst/>
@@ -4722,21 +4788,67 @@
           </a:fontRef>
         </p:style>
         <p:txBody>
-          <a:bodyPr rtlCol="0" anchor="ctr"/>
-          <a:lstStyle/>
-          <a:p/>
-        </p:txBody>
-      </p:sp>
-      <p:sp>
-        <p:nvSpPr>
-          <p:cNvPr id="17" name="TextBox 16"/>
+          <a:bodyPr rtlCol="0" anchor="ctr" wrap="square"/>
+          <a:lstStyle/>
+          <a:p>
+            <a:pPr algn="ctr"/>
+          </a:p>
+        </p:txBody>
+      </p:sp>
+      <p:sp>
+        <p:nvSpPr>
+          <p:cNvPr id="25" name="Rectangle 24"/>
+          <p:cNvSpPr/>
+          <p:nvPr/>
+        </p:nvSpPr>
+        <p:spPr>
+          <a:xfrm>
+            <a:off x="457200" y="3026664"/>
+            <a:ext cx="82296" cy="960120"/>
+          </a:xfrm>
+          <a:prstGeom prst="rect">
+            <a:avLst/>
+          </a:prstGeom>
+          <a:solidFill>
+            <a:srgbClr val="2F5D8C"/>
+          </a:solidFill>
+          <a:ln>
+            <a:noFill/>
+          </a:ln>
+          <a:effectLst/>
+        </p:spPr>
+        <p:style>
+          <a:lnRef idx="1">
+            <a:schemeClr val="accent1"/>
+          </a:lnRef>
+          <a:fillRef idx="3">
+            <a:schemeClr val="accent1"/>
+          </a:fillRef>
+          <a:effectRef idx="2">
+            <a:schemeClr val="accent1"/>
+          </a:effectRef>
+          <a:fontRef idx="minor">
+            <a:schemeClr val="lt1"/>
+          </a:fontRef>
+        </p:style>
+        <p:txBody>
+          <a:bodyPr rtlCol="0" anchor="ctr" wrap="square"/>
+          <a:lstStyle/>
+          <a:p>
+            <a:pPr algn="ctr"/>
+          </a:p>
+        </p:txBody>
+      </p:sp>
+      <p:sp>
+        <p:nvSpPr>
+          <p:cNvPr id="26" name="TextBox 25"/>
           <p:cNvSpPr txBox="1"/>
           <p:nvPr/>
         </p:nvSpPr>
         <p:spPr>
           <a:xfrm>
-            <a:off x="960120" y="1929384"/>
-            <a:ext cx="10469880" cy="2048256"/>
+            <a:off x="685800" y="3191256"/>
+            <a:ext cx="10881360" cy="685800"/>
           </a:xfrm>
           <a:prstGeom prst="rect">
             <a:avLst/>
@@ -4744,113 +4856,123 @@
           <a:noFill/>
         </p:spPr>
         <p:txBody>
-          <a:bodyPr wrap="square" anchor="t" lIns="0" rIns="0" tIns="0" bIns="0">
+          <a:bodyPr wrap="square">
             <a:spAutoFit/>
           </a:bodyPr>
           <a:lstStyle/>
           <a:p>
-            <a:pPr algn="l"/>
-            <a:r>
-              <a:rPr sz="1150" b="1">
-                <a:solidFill>
-                  <a:srgbClr val="0545E8"/>
-                </a:solidFill>
-              </a:rPr>
-              <a:t>① 本次真跑实测输出（逐字取自 output/report.txt）</a:t>
-            </a:r>
-          </a:p>
-          <a:p>
-            <a:r>
-              <a:rPr sz="1150" b="1">
-                <a:solidFill>
-                  <a:srgbClr val="0545E8"/>
-                </a:solidFill>
-              </a:rPr>
-              <a:t>实测达成档位: 优(A) ｜ 实测最优准确率 1.0000 ｜ 规范率 97.39% ｜ 对照表实测行 4 条 ｜ 增强增益 冻结 -0.0050/微调 +0.4850 ｜ 决策记录 1 条 ｜ 曲线 1 张</a:t>
-            </a:r>
-          </a:p>
-          <a:p>
-            <a:r>
-              <a:rPr sz="1150" b="1">
-                <a:solidFill>
-                  <a:srgbClr val="0545E8"/>
-                </a:solidFill>
-              </a:rPr>
-              <a:t>及格(D)    规范率门槛≥70% [达标] ｜ 功能OK ｜ 准确率门槛≥0.7（实测 1.0000）</a:t>
-            </a:r>
-          </a:p>
-          <a:p>
-            <a:r>
-              <a:rPr sz="1150" b="1">
-                <a:solidFill>
-                  <a:srgbClr val="0545E8"/>
-                </a:solidFill>
-              </a:rPr>
-              <a:t>良好(C)    规范率门槛≥70% [达标] ｜ 功能OK ｜ 准确率≥0.75 且对照行≥2（实测 1.0000 / 4 行）</a:t>
-            </a:r>
-          </a:p>
-          <a:p>
-            <a:r>
-              <a:rPr sz="1150" b="1">
-                <a:solidFill>
-                  <a:srgbClr val="0545E8"/>
-                </a:solidFill>
-              </a:rPr>
-              <a:t>优秀(B)    规范率门槛≥70% [达标] ｜ 功能OK ｜ 准确率≥0.8 或增强有效（增益见上行）且决策记录≥1（实测 1）</a:t>
-            </a:r>
-          </a:p>
-          <a:p>
-            <a:r>
-              <a:rPr sz="1150" b="1">
-                <a:solidFill>
-                  <a:srgbClr val="0545E8"/>
-                </a:solidFill>
-              </a:rPr>
-              <a:t>优(A)     规范率门槛≥70% [达标] ｜ 功能OK ｜ 准确率≥0.85 且有训练曲线（实测 1.0000 / 1 张）</a:t>
-            </a:r>
-          </a:p>
-          <a:p>
-            <a:r>
-              <a:rPr sz="1150" b="1">
-                <a:solidFill>
-                  <a:srgbClr val="0545E8"/>
-                </a:solidFill>
-              </a:rPr>
-              <a:t>人工答辩项 3 条，教师答辩时确认：</a:t>
-            </a:r>
-          </a:p>
-          <a:p>
-            <a:r>
-              <a:rPr sz="1150" b="1">
-                <a:solidFill>
-                  <a:srgbClr val="0545E8"/>
-                </a:solidFill>
-              </a:rPr>
-              <a:t>- 决策结论与理由的口头陈述（工单：答辩必答）</a:t>
-            </a:r>
-          </a:p>
-          <a:p>
-            <a:r>
-              <a:rPr sz="1150" b="1">
-                <a:solidFill>
-                  <a:srgbClr val="0545E8"/>
-                </a:solidFill>
-              </a:rPr>
-              <a:t>……（后续 2 行全文逐字见 工程化项目/output/report.txt）</a:t>
-            </a:r>
-          </a:p>
-        </p:txBody>
-      </p:sp>
-      <p:sp>
-        <p:nvSpPr>
-          <p:cNvPr id="18" name="TextBox 17"/>
+            <a:r>
+              <a:rPr sz="1050" b="0">
+                <a:solidFill>
+                  <a:srgbClr val="2B2F36"/>
+                </a:solidFill>
+                <a:latin typeface="微软雅黑"/>
+              </a:rPr>
+              <a:t>预习快问：课前测①：本课工单M3-1的及格线是什么？（答：准确率≥75%+对比表）</a:t>
+            </a:r>
+          </a:p>
+        </p:txBody>
+      </p:sp>
+      <p:sp>
+        <p:nvSpPr>
+          <p:cNvPr id="27" name="Rectangle 26"/>
+          <p:cNvSpPr/>
+          <p:nvPr/>
+        </p:nvSpPr>
+        <p:spPr>
+          <a:xfrm>
+            <a:off x="457200" y="4133087"/>
+            <a:ext cx="11274552" cy="960120"/>
+          </a:xfrm>
+          <a:prstGeom prst="rect">
+            <a:avLst/>
+          </a:prstGeom>
+          <a:solidFill>
+            <a:srgbClr val="F7F9FC"/>
+          </a:solidFill>
+          <a:ln>
+            <a:solidFill>
+              <a:srgbClr val="D6DCE4"/>
+            </a:solidFill>
+          </a:ln>
+          <a:effectLst/>
+        </p:spPr>
+        <p:style>
+          <a:lnRef idx="1">
+            <a:schemeClr val="accent1"/>
+          </a:lnRef>
+          <a:fillRef idx="3">
+            <a:schemeClr val="accent1"/>
+          </a:fillRef>
+          <a:effectRef idx="2">
+            <a:schemeClr val="accent1"/>
+          </a:effectRef>
+          <a:fontRef idx="minor">
+            <a:schemeClr val="lt1"/>
+          </a:fontRef>
+        </p:style>
+        <p:txBody>
+          <a:bodyPr rtlCol="0" anchor="ctr" wrap="square"/>
+          <a:lstStyle/>
+          <a:p>
+            <a:pPr algn="ctr"/>
+          </a:p>
+        </p:txBody>
+      </p:sp>
+      <p:sp>
+        <p:nvSpPr>
+          <p:cNvPr id="28" name="Rectangle 27"/>
+          <p:cNvSpPr/>
+          <p:nvPr/>
+        </p:nvSpPr>
+        <p:spPr>
+          <a:xfrm>
+            <a:off x="457200" y="4133087"/>
+            <a:ext cx="82296" cy="960120"/>
+          </a:xfrm>
+          <a:prstGeom prst="rect">
+            <a:avLst/>
+          </a:prstGeom>
+          <a:solidFill>
+            <a:srgbClr val="2F5D8C"/>
+          </a:solidFill>
+          <a:ln>
+            <a:noFill/>
+          </a:ln>
+          <a:effectLst/>
+        </p:spPr>
+        <p:style>
+          <a:lnRef idx="1">
+            <a:schemeClr val="accent1"/>
+          </a:lnRef>
+          <a:fillRef idx="3">
+            <a:schemeClr val="accent1"/>
+          </a:fillRef>
+          <a:effectRef idx="2">
+            <a:schemeClr val="accent1"/>
+          </a:effectRef>
+          <a:fontRef idx="minor">
+            <a:schemeClr val="lt1"/>
+          </a:fontRef>
+        </p:style>
+        <p:txBody>
+          <a:bodyPr rtlCol="0" anchor="ctr" wrap="square"/>
+          <a:lstStyle/>
+          <a:p>
+            <a:pPr algn="ctr"/>
+          </a:p>
+        </p:txBody>
+      </p:sp>
+      <p:sp>
+        <p:nvSpPr>
+          <p:cNvPr id="29" name="TextBox 28"/>
           <p:cNvSpPr txBox="1"/>
           <p:nvPr/>
         </p:nvSpPr>
         <p:spPr>
           <a:xfrm>
-            <a:off x="960120" y="4297680"/>
-            <a:ext cx="10469880" cy="868680"/>
+            <a:off x="685800" y="4297679"/>
+            <a:ext cx="10881360" cy="685800"/>
           </a:xfrm>
           <a:prstGeom prst="rect">
             <a:avLst/>
@@ -4858,48 +4980,123 @@
           <a:noFill/>
         </p:spPr>
         <p:txBody>
-          <a:bodyPr wrap="square" anchor="t" lIns="0" rIns="0" tIns="0" bIns="0">
+          <a:bodyPr wrap="square">
             <a:spAutoFit/>
           </a:bodyPr>
           <a:lstStyle/>
           <a:p>
-            <a:pPr algn="l"/>
-            <a:r>
-              <a:rPr sz="1300" b="1">
-                <a:solidFill>
-                  <a:srgbClr val="0545E8"/>
-                </a:solidFill>
-              </a:rPr>
-              <a:t>② 关键自检点（对照工单逐项核对）</a:t>
-            </a:r>
-          </a:p>
-          <a:p>
-            <a:pPr algn="l">
-              <a:spcBef>
-                <a:spcPts val="200"/>
-              </a:spcBef>
-            </a:pPr>
-            <a:r>
-              <a:rPr sz="1150" b="0">
-                <a:solidFill>
-                  <a:srgbClr val="010328"/>
-                </a:solidFill>
-              </a:rPr>
-              <a:t>□ 代码从头跑到尾不报错　□ 指标与工单及格线逐项对齐　□ 随机种子已固定（可复现）</a:t>
-            </a:r>
-          </a:p>
-        </p:txBody>
-      </p:sp>
-      <p:sp>
-        <p:nvSpPr>
-          <p:cNvPr id="19" name="TextBox 18"/>
+            <a:r>
+              <a:rPr sz="1050" b="0">
+                <a:solidFill>
+                  <a:srgbClr val="2B2F36"/>
+                </a:solidFill>
+                <a:latin typeface="微软雅黑"/>
+              </a:rPr>
+              <a:t>课前完成：导学单 + 预习自测 + starter环境自检</a:t>
+            </a:r>
+          </a:p>
+        </p:txBody>
+      </p:sp>
+      <p:sp>
+        <p:nvSpPr>
+          <p:cNvPr id="30" name="Rectangle 29"/>
+          <p:cNvSpPr/>
+          <p:nvPr/>
+        </p:nvSpPr>
+        <p:spPr>
+          <a:xfrm>
+            <a:off x="457200" y="5239512"/>
+            <a:ext cx="11274552" cy="960120"/>
+          </a:xfrm>
+          <a:prstGeom prst="rect">
+            <a:avLst/>
+          </a:prstGeom>
+          <a:solidFill>
+            <a:srgbClr val="F7F9FC"/>
+          </a:solidFill>
+          <a:ln>
+            <a:solidFill>
+              <a:srgbClr val="D6DCE4"/>
+            </a:solidFill>
+          </a:ln>
+          <a:effectLst/>
+        </p:spPr>
+        <p:style>
+          <a:lnRef idx="1">
+            <a:schemeClr val="accent1"/>
+          </a:lnRef>
+          <a:fillRef idx="3">
+            <a:schemeClr val="accent1"/>
+          </a:fillRef>
+          <a:effectRef idx="2">
+            <a:schemeClr val="accent1"/>
+          </a:effectRef>
+          <a:fontRef idx="minor">
+            <a:schemeClr val="lt1"/>
+          </a:fontRef>
+        </p:style>
+        <p:txBody>
+          <a:bodyPr rtlCol="0" anchor="ctr" wrap="square"/>
+          <a:lstStyle/>
+          <a:p>
+            <a:pPr algn="ctr"/>
+          </a:p>
+        </p:txBody>
+      </p:sp>
+      <p:sp>
+        <p:nvSpPr>
+          <p:cNvPr id="31" name="Rectangle 30"/>
+          <p:cNvSpPr/>
+          <p:nvPr/>
+        </p:nvSpPr>
+        <p:spPr>
+          <a:xfrm>
+            <a:off x="457200" y="5239512"/>
+            <a:ext cx="82296" cy="960120"/>
+          </a:xfrm>
+          <a:prstGeom prst="rect">
+            <a:avLst/>
+          </a:prstGeom>
+          <a:solidFill>
+            <a:srgbClr val="2F5D8C"/>
+          </a:solidFill>
+          <a:ln>
+            <a:noFill/>
+          </a:ln>
+          <a:effectLst/>
+        </p:spPr>
+        <p:style>
+          <a:lnRef idx="1">
+            <a:schemeClr val="accent1"/>
+          </a:lnRef>
+          <a:fillRef idx="3">
+            <a:schemeClr val="accent1"/>
+          </a:fillRef>
+          <a:effectRef idx="2">
+            <a:schemeClr val="accent1"/>
+          </a:effectRef>
+          <a:fontRef idx="minor">
+            <a:schemeClr val="lt1"/>
+          </a:fontRef>
+        </p:style>
+        <p:txBody>
+          <a:bodyPr rtlCol="0" anchor="ctr" wrap="square"/>
+          <a:lstStyle/>
+          <a:p>
+            <a:pPr algn="ctr"/>
+          </a:p>
+        </p:txBody>
+      </p:sp>
+      <p:sp>
+        <p:nvSpPr>
+          <p:cNvPr id="32" name="TextBox 31"/>
           <p:cNvSpPr txBox="1"/>
           <p:nvPr/>
         </p:nvSpPr>
         <p:spPr>
           <a:xfrm>
-            <a:off x="960120" y="5431536"/>
-            <a:ext cx="10469880" cy="841248"/>
+            <a:off x="685800" y="5404103"/>
+            <a:ext cx="10881360" cy="685800"/>
           </a:xfrm>
           <a:prstGeom prst="rect">
             <a:avLst/>
@@ -4907,34 +5104,19 @@
           <a:noFill/>
         </p:spPr>
         <p:txBody>
-          <a:bodyPr wrap="square" anchor="t" lIns="0" rIns="0" tIns="0" bIns="0">
+          <a:bodyPr wrap="square">
             <a:spAutoFit/>
           </a:bodyPr>
           <a:lstStyle/>
           <a:p>
-            <a:pPr algn="l"/>
-            <a:r>
-              <a:rPr sz="1300" b="1">
-                <a:solidFill>
-                  <a:srgbClr val="F5670F"/>
-                </a:solidFill>
-              </a:rPr>
-              <a:t>③ 提交与达标（过程性证据）</a:t>
-            </a:r>
-          </a:p>
-          <a:p>
-            <a:pPr algn="l">
-              <a:spcBef>
-                <a:spcPts val="200"/>
-              </a:spcBef>
-            </a:pPr>
-            <a:r>
-              <a:rPr sz="1100" b="0">
-                <a:solidFill>
-                  <a:srgbClr val="010328"/>
-                </a:solidFill>
-              </a:rPr>
-              <a:t>达标线 D≥60 / C≥70 / B≥80 / A≥90　｜　提交 学号_姓名_工单号 + 运行截图 + 决策记录 + Git≥1次commit</a:t>
+            <a:r>
+              <a:rPr sz="1050" b="0">
+                <a:solidFill>
+                  <a:srgbClr val="2B2F36"/>
+                </a:solidFill>
+                <a:latin typeface="微软雅黑"/>
+              </a:rPr>
+              <a:t>带着问题：来上课——Predict先于Run</a:t>
             </a:r>
           </a:p>
         </p:txBody>
@@ -5082,27 +5264,27 @@
                 </a:solidFill>
                 <a:latin typeface="微软雅黑"/>
               </a:rPr>
-              <a:t>本工单的工程化项目 · 第三种代码形态</a:t>
-            </a:r>
-          </a:p>
-        </p:txBody>
-      </p:sp>
-      <p:sp>
-        <p:nvSpPr>
-          <p:cNvPr id="11" name="Rectangle 10"/>
+              <a:t>实施任务：工单M3-1《ResNet迁移学习（下）：优化与评价》</a:t>
+            </a:r>
+          </a:p>
+        </p:txBody>
+      </p:sp>
+      <p:sp>
+        <p:nvSpPr>
+          <p:cNvPr id="5" name="Rectangle 4"/>
           <p:cNvSpPr/>
           <p:nvPr/>
         </p:nvSpPr>
         <p:spPr>
           <a:xfrm>
-            <a:off x="500000" y="6500000"/>
-            <a:ext cx="11100000" cy="20000"/>
+            <a:off x="800000" y="1950000"/>
+            <a:ext cx="6300000" cy="3900000"/>
           </a:xfrm>
           <a:prstGeom prst="rect">
             <a:avLst/>
           </a:prstGeom>
           <a:solidFill>
-            <a:srgbClr val="C9D4EE"/>
+            <a:srgbClr val="F3F6FD"/>
           </a:solidFill>
           <a:ln>
             <a:noFill/>
@@ -5133,14 +5315,197 @@
       </p:sp>
       <p:sp>
         <p:nvSpPr>
-          <p:cNvPr id="12" name="TextBox 11"/>
+          <p:cNvPr id="6" name="TextBox 5"/>
           <p:cNvSpPr txBox="1"/>
           <p:nvPr/>
         </p:nvSpPr>
         <p:spPr>
           <a:xfrm>
-            <a:off x="500000" y="6540000"/>
-            <a:ext cx="7000000" cy="300000"/>
+            <a:off x="1000000" y="2100000"/>
+            <a:ext cx="5900000" cy="3600000"/>
+          </a:xfrm>
+          <a:prstGeom prst="rect">
+            <a:avLst/>
+          </a:prstGeom>
+          <a:noFill/>
+        </p:spPr>
+        <p:txBody>
+          <a:bodyPr wrap="square" anchor="t">
+            <a:spAutoFit/>
+          </a:bodyPr>
+          <a:lstStyle/>
+          <a:p>
+            <a:pPr algn="l">
+              <a:lnSpc>
+                <a:spcPct val="130000"/>
+              </a:lnSpc>
+              <a:spcAft>
+                <a:spcPts val="600"/>
+              </a:spcAft>
+            </a:pPr>
+            <a:r>
+              <a:rPr sz="1500" b="1">
+                <a:solidFill>
+                  <a:srgbClr val="0545E8"/>
+                </a:solidFill>
+                <a:latin typeface="微软雅黑"/>
+              </a:rPr>
+              <a:t>实施步骤</a:t>
+            </a:r>
+          </a:p>
+          <a:p>
+            <a:pPr algn="l">
+              <a:lnSpc>
+                <a:spcPct val="130000"/>
+              </a:lnSpc>
+              <a:spcAft>
+                <a:spcPts val="600"/>
+              </a:spcAft>
+            </a:pPr>
+            <a:r>
+              <a:rPr sz="1400" b="0">
+                <a:solidFill>
+                  <a:srgbClr val="010328"/>
+                </a:solidFill>
+                <a:latin typeface="微软雅黑"/>
+              </a:rPr>
+              <a:t>1. 错误速查复盘</a:t>
+            </a:r>
+          </a:p>
+          <a:p>
+            <a:pPr algn="l">
+              <a:lnSpc>
+                <a:spcPct val="130000"/>
+              </a:lnSpc>
+              <a:spcAft>
+                <a:spcPts val="600"/>
+              </a:spcAft>
+            </a:pPr>
+            <a:r>
+              <a:rPr sz="1400" b="0">
+                <a:solidFill>
+                  <a:srgbClr val="010328"/>
+                </a:solidFill>
+                <a:latin typeface="微软雅黑"/>
+              </a:rPr>
+              <a:t>2. 优化冲刺（B/A层）</a:t>
+            </a:r>
+          </a:p>
+          <a:p>
+            <a:pPr algn="l">
+              <a:lnSpc>
+                <a:spcPct val="130000"/>
+              </a:lnSpc>
+              <a:spcAft>
+                <a:spcPts val="600"/>
+              </a:spcAft>
+            </a:pPr>
+            <a:r>
+              <a:rPr sz="1400" b="0">
+                <a:solidFill>
+                  <a:srgbClr val="010328"/>
+                </a:solidFill>
+                <a:latin typeface="微软雅黑"/>
+              </a:rPr>
+              <a:t>3. 三层质检互查</a:t>
+            </a:r>
+          </a:p>
+          <a:p>
+            <a:pPr algn="l">
+              <a:lnSpc>
+                <a:spcPct val="130000"/>
+              </a:lnSpc>
+              <a:spcAft>
+                <a:spcPts val="600"/>
+              </a:spcAft>
+            </a:pPr>
+            <a:r>
+              <a:rPr sz="1400" b="0">
+                <a:solidFill>
+                  <a:srgbClr val="010328"/>
+                </a:solidFill>
+                <a:latin typeface="微软雅黑"/>
+              </a:rPr>
+              <a:t>4. 当堂评分与反馈</a:t>
+            </a:r>
+          </a:p>
+          <a:p>
+            <a:pPr algn="l">
+              <a:lnSpc>
+                <a:spcPct val="130000"/>
+              </a:lnSpc>
+              <a:spcAft>
+                <a:spcPts val="600"/>
+              </a:spcAft>
+            </a:pPr>
+            <a:r>
+              <a:rPr sz="1400" b="0">
+                <a:solidFill>
+                  <a:srgbClr val="010328"/>
+                </a:solidFill>
+                <a:latin typeface="微软雅黑"/>
+              </a:rPr>
+              <a:t>5. 下次课预告+微课</a:t>
+            </a:r>
+          </a:p>
+        </p:txBody>
+      </p:sp>
+      <p:sp>
+        <p:nvSpPr>
+          <p:cNvPr id="7" name="Rectangle 6"/>
+          <p:cNvSpPr/>
+          <p:nvPr/>
+        </p:nvSpPr>
+        <p:spPr>
+          <a:xfrm>
+            <a:off x="7400000" y="1950000"/>
+            <a:ext cx="4000000" cy="1850000"/>
+          </a:xfrm>
+          <a:prstGeom prst="rect">
+            <a:avLst/>
+          </a:prstGeom>
+          <a:solidFill>
+            <a:srgbClr val="E8F1E8"/>
+          </a:solidFill>
+          <a:ln>
+            <a:solidFill>
+              <a:srgbClr val="0475B6"/>
+            </a:solidFill>
+          </a:ln>
+          <a:effectLst/>
+        </p:spPr>
+        <p:style>
+          <a:lnRef idx="1">
+            <a:schemeClr val="accent1"/>
+          </a:lnRef>
+          <a:fillRef idx="3">
+            <a:schemeClr val="accent1"/>
+          </a:fillRef>
+          <a:effectRef idx="2">
+            <a:schemeClr val="accent1"/>
+          </a:effectRef>
+          <a:fontRef idx="minor">
+            <a:schemeClr val="lt1"/>
+          </a:fontRef>
+        </p:style>
+        <p:txBody>
+          <a:bodyPr rtlCol="0" anchor="ctr"/>
+          <a:lstStyle/>
+          <a:p>
+            <a:pPr algn="ctr"/>
+          </a:p>
+        </p:txBody>
+      </p:sp>
+      <p:sp>
+        <p:nvSpPr>
+          <p:cNvPr id="8" name="TextBox 7"/>
+          <p:cNvSpPr txBox="1"/>
+          <p:nvPr/>
+        </p:nvSpPr>
+        <p:spPr>
+          <a:xfrm>
+            <a:off x="7550000" y="2080000"/>
+            <a:ext cx="3750000" cy="1650000"/>
           </a:xfrm>
           <a:prstGeom prst="rect">
             <a:avLst/>
@@ -5162,6 +5527,218 @@
               </a:spcAft>
             </a:pPr>
             <a:r>
+              <a:rPr sz="1400" b="1">
+                <a:solidFill>
+                  <a:srgbClr val="0475B6"/>
+                </a:solidFill>
+                <a:latin typeface="微软雅黑"/>
+              </a:rPr>
+              <a:t>及格标准（D）</a:t>
+            </a:r>
+          </a:p>
+          <a:p>
+            <a:pPr algn="l">
+              <a:lnSpc>
+                <a:spcPct val="110000"/>
+              </a:lnSpc>
+              <a:spcAft>
+                <a:spcPts val="600"/>
+              </a:spcAft>
+            </a:pPr>
+            <a:r>
+              <a:rPr sz="1300" b="0">
+                <a:solidFill>
+                  <a:srgbClr val="010328"/>
+                </a:solidFill>
+                <a:latin typeface="微软雅黑"/>
+              </a:rPr>
+              <a:t>准确率≥75%+对比表</a:t>
+            </a:r>
+          </a:p>
+        </p:txBody>
+      </p:sp>
+      <p:sp>
+        <p:nvSpPr>
+          <p:cNvPr id="9" name="Rectangle 8"/>
+          <p:cNvSpPr/>
+          <p:nvPr/>
+        </p:nvSpPr>
+        <p:spPr>
+          <a:xfrm>
+            <a:off x="7400000" y="3950000"/>
+            <a:ext cx="4000000" cy="1850000"/>
+          </a:xfrm>
+          <a:prstGeom prst="rect">
+            <a:avLst/>
+          </a:prstGeom>
+          <a:solidFill>
+            <a:srgbClr val="FDF0E6"/>
+          </a:solidFill>
+          <a:ln>
+            <a:solidFill>
+              <a:srgbClr val="F5670F"/>
+            </a:solidFill>
+          </a:ln>
+          <a:effectLst/>
+        </p:spPr>
+        <p:style>
+          <a:lnRef idx="1">
+            <a:schemeClr val="accent1"/>
+          </a:lnRef>
+          <a:fillRef idx="3">
+            <a:schemeClr val="accent1"/>
+          </a:fillRef>
+          <a:effectRef idx="2">
+            <a:schemeClr val="accent1"/>
+          </a:effectRef>
+          <a:fontRef idx="minor">
+            <a:schemeClr val="lt1"/>
+          </a:fontRef>
+        </p:style>
+        <p:txBody>
+          <a:bodyPr rtlCol="0" anchor="ctr"/>
+          <a:lstStyle/>
+          <a:p>
+            <a:pPr algn="ctr"/>
+          </a:p>
+        </p:txBody>
+      </p:sp>
+      <p:sp>
+        <p:nvSpPr>
+          <p:cNvPr id="10" name="TextBox 9"/>
+          <p:cNvSpPr txBox="1"/>
+          <p:nvPr/>
+        </p:nvSpPr>
+        <p:spPr>
+          <a:xfrm>
+            <a:off x="7550000" y="4080000"/>
+            <a:ext cx="3750000" cy="1650000"/>
+          </a:xfrm>
+          <a:prstGeom prst="rect">
+            <a:avLst/>
+          </a:prstGeom>
+          <a:noFill/>
+        </p:spPr>
+        <p:txBody>
+          <a:bodyPr wrap="square" anchor="t">
+            <a:spAutoFit/>
+          </a:bodyPr>
+          <a:lstStyle/>
+          <a:p>
+            <a:pPr algn="l">
+              <a:lnSpc>
+                <a:spcPct val="110000"/>
+              </a:lnSpc>
+              <a:spcAft>
+                <a:spcPts val="600"/>
+              </a:spcAft>
+            </a:pPr>
+            <a:r>
+              <a:rPr sz="1400" b="1">
+                <a:solidFill>
+                  <a:srgbClr val="F5670F"/>
+                </a:solidFill>
+                <a:latin typeface="微软雅黑"/>
+              </a:rPr>
+              <a:t>优秀标准（B+）</a:t>
+            </a:r>
+          </a:p>
+          <a:p>
+            <a:pPr algn="l">
+              <a:lnSpc>
+                <a:spcPct val="110000"/>
+              </a:lnSpc>
+              <a:spcAft>
+                <a:spcPts val="600"/>
+              </a:spcAft>
+            </a:pPr>
+            <a:r>
+              <a:rPr sz="1300" b="0">
+                <a:solidFill>
+                  <a:srgbClr val="010328"/>
+                </a:solidFill>
+                <a:latin typeface="微软雅黑"/>
+              </a:rPr>
+              <a:t>准确率≥85%</a:t>
+            </a:r>
+          </a:p>
+        </p:txBody>
+      </p:sp>
+      <p:sp>
+        <p:nvSpPr>
+          <p:cNvPr id="11" name="Rectangle 10"/>
+          <p:cNvSpPr/>
+          <p:nvPr/>
+        </p:nvSpPr>
+        <p:spPr>
+          <a:xfrm>
+            <a:off x="500000" y="6500000"/>
+            <a:ext cx="11100000" cy="20000"/>
+          </a:xfrm>
+          <a:prstGeom prst="rect">
+            <a:avLst/>
+          </a:prstGeom>
+          <a:solidFill>
+            <a:srgbClr val="C9D4EE"/>
+          </a:solidFill>
+          <a:ln>
+            <a:noFill/>
+          </a:ln>
+          <a:effectLst/>
+        </p:spPr>
+        <p:style>
+          <a:lnRef idx="1">
+            <a:schemeClr val="accent1"/>
+          </a:lnRef>
+          <a:fillRef idx="3">
+            <a:schemeClr val="accent1"/>
+          </a:fillRef>
+          <a:effectRef idx="2">
+            <a:schemeClr val="accent1"/>
+          </a:effectRef>
+          <a:fontRef idx="minor">
+            <a:schemeClr val="lt1"/>
+          </a:fontRef>
+        </p:style>
+        <p:txBody>
+          <a:bodyPr rtlCol="0" anchor="ctr"/>
+          <a:lstStyle/>
+          <a:p>
+            <a:pPr algn="ctr"/>
+          </a:p>
+        </p:txBody>
+      </p:sp>
+      <p:sp>
+        <p:nvSpPr>
+          <p:cNvPr id="12" name="TextBox 11"/>
+          <p:cNvSpPr txBox="1"/>
+          <p:nvPr/>
+        </p:nvSpPr>
+        <p:spPr>
+          <a:xfrm>
+            <a:off x="500000" y="6540000"/>
+            <a:ext cx="7000000" cy="300000"/>
+          </a:xfrm>
+          <a:prstGeom prst="rect">
+            <a:avLst/>
+          </a:prstGeom>
+          <a:noFill/>
+        </p:spPr>
+        <p:txBody>
+          <a:bodyPr wrap="square" anchor="t">
+            <a:spAutoFit/>
+          </a:bodyPr>
+          <a:lstStyle/>
+          <a:p>
+            <a:pPr algn="l">
+              <a:lnSpc>
+                <a:spcPct val="110000"/>
+              </a:lnSpc>
+              <a:spcAft>
+                <a:spcPts val="600"/>
+              </a:spcAft>
+            </a:pPr>
+            <a:r>
               <a:rPr sz="1000" b="0">
                 <a:solidFill>
                   <a:srgbClr val="8A97B5"/>
@@ -5210,346 +5787,7 @@
                 </a:solidFill>
                 <a:latin typeface="微软雅黑"/>
               </a:rPr>
-              <a:t>11 / 19</a:t>
-            </a:r>
-          </a:p>
-        </p:txBody>
-      </p:sp>
-      <p:sp>
-        <p:nvSpPr>
-          <p:cNvPr id="14" name="Rounded Rectangle 13"/>
-          <p:cNvSpPr/>
-          <p:nvPr/>
-        </p:nvSpPr>
-        <p:spPr>
-          <a:xfrm>
-            <a:off x="758952" y="1801368"/>
-            <a:ext cx="10899648" cy="2286000"/>
-          </a:xfrm>
-          <a:prstGeom prst="roundRect">
-            <a:avLst>
-              <a:gd name="adj" fmla="val 6000"/>
-            </a:avLst>
-          </a:prstGeom>
-          <a:solidFill>
-            <a:srgbClr val="F3F6FD"/>
-          </a:solidFill>
-          <a:ln w="9525">
-            <a:solidFill>
-              <a:srgbClr val="C9D4EE"/>
-            </a:solidFill>
-          </a:ln>
-          <a:effectLst/>
-        </p:spPr>
-        <p:style>
-          <a:lnRef idx="1">
-            <a:schemeClr val="accent1"/>
-          </a:lnRef>
-          <a:fillRef idx="3">
-            <a:schemeClr val="accent1"/>
-          </a:fillRef>
-          <a:effectRef idx="2">
-            <a:schemeClr val="accent1"/>
-          </a:effectRef>
-          <a:fontRef idx="minor">
-            <a:schemeClr val="lt1"/>
-          </a:fontRef>
-        </p:style>
-        <p:txBody>
-          <a:bodyPr rtlCol="0" anchor="ctr"/>
-          <a:lstStyle/>
-          <a:p/>
-        </p:txBody>
-      </p:sp>
-      <p:sp>
-        <p:nvSpPr>
-          <p:cNvPr id="15" name="Rounded Rectangle 14"/>
-          <p:cNvSpPr/>
-          <p:nvPr/>
-        </p:nvSpPr>
-        <p:spPr>
-          <a:xfrm>
-            <a:off x="758952" y="4178808"/>
-            <a:ext cx="10899648" cy="1051560"/>
-          </a:xfrm>
-          <a:prstGeom prst="roundRect">
-            <a:avLst>
-              <a:gd name="adj" fmla="val 6000"/>
-            </a:avLst>
-          </a:prstGeom>
-          <a:solidFill>
-            <a:srgbClr val="FFFFFF"/>
-          </a:solidFill>
-          <a:ln w="9525">
-            <a:solidFill>
-              <a:srgbClr val="C9D4EE"/>
-            </a:solidFill>
-          </a:ln>
-          <a:effectLst/>
-        </p:spPr>
-        <p:style>
-          <a:lnRef idx="1">
-            <a:schemeClr val="accent1"/>
-          </a:lnRef>
-          <a:fillRef idx="3">
-            <a:schemeClr val="accent1"/>
-          </a:fillRef>
-          <a:effectRef idx="2">
-            <a:schemeClr val="accent1"/>
-          </a:effectRef>
-          <a:fontRef idx="minor">
-            <a:schemeClr val="lt1"/>
-          </a:fontRef>
-        </p:style>
-        <p:txBody>
-          <a:bodyPr rtlCol="0" anchor="ctr"/>
-          <a:lstStyle/>
-          <a:p/>
-        </p:txBody>
-      </p:sp>
-      <p:sp>
-        <p:nvSpPr>
-          <p:cNvPr id="16" name="Rounded Rectangle 15"/>
-          <p:cNvSpPr/>
-          <p:nvPr/>
-        </p:nvSpPr>
-        <p:spPr>
-          <a:xfrm>
-            <a:off x="758952" y="5321808"/>
-            <a:ext cx="10899648" cy="1005840"/>
-          </a:xfrm>
-          <a:prstGeom prst="roundRect">
-            <a:avLst>
-              <a:gd name="adj" fmla="val 6000"/>
-            </a:avLst>
-          </a:prstGeom>
-          <a:solidFill>
-            <a:srgbClr val="FFFFFF"/>
-          </a:solidFill>
-          <a:ln w="9525">
-            <a:solidFill>
-              <a:srgbClr val="C9D4EE"/>
-            </a:solidFill>
-          </a:ln>
-          <a:effectLst/>
-        </p:spPr>
-        <p:style>
-          <a:lnRef idx="1">
-            <a:schemeClr val="accent1"/>
-          </a:lnRef>
-          <a:fillRef idx="3">
-            <a:schemeClr val="accent1"/>
-          </a:fillRef>
-          <a:effectRef idx="2">
-            <a:schemeClr val="accent1"/>
-          </a:effectRef>
-          <a:fontRef idx="minor">
-            <a:schemeClr val="lt1"/>
-          </a:fontRef>
-        </p:style>
-        <p:txBody>
-          <a:bodyPr rtlCol="0" anchor="ctr"/>
-          <a:lstStyle/>
-          <a:p/>
-        </p:txBody>
-      </p:sp>
-      <p:sp>
-        <p:nvSpPr>
-          <p:cNvPr id="17" name="TextBox 16"/>
-          <p:cNvSpPr txBox="1"/>
-          <p:nvPr/>
-        </p:nvSpPr>
-        <p:spPr>
-          <a:xfrm>
-            <a:off x="960120" y="1929384"/>
-            <a:ext cx="10469880" cy="2048256"/>
-          </a:xfrm>
-          <a:prstGeom prst="rect">
-            <a:avLst/>
-          </a:prstGeom>
-          <a:noFill/>
-        </p:spPr>
-        <p:txBody>
-          <a:bodyPr wrap="square" anchor="t" lIns="0" rIns="0" tIns="0" bIns="0">
-            <a:spAutoFit/>
-          </a:bodyPr>
-          <a:lstStyle/>
-          <a:p>
-            <a:pPr algn="l"/>
-            <a:r>
-              <a:rPr sz="1400" b="1">
-                <a:solidFill>
-                  <a:srgbClr val="0545E8"/>
-                </a:solidFill>
-              </a:rPr>
-              <a:t>① 项目位置与一键运行</a:t>
-            </a:r>
-          </a:p>
-          <a:p>
-            <a:pPr algn="l"/>
-            <a:r>
-              <a:rPr sz="1400" b="1">
-                <a:solidFill>
-                  <a:srgbClr val="0545E8"/>
-                </a:solidFill>
-              </a:rPr>
-              <a:t>工程化项目/m31_transfer/</a:t>
-            </a:r>
-          </a:p>
-          <a:p>
-            <a:pPr algn="l"/>
-            <a:r>
-              <a:rPr sz="1400" b="1">
-                <a:solidFill>
-                  <a:srgbClr val="0545E8"/>
-                </a:solidFill>
-              </a:rPr>
-              <a:t>python run.py          # 输出 output/report.txt + result.json</a:t>
-            </a:r>
-          </a:p>
-          <a:p>
-            <a:pPr algn="l"/>
-            <a:r>
-              <a:rPr sz="1400" b="1">
-                <a:solidFill>
-                  <a:srgbClr val="0545E8"/>
-                </a:solidFill>
-              </a:rPr>
-              <a:t>python -m pytest -q    # 全量测试应全绿</a:t>
-            </a:r>
-          </a:p>
-        </p:txBody>
-      </p:sp>
-      <p:sp>
-        <p:nvSpPr>
-          <p:cNvPr id="18" name="TextBox 17"/>
-          <p:cNvSpPr txBox="1"/>
-          <p:nvPr/>
-        </p:nvSpPr>
-        <p:spPr>
-          <a:xfrm>
-            <a:off x="960120" y="4297680"/>
-            <a:ext cx="10469880" cy="868680"/>
-          </a:xfrm>
-          <a:prstGeom prst="rect">
-            <a:avLst/>
-          </a:prstGeom>
-          <a:noFill/>
-        </p:spPr>
-        <p:txBody>
-          <a:bodyPr wrap="square" anchor="t" lIns="0" rIns="0" tIns="0" bIns="0">
-            <a:spAutoFit/>
-          </a:bodyPr>
-          <a:lstStyle/>
-          <a:p>
-            <a:pPr algn="l"/>
-            <a:r>
-              <a:rPr sz="1300" b="1">
-                <a:solidFill>
-                  <a:srgbClr val="0545E8"/>
-                </a:solidFill>
-              </a:rPr>
-              <a:t>② 目录结构（23 个文件）</a:t>
-            </a:r>
-          </a:p>
-          <a:p>
-            <a:pPr algn="l"/>
-            <a:r>
-              <a:rPr sz="1300" b="1">
-                <a:solidFill>
-                  <a:srgbClr val="0545E8"/>
-                </a:solidFill>
-              </a:rPr>
-              <a:t>config/rules.yaml      规则外置：改配置不改代码</a:t>
-            </a:r>
-          </a:p>
-          <a:p>
-            <a:pPr algn="l"/>
-            <a:r>
-              <a:rPr sz="1300" b="1">
-                <a:solidFill>
-                  <a:srgbClr val="0545E8"/>
-                </a:solidFill>
-              </a:rPr>
-              <a:t>src/transfer_learning/  config · core · io_utils · report · pipeline</a:t>
-            </a:r>
-          </a:p>
-          <a:p>
-            <a:pPr algn="l"/>
-            <a:r>
-              <a:rPr sz="1300" b="1">
-                <a:solidFill>
-                  <a:srgbClr val="0545E8"/>
-                </a:solidFill>
-              </a:rPr>
-              <a:t>tests/      正常 / 边界 / 异常三档</a:t>
-            </a:r>
-          </a:p>
-        </p:txBody>
-      </p:sp>
-      <p:sp>
-        <p:nvSpPr>
-          <p:cNvPr id="19" name="TextBox 18"/>
-          <p:cNvSpPr txBox="1"/>
-          <p:nvPr/>
-        </p:nvSpPr>
-        <p:spPr>
-          <a:xfrm>
-            <a:off x="960120" y="5431536"/>
-            <a:ext cx="10469880" cy="841248"/>
-          </a:xfrm>
-          <a:prstGeom prst="rect">
-            <a:avLst/>
-          </a:prstGeom>
-          <a:noFill/>
-        </p:spPr>
-        <p:txBody>
-          <a:bodyPr wrap="square" anchor="t" lIns="0" rIns="0" tIns="0" bIns="0">
-            <a:spAutoFit/>
-          </a:bodyPr>
-          <a:lstStyle/>
-          <a:p>
-            <a:pPr algn="l"/>
-            <a:r>
-              <a:rPr sz="1300" b="1">
-                <a:solidFill>
-                  <a:srgbClr val="F5670F"/>
-                </a:solidFill>
-              </a:rPr>
-              <a:t>③ 国标与 TOGAF 落地</a:t>
-            </a:r>
-          </a:p>
-          <a:p>
-            <a:pPr algn="l"/>
-            <a:r>
-              <a:rPr sz="1300" b="1">
-                <a:solidFill>
-                  <a:srgbClr val="F5670F"/>
-                </a:solidFill>
-              </a:rPr>
-              <a:t>GB/T 9385 需求规格 / 15532 测试 / 8567 文档 / 8566 过程组</a:t>
-            </a:r>
-          </a:p>
-          <a:p>
-            <a:pPr algn="l"/>
-            <a:r>
-              <a:rPr sz="1300" b="1">
-                <a:solidFill>
-                  <a:srgbClr val="F5670F"/>
-                </a:solidFill>
-              </a:rPr>
-              <a:t>TOGAF 四域：业务 · 数据 · 应用 · 技术架构</a:t>
-            </a:r>
-          </a:p>
-          <a:p>
-            <a:pPr algn="l"/>
-            <a:r>
-              <a:rPr sz="1300" b="1">
-                <a:solidFill>
-                  <a:srgbClr val="F5670F"/>
-                </a:solidFill>
-              </a:rPr>
-              <a:t>docs/07 ADR-001 架构决策记录</a:t>
+              <a:t>11 / 21</a:t>
             </a:r>
           </a:p>
         </p:txBody>
@@ -5697,7 +5935,7 @@
                 </a:solidFill>
                 <a:latin typeface="微软雅黑"/>
               </a:rPr>
-              <a:t>实测验收 · m31_transfer</a:t>
+              <a:t>工单完成效果图 · 先看终点（本课目标预览）</a:t>
             </a:r>
           </a:p>
         </p:txBody>
@@ -5825,7 +6063,1248 @@
                 </a:solidFill>
                 <a:latin typeface="微软雅黑"/>
               </a:rPr>
-              <a:t>12 / 19</a:t>
+              <a:t>12 / 21</a:t>
+            </a:r>
+          </a:p>
+        </p:txBody>
+      </p:sp>
+      <p:sp>
+        <p:nvSpPr>
+          <p:cNvPr id="14" name="Rounded Rectangle 13"/>
+          <p:cNvSpPr/>
+          <p:nvPr/>
+        </p:nvSpPr>
+        <p:spPr>
+          <a:xfrm>
+            <a:off x="758952" y="1801368"/>
+            <a:ext cx="10899648" cy="2286000"/>
+          </a:xfrm>
+          <a:prstGeom prst="roundRect">
+            <a:avLst>
+              <a:gd name="adj" fmla="val 6000"/>
+            </a:avLst>
+          </a:prstGeom>
+          <a:solidFill>
+            <a:srgbClr val="F3F6FD"/>
+          </a:solidFill>
+          <a:ln w="9525">
+            <a:solidFill>
+              <a:srgbClr val="C9D4EE"/>
+            </a:solidFill>
+          </a:ln>
+          <a:effectLst/>
+        </p:spPr>
+        <p:style>
+          <a:lnRef idx="1">
+            <a:schemeClr val="accent1"/>
+          </a:lnRef>
+          <a:fillRef idx="3">
+            <a:schemeClr val="accent1"/>
+          </a:fillRef>
+          <a:effectRef idx="2">
+            <a:schemeClr val="accent1"/>
+          </a:effectRef>
+          <a:fontRef idx="minor">
+            <a:schemeClr val="lt1"/>
+          </a:fontRef>
+        </p:style>
+        <p:txBody>
+          <a:bodyPr rtlCol="0" anchor="ctr"/>
+          <a:lstStyle/>
+          <a:p/>
+        </p:txBody>
+      </p:sp>
+      <p:sp>
+        <p:nvSpPr>
+          <p:cNvPr id="15" name="Rounded Rectangle 14"/>
+          <p:cNvSpPr/>
+          <p:nvPr/>
+        </p:nvSpPr>
+        <p:spPr>
+          <a:xfrm>
+            <a:off x="758952" y="4178808"/>
+            <a:ext cx="10899648" cy="1051560"/>
+          </a:xfrm>
+          <a:prstGeom prst="roundRect">
+            <a:avLst>
+              <a:gd name="adj" fmla="val 6000"/>
+            </a:avLst>
+          </a:prstGeom>
+          <a:solidFill>
+            <a:srgbClr val="FFFFFF"/>
+          </a:solidFill>
+          <a:ln w="9525">
+            <a:solidFill>
+              <a:srgbClr val="C9D4EE"/>
+            </a:solidFill>
+          </a:ln>
+          <a:effectLst/>
+        </p:spPr>
+        <p:style>
+          <a:lnRef idx="1">
+            <a:schemeClr val="accent1"/>
+          </a:lnRef>
+          <a:fillRef idx="3">
+            <a:schemeClr val="accent1"/>
+          </a:fillRef>
+          <a:effectRef idx="2">
+            <a:schemeClr val="accent1"/>
+          </a:effectRef>
+          <a:fontRef idx="minor">
+            <a:schemeClr val="lt1"/>
+          </a:fontRef>
+        </p:style>
+        <p:txBody>
+          <a:bodyPr rtlCol="0" anchor="ctr"/>
+          <a:lstStyle/>
+          <a:p/>
+        </p:txBody>
+      </p:sp>
+      <p:sp>
+        <p:nvSpPr>
+          <p:cNvPr id="16" name="Rounded Rectangle 15"/>
+          <p:cNvSpPr/>
+          <p:nvPr/>
+        </p:nvSpPr>
+        <p:spPr>
+          <a:xfrm>
+            <a:off x="758952" y="5321808"/>
+            <a:ext cx="10899648" cy="1005840"/>
+          </a:xfrm>
+          <a:prstGeom prst="roundRect">
+            <a:avLst>
+              <a:gd name="adj" fmla="val 6000"/>
+            </a:avLst>
+          </a:prstGeom>
+          <a:solidFill>
+            <a:srgbClr val="FFFFFF"/>
+          </a:solidFill>
+          <a:ln w="9525">
+            <a:solidFill>
+              <a:srgbClr val="C9D4EE"/>
+            </a:solidFill>
+          </a:ln>
+          <a:effectLst/>
+        </p:spPr>
+        <p:style>
+          <a:lnRef idx="1">
+            <a:schemeClr val="accent1"/>
+          </a:lnRef>
+          <a:fillRef idx="3">
+            <a:schemeClr val="accent1"/>
+          </a:fillRef>
+          <a:effectRef idx="2">
+            <a:schemeClr val="accent1"/>
+          </a:effectRef>
+          <a:fontRef idx="minor">
+            <a:schemeClr val="lt1"/>
+          </a:fontRef>
+        </p:style>
+        <p:txBody>
+          <a:bodyPr rtlCol="0" anchor="ctr"/>
+          <a:lstStyle/>
+          <a:p/>
+        </p:txBody>
+      </p:sp>
+      <p:sp>
+        <p:nvSpPr>
+          <p:cNvPr id="17" name="TextBox 16"/>
+          <p:cNvSpPr txBox="1"/>
+          <p:nvPr/>
+        </p:nvSpPr>
+        <p:spPr>
+          <a:xfrm>
+            <a:off x="960120" y="1929384"/>
+            <a:ext cx="10469880" cy="2048256"/>
+          </a:xfrm>
+          <a:prstGeom prst="rect">
+            <a:avLst/>
+          </a:prstGeom>
+          <a:noFill/>
+        </p:spPr>
+        <p:txBody>
+          <a:bodyPr wrap="square" anchor="t" lIns="0" rIns="0" tIns="0" bIns="0">
+            <a:spAutoFit/>
+          </a:bodyPr>
+          <a:lstStyle/>
+          <a:p>
+            <a:pPr algn="l"/>
+            <a:r>
+              <a:rPr sz="1150" b="1">
+                <a:solidFill>
+                  <a:srgbClr val="0545E8"/>
+                </a:solidFill>
+              </a:rPr>
+              <a:t>① 本次真跑实测输出（逐字取自 output/report.txt）</a:t>
+            </a:r>
+          </a:p>
+          <a:p>
+            <a:r>
+              <a:rPr sz="1150" b="1">
+                <a:solidFill>
+                  <a:srgbClr val="0545E8"/>
+                </a:solidFill>
+              </a:rPr>
+              <a:t>实测达成档位: 优(A) ｜ 实测最优准确率 1.0000 ｜ 规范率 97.39% ｜ 对照表实测行 4 条 ｜ 增强增益 冻结 -0.0050/微调 +0.4850 ｜ 决策记录 1 条 ｜ 曲线 1 张</a:t>
+            </a:r>
+          </a:p>
+          <a:p>
+            <a:r>
+              <a:rPr sz="1150" b="1">
+                <a:solidFill>
+                  <a:srgbClr val="0545E8"/>
+                </a:solidFill>
+              </a:rPr>
+              <a:t>及格(D)    规范率门槛≥70% [达标] ｜ 功能OK ｜ 准确率门槛≥0.7（实测 1.0000）</a:t>
+            </a:r>
+          </a:p>
+          <a:p>
+            <a:r>
+              <a:rPr sz="1150" b="1">
+                <a:solidFill>
+                  <a:srgbClr val="0545E8"/>
+                </a:solidFill>
+              </a:rPr>
+              <a:t>良好(C)    规范率门槛≥70% [达标] ｜ 功能OK ｜ 准确率≥0.75 且对照行≥2（实测 1.0000 / 4 行）</a:t>
+            </a:r>
+          </a:p>
+          <a:p>
+            <a:r>
+              <a:rPr sz="1150" b="1">
+                <a:solidFill>
+                  <a:srgbClr val="0545E8"/>
+                </a:solidFill>
+              </a:rPr>
+              <a:t>优秀(B)    规范率门槛≥70% [达标] ｜ 功能OK ｜ 准确率≥0.8 或增强有效（增益见上行）且决策记录≥1（实测 1）</a:t>
+            </a:r>
+          </a:p>
+          <a:p>
+            <a:r>
+              <a:rPr sz="1150" b="1">
+                <a:solidFill>
+                  <a:srgbClr val="0545E8"/>
+                </a:solidFill>
+              </a:rPr>
+              <a:t>优(A)     规范率门槛≥70% [达标] ｜ 功能OK ｜ 准确率≥0.85 且有训练曲线（实测 1.0000 / 1 张）</a:t>
+            </a:r>
+          </a:p>
+          <a:p>
+            <a:r>
+              <a:rPr sz="1150" b="1">
+                <a:solidFill>
+                  <a:srgbClr val="0545E8"/>
+                </a:solidFill>
+              </a:rPr>
+              <a:t>人工答辩项 3 条，教师答辩时确认：</a:t>
+            </a:r>
+          </a:p>
+          <a:p>
+            <a:r>
+              <a:rPr sz="1150" b="1">
+                <a:solidFill>
+                  <a:srgbClr val="0545E8"/>
+                </a:solidFill>
+              </a:rPr>
+              <a:t>- 决策结论与理由的口头陈述（工单：答辩必答）</a:t>
+            </a:r>
+          </a:p>
+          <a:p>
+            <a:r>
+              <a:rPr sz="1150" b="1">
+                <a:solidFill>
+                  <a:srgbClr val="0545E8"/>
+                </a:solidFill>
+              </a:rPr>
+              <a:t>……（后续 2 行全文逐字见 工程化项目/output/report.txt）</a:t>
+            </a:r>
+          </a:p>
+        </p:txBody>
+      </p:sp>
+      <p:sp>
+        <p:nvSpPr>
+          <p:cNvPr id="18" name="TextBox 17"/>
+          <p:cNvSpPr txBox="1"/>
+          <p:nvPr/>
+        </p:nvSpPr>
+        <p:spPr>
+          <a:xfrm>
+            <a:off x="960120" y="4297680"/>
+            <a:ext cx="10469880" cy="868680"/>
+          </a:xfrm>
+          <a:prstGeom prst="rect">
+            <a:avLst/>
+          </a:prstGeom>
+          <a:noFill/>
+        </p:spPr>
+        <p:txBody>
+          <a:bodyPr wrap="square" anchor="t" lIns="0" rIns="0" tIns="0" bIns="0">
+            <a:spAutoFit/>
+          </a:bodyPr>
+          <a:lstStyle/>
+          <a:p>
+            <a:pPr algn="l"/>
+            <a:r>
+              <a:rPr sz="1300" b="1">
+                <a:solidFill>
+                  <a:srgbClr val="0545E8"/>
+                </a:solidFill>
+              </a:rPr>
+              <a:t>② 关键自检点（对照工单逐项核对）</a:t>
+            </a:r>
+          </a:p>
+          <a:p>
+            <a:pPr algn="l">
+              <a:spcBef>
+                <a:spcPts val="200"/>
+              </a:spcBef>
+            </a:pPr>
+            <a:r>
+              <a:rPr sz="1150" b="0">
+                <a:solidFill>
+                  <a:srgbClr val="010328"/>
+                </a:solidFill>
+              </a:rPr>
+              <a:t>□ 代码从头跑到尾不报错　□ 指标与工单及格线逐项对齐　□ 随机种子已固定（可复现）</a:t>
+            </a:r>
+          </a:p>
+        </p:txBody>
+      </p:sp>
+      <p:sp>
+        <p:nvSpPr>
+          <p:cNvPr id="19" name="TextBox 18"/>
+          <p:cNvSpPr txBox="1"/>
+          <p:nvPr/>
+        </p:nvSpPr>
+        <p:spPr>
+          <a:xfrm>
+            <a:off x="960120" y="5431536"/>
+            <a:ext cx="10469880" cy="841248"/>
+          </a:xfrm>
+          <a:prstGeom prst="rect">
+            <a:avLst/>
+          </a:prstGeom>
+          <a:noFill/>
+        </p:spPr>
+        <p:txBody>
+          <a:bodyPr wrap="square" anchor="t" lIns="0" rIns="0" tIns="0" bIns="0">
+            <a:spAutoFit/>
+          </a:bodyPr>
+          <a:lstStyle/>
+          <a:p>
+            <a:pPr algn="l"/>
+            <a:r>
+              <a:rPr sz="1300" b="1">
+                <a:solidFill>
+                  <a:srgbClr val="F5670F"/>
+                </a:solidFill>
+              </a:rPr>
+              <a:t>③ 提交与达标（过程性证据）</a:t>
+            </a:r>
+          </a:p>
+          <a:p>
+            <a:pPr algn="l">
+              <a:spcBef>
+                <a:spcPts val="200"/>
+              </a:spcBef>
+            </a:pPr>
+            <a:r>
+              <a:rPr sz="1100" b="0">
+                <a:solidFill>
+                  <a:srgbClr val="010328"/>
+                </a:solidFill>
+              </a:rPr>
+              <a:t>达标线 D≥60 / C≥70 / B≥80 / A≥90　｜　提交 学号_姓名_工单号 + 运行截图 + 决策记录 + Git≥1次commit</a:t>
+            </a:r>
+          </a:p>
+        </p:txBody>
+      </p:sp>
+    </p:spTree>
+  </p:cSld>
+  <p:clrMapOvr>
+    <a:masterClrMapping/>
+  </p:clrMapOvr>
+</p:sld>
+</file>
+
+<file path=ppt/slides/slide13.xml><?xml version="1.0" encoding="utf-8"?>
+<p:sld xmlns:a="http://schemas.openxmlformats.org/drawingml/2006/main" xmlns:p="http://schemas.openxmlformats.org/presentationml/2006/main" xmlns:r="http://schemas.openxmlformats.org/officeDocument/2006/relationships">
+  <p:cSld>
+    <p:spTree>
+      <p:nvGrpSpPr>
+        <p:cNvPr id="1" name=""/>
+        <p:cNvGrpSpPr/>
+        <p:nvPr/>
+      </p:nvGrpSpPr>
+      <p:grpSpPr/>
+      <p:sp>
+        <p:nvSpPr>
+          <p:cNvPr id="2" name="Rectangle 1"/>
+          <p:cNvSpPr/>
+          <p:nvPr/>
+        </p:nvSpPr>
+        <p:spPr>
+          <a:xfrm>
+            <a:off x="0" y="0"/>
+            <a:ext cx="12192000" cy="1150000"/>
+          </a:xfrm>
+          <a:prstGeom prst="rect">
+            <a:avLst/>
+          </a:prstGeom>
+          <a:solidFill>
+            <a:srgbClr val="010328"/>
+          </a:solidFill>
+          <a:ln>
+            <a:noFill/>
+          </a:ln>
+          <a:effectLst/>
+        </p:spPr>
+        <p:style>
+          <a:lnRef idx="1">
+            <a:schemeClr val="accent1"/>
+          </a:lnRef>
+          <a:fillRef idx="3">
+            <a:schemeClr val="accent1"/>
+          </a:fillRef>
+          <a:effectRef idx="2">
+            <a:schemeClr val="accent1"/>
+          </a:effectRef>
+          <a:fontRef idx="minor">
+            <a:schemeClr val="lt1"/>
+          </a:fontRef>
+        </p:style>
+        <p:txBody>
+          <a:bodyPr rtlCol="0" anchor="ctr"/>
+          <a:lstStyle/>
+          <a:p>
+            <a:pPr algn="ctr"/>
+          </a:p>
+        </p:txBody>
+      </p:sp>
+      <p:sp>
+        <p:nvSpPr>
+          <p:cNvPr id="3" name="Rectangle 2"/>
+          <p:cNvSpPr/>
+          <p:nvPr/>
+        </p:nvSpPr>
+        <p:spPr>
+          <a:xfrm>
+            <a:off x="0" y="1150000"/>
+            <a:ext cx="2600000" cy="70000"/>
+          </a:xfrm>
+          <a:prstGeom prst="rect">
+            <a:avLst/>
+          </a:prstGeom>
+          <a:solidFill>
+            <a:srgbClr val="F5670F"/>
+          </a:solidFill>
+          <a:ln>
+            <a:noFill/>
+          </a:ln>
+          <a:effectLst/>
+        </p:spPr>
+        <p:style>
+          <a:lnRef idx="1">
+            <a:schemeClr val="accent1"/>
+          </a:lnRef>
+          <a:fillRef idx="3">
+            <a:schemeClr val="accent1"/>
+          </a:fillRef>
+          <a:effectRef idx="2">
+            <a:schemeClr val="accent1"/>
+          </a:effectRef>
+          <a:fontRef idx="minor">
+            <a:schemeClr val="lt1"/>
+          </a:fontRef>
+        </p:style>
+        <p:txBody>
+          <a:bodyPr rtlCol="0" anchor="ctr"/>
+          <a:lstStyle/>
+          <a:p>
+            <a:pPr algn="ctr"/>
+          </a:p>
+        </p:txBody>
+      </p:sp>
+      <p:sp>
+        <p:nvSpPr>
+          <p:cNvPr id="4" name="TextBox 3"/>
+          <p:cNvSpPr txBox="1"/>
+          <p:nvPr/>
+        </p:nvSpPr>
+        <p:spPr>
+          <a:xfrm>
+            <a:off x="700000" y="300000"/>
+            <a:ext cx="10792000" cy="700000"/>
+          </a:xfrm>
+          <a:prstGeom prst="rect">
+            <a:avLst/>
+          </a:prstGeom>
+          <a:noFill/>
+        </p:spPr>
+        <p:txBody>
+          <a:bodyPr wrap="square" anchor="t">
+            <a:spAutoFit/>
+          </a:bodyPr>
+          <a:lstStyle/>
+          <a:p>
+            <a:pPr algn="l">
+              <a:lnSpc>
+                <a:spcPct val="110000"/>
+              </a:lnSpc>
+              <a:spcAft>
+                <a:spcPts val="600"/>
+              </a:spcAft>
+            </a:pPr>
+            <a:r>
+              <a:rPr sz="2400" b="1">
+                <a:solidFill>
+                  <a:srgbClr val="FFFFFF"/>
+                </a:solidFill>
+                <a:latin typeface="微软雅黑"/>
+              </a:rPr>
+              <a:t>本工单的工程化项目 · 第三种代码形态</a:t>
+            </a:r>
+          </a:p>
+        </p:txBody>
+      </p:sp>
+      <p:sp>
+        <p:nvSpPr>
+          <p:cNvPr id="11" name="Rectangle 10"/>
+          <p:cNvSpPr/>
+          <p:nvPr/>
+        </p:nvSpPr>
+        <p:spPr>
+          <a:xfrm>
+            <a:off x="500000" y="6500000"/>
+            <a:ext cx="11100000" cy="20000"/>
+          </a:xfrm>
+          <a:prstGeom prst="rect">
+            <a:avLst/>
+          </a:prstGeom>
+          <a:solidFill>
+            <a:srgbClr val="C9D4EE"/>
+          </a:solidFill>
+          <a:ln>
+            <a:noFill/>
+          </a:ln>
+          <a:effectLst/>
+        </p:spPr>
+        <p:style>
+          <a:lnRef idx="1">
+            <a:schemeClr val="accent1"/>
+          </a:lnRef>
+          <a:fillRef idx="3">
+            <a:schemeClr val="accent1"/>
+          </a:fillRef>
+          <a:effectRef idx="2">
+            <a:schemeClr val="accent1"/>
+          </a:effectRef>
+          <a:fontRef idx="minor">
+            <a:schemeClr val="lt1"/>
+          </a:fontRef>
+        </p:style>
+        <p:txBody>
+          <a:bodyPr rtlCol="0" anchor="ctr"/>
+          <a:lstStyle/>
+          <a:p>
+            <a:pPr algn="ctr"/>
+          </a:p>
+        </p:txBody>
+      </p:sp>
+      <p:sp>
+        <p:nvSpPr>
+          <p:cNvPr id="12" name="TextBox 11"/>
+          <p:cNvSpPr txBox="1"/>
+          <p:nvPr/>
+        </p:nvSpPr>
+        <p:spPr>
+          <a:xfrm>
+            <a:off x="500000" y="6540000"/>
+            <a:ext cx="7000000" cy="300000"/>
+          </a:xfrm>
+          <a:prstGeom prst="rect">
+            <a:avLst/>
+          </a:prstGeom>
+          <a:noFill/>
+        </p:spPr>
+        <p:txBody>
+          <a:bodyPr wrap="square" anchor="t">
+            <a:spAutoFit/>
+          </a:bodyPr>
+          <a:lstStyle/>
+          <a:p>
+            <a:pPr algn="l">
+              <a:lnSpc>
+                <a:spcPct val="110000"/>
+              </a:lnSpc>
+              <a:spcAft>
+                <a:spcPts val="600"/>
+              </a:spcAft>
+            </a:pPr>
+            <a:r>
+              <a:rPr sz="1000" b="0">
+                <a:solidFill>
+                  <a:srgbClr val="8A97B5"/>
+                </a:solidFill>
+                <a:latin typeface="微软雅黑"/>
+              </a:rPr>
+              <a:t>两江智造集团 · AI应用基础48课时版</a:t>
+            </a:r>
+          </a:p>
+        </p:txBody>
+      </p:sp>
+      <p:sp>
+        <p:nvSpPr>
+          <p:cNvPr id="13" name="TextBox 12"/>
+          <p:cNvSpPr txBox="1"/>
+          <p:nvPr/>
+        </p:nvSpPr>
+        <p:spPr>
+          <a:xfrm>
+            <a:off x="10600000" y="6540000"/>
+            <a:ext cx="1000000" cy="300000"/>
+          </a:xfrm>
+          <a:prstGeom prst="rect">
+            <a:avLst/>
+          </a:prstGeom>
+          <a:noFill/>
+        </p:spPr>
+        <p:txBody>
+          <a:bodyPr wrap="square" anchor="t">
+            <a:spAutoFit/>
+          </a:bodyPr>
+          <a:lstStyle/>
+          <a:p>
+            <a:pPr algn="r">
+              <a:lnSpc>
+                <a:spcPct val="110000"/>
+              </a:lnSpc>
+              <a:spcAft>
+                <a:spcPts val="600"/>
+              </a:spcAft>
+            </a:pPr>
+            <a:r>
+              <a:rPr sz="1000" b="0">
+                <a:solidFill>
+                  <a:srgbClr val="8A97B5"/>
+                </a:solidFill>
+                <a:latin typeface="微软雅黑"/>
+              </a:rPr>
+              <a:t>13 / 21</a:t>
+            </a:r>
+          </a:p>
+        </p:txBody>
+      </p:sp>
+      <p:sp>
+        <p:nvSpPr>
+          <p:cNvPr id="14" name="Rounded Rectangle 13"/>
+          <p:cNvSpPr/>
+          <p:nvPr/>
+        </p:nvSpPr>
+        <p:spPr>
+          <a:xfrm>
+            <a:off x="758952" y="1801368"/>
+            <a:ext cx="10899648" cy="2286000"/>
+          </a:xfrm>
+          <a:prstGeom prst="roundRect">
+            <a:avLst>
+              <a:gd name="adj" fmla="val 6000"/>
+            </a:avLst>
+          </a:prstGeom>
+          <a:solidFill>
+            <a:srgbClr val="F3F6FD"/>
+          </a:solidFill>
+          <a:ln w="9525">
+            <a:solidFill>
+              <a:srgbClr val="C9D4EE"/>
+            </a:solidFill>
+          </a:ln>
+          <a:effectLst/>
+        </p:spPr>
+        <p:style>
+          <a:lnRef idx="1">
+            <a:schemeClr val="accent1"/>
+          </a:lnRef>
+          <a:fillRef idx="3">
+            <a:schemeClr val="accent1"/>
+          </a:fillRef>
+          <a:effectRef idx="2">
+            <a:schemeClr val="accent1"/>
+          </a:effectRef>
+          <a:fontRef idx="minor">
+            <a:schemeClr val="lt1"/>
+          </a:fontRef>
+        </p:style>
+        <p:txBody>
+          <a:bodyPr rtlCol="0" anchor="ctr"/>
+          <a:lstStyle/>
+          <a:p/>
+        </p:txBody>
+      </p:sp>
+      <p:sp>
+        <p:nvSpPr>
+          <p:cNvPr id="15" name="Rounded Rectangle 14"/>
+          <p:cNvSpPr/>
+          <p:nvPr/>
+        </p:nvSpPr>
+        <p:spPr>
+          <a:xfrm>
+            <a:off x="758952" y="4178808"/>
+            <a:ext cx="10899648" cy="1051560"/>
+          </a:xfrm>
+          <a:prstGeom prst="roundRect">
+            <a:avLst>
+              <a:gd name="adj" fmla="val 6000"/>
+            </a:avLst>
+          </a:prstGeom>
+          <a:solidFill>
+            <a:srgbClr val="FFFFFF"/>
+          </a:solidFill>
+          <a:ln w="9525">
+            <a:solidFill>
+              <a:srgbClr val="C9D4EE"/>
+            </a:solidFill>
+          </a:ln>
+          <a:effectLst/>
+        </p:spPr>
+        <p:style>
+          <a:lnRef idx="1">
+            <a:schemeClr val="accent1"/>
+          </a:lnRef>
+          <a:fillRef idx="3">
+            <a:schemeClr val="accent1"/>
+          </a:fillRef>
+          <a:effectRef idx="2">
+            <a:schemeClr val="accent1"/>
+          </a:effectRef>
+          <a:fontRef idx="minor">
+            <a:schemeClr val="lt1"/>
+          </a:fontRef>
+        </p:style>
+        <p:txBody>
+          <a:bodyPr rtlCol="0" anchor="ctr"/>
+          <a:lstStyle/>
+          <a:p/>
+        </p:txBody>
+      </p:sp>
+      <p:sp>
+        <p:nvSpPr>
+          <p:cNvPr id="16" name="Rounded Rectangle 15"/>
+          <p:cNvSpPr/>
+          <p:nvPr/>
+        </p:nvSpPr>
+        <p:spPr>
+          <a:xfrm>
+            <a:off x="758952" y="5321808"/>
+            <a:ext cx="10899648" cy="1005840"/>
+          </a:xfrm>
+          <a:prstGeom prst="roundRect">
+            <a:avLst>
+              <a:gd name="adj" fmla="val 6000"/>
+            </a:avLst>
+          </a:prstGeom>
+          <a:solidFill>
+            <a:srgbClr val="FFFFFF"/>
+          </a:solidFill>
+          <a:ln w="9525">
+            <a:solidFill>
+              <a:srgbClr val="C9D4EE"/>
+            </a:solidFill>
+          </a:ln>
+          <a:effectLst/>
+        </p:spPr>
+        <p:style>
+          <a:lnRef idx="1">
+            <a:schemeClr val="accent1"/>
+          </a:lnRef>
+          <a:fillRef idx="3">
+            <a:schemeClr val="accent1"/>
+          </a:fillRef>
+          <a:effectRef idx="2">
+            <a:schemeClr val="accent1"/>
+          </a:effectRef>
+          <a:fontRef idx="minor">
+            <a:schemeClr val="lt1"/>
+          </a:fontRef>
+        </p:style>
+        <p:txBody>
+          <a:bodyPr rtlCol="0" anchor="ctr"/>
+          <a:lstStyle/>
+          <a:p/>
+        </p:txBody>
+      </p:sp>
+      <p:sp>
+        <p:nvSpPr>
+          <p:cNvPr id="17" name="TextBox 16"/>
+          <p:cNvSpPr txBox="1"/>
+          <p:nvPr/>
+        </p:nvSpPr>
+        <p:spPr>
+          <a:xfrm>
+            <a:off x="960120" y="1929384"/>
+            <a:ext cx="10469880" cy="2048256"/>
+          </a:xfrm>
+          <a:prstGeom prst="rect">
+            <a:avLst/>
+          </a:prstGeom>
+          <a:noFill/>
+        </p:spPr>
+        <p:txBody>
+          <a:bodyPr wrap="square" anchor="t" lIns="0" rIns="0" tIns="0" bIns="0">
+            <a:spAutoFit/>
+          </a:bodyPr>
+          <a:lstStyle/>
+          <a:p>
+            <a:pPr algn="l"/>
+            <a:r>
+              <a:rPr sz="1400" b="1">
+                <a:solidFill>
+                  <a:srgbClr val="0545E8"/>
+                </a:solidFill>
+              </a:rPr>
+              <a:t>① 项目位置与一键运行</a:t>
+            </a:r>
+          </a:p>
+          <a:p>
+            <a:pPr algn="l"/>
+            <a:r>
+              <a:rPr sz="1400" b="1">
+                <a:solidFill>
+                  <a:srgbClr val="0545E8"/>
+                </a:solidFill>
+              </a:rPr>
+              <a:t>工程化项目/m31_transfer/</a:t>
+            </a:r>
+          </a:p>
+          <a:p>
+            <a:pPr algn="l"/>
+            <a:r>
+              <a:rPr sz="1400" b="1">
+                <a:solidFill>
+                  <a:srgbClr val="0545E8"/>
+                </a:solidFill>
+              </a:rPr>
+              <a:t>python run.py          # 输出 output/report.txt + result.json</a:t>
+            </a:r>
+          </a:p>
+          <a:p>
+            <a:pPr algn="l"/>
+            <a:r>
+              <a:rPr sz="1400" b="1">
+                <a:solidFill>
+                  <a:srgbClr val="0545E8"/>
+                </a:solidFill>
+              </a:rPr>
+              <a:t>python -m pytest -q    # 全量测试应全绿</a:t>
+            </a:r>
+          </a:p>
+        </p:txBody>
+      </p:sp>
+      <p:sp>
+        <p:nvSpPr>
+          <p:cNvPr id="18" name="TextBox 17"/>
+          <p:cNvSpPr txBox="1"/>
+          <p:nvPr/>
+        </p:nvSpPr>
+        <p:spPr>
+          <a:xfrm>
+            <a:off x="960120" y="4297680"/>
+            <a:ext cx="10469880" cy="868680"/>
+          </a:xfrm>
+          <a:prstGeom prst="rect">
+            <a:avLst/>
+          </a:prstGeom>
+          <a:noFill/>
+        </p:spPr>
+        <p:txBody>
+          <a:bodyPr wrap="square" anchor="t" lIns="0" rIns="0" tIns="0" bIns="0">
+            <a:spAutoFit/>
+          </a:bodyPr>
+          <a:lstStyle/>
+          <a:p>
+            <a:pPr algn="l"/>
+            <a:r>
+              <a:rPr sz="1300" b="1">
+                <a:solidFill>
+                  <a:srgbClr val="0545E8"/>
+                </a:solidFill>
+              </a:rPr>
+              <a:t>② 目录结构（23 个文件）</a:t>
+            </a:r>
+          </a:p>
+          <a:p>
+            <a:pPr algn="l"/>
+            <a:r>
+              <a:rPr sz="1300" b="1">
+                <a:solidFill>
+                  <a:srgbClr val="0545E8"/>
+                </a:solidFill>
+              </a:rPr>
+              <a:t>config/rules.yaml      规则外置：改配置不改代码</a:t>
+            </a:r>
+          </a:p>
+          <a:p>
+            <a:pPr algn="l"/>
+            <a:r>
+              <a:rPr sz="1300" b="1">
+                <a:solidFill>
+                  <a:srgbClr val="0545E8"/>
+                </a:solidFill>
+              </a:rPr>
+              <a:t>src/transfer_learning/  config · core · io_utils · report · pipeline</a:t>
+            </a:r>
+          </a:p>
+          <a:p>
+            <a:pPr algn="l"/>
+            <a:r>
+              <a:rPr sz="1300" b="1">
+                <a:solidFill>
+                  <a:srgbClr val="0545E8"/>
+                </a:solidFill>
+              </a:rPr>
+              <a:t>tests/      正常 / 边界 / 异常三档</a:t>
+            </a:r>
+          </a:p>
+        </p:txBody>
+      </p:sp>
+      <p:sp>
+        <p:nvSpPr>
+          <p:cNvPr id="19" name="TextBox 18"/>
+          <p:cNvSpPr txBox="1"/>
+          <p:nvPr/>
+        </p:nvSpPr>
+        <p:spPr>
+          <a:xfrm>
+            <a:off x="960120" y="5431536"/>
+            <a:ext cx="10469880" cy="841248"/>
+          </a:xfrm>
+          <a:prstGeom prst="rect">
+            <a:avLst/>
+          </a:prstGeom>
+          <a:noFill/>
+        </p:spPr>
+        <p:txBody>
+          <a:bodyPr wrap="square" anchor="t" lIns="0" rIns="0" tIns="0" bIns="0">
+            <a:spAutoFit/>
+          </a:bodyPr>
+          <a:lstStyle/>
+          <a:p>
+            <a:pPr algn="l"/>
+            <a:r>
+              <a:rPr sz="1300" b="1">
+                <a:solidFill>
+                  <a:srgbClr val="F5670F"/>
+                </a:solidFill>
+              </a:rPr>
+              <a:t>③ 国标与 TOGAF 落地</a:t>
+            </a:r>
+          </a:p>
+          <a:p>
+            <a:pPr algn="l"/>
+            <a:r>
+              <a:rPr sz="1300" b="1">
+                <a:solidFill>
+                  <a:srgbClr val="F5670F"/>
+                </a:solidFill>
+              </a:rPr>
+              <a:t>GB/T 9385 需求规格 / 15532 测试 / 8567 文档 / 8566 过程组</a:t>
+            </a:r>
+          </a:p>
+          <a:p>
+            <a:pPr algn="l"/>
+            <a:r>
+              <a:rPr sz="1300" b="1">
+                <a:solidFill>
+                  <a:srgbClr val="F5670F"/>
+                </a:solidFill>
+              </a:rPr>
+              <a:t>TOGAF 四域：业务 · 数据 · 应用 · 技术架构</a:t>
+            </a:r>
+          </a:p>
+          <a:p>
+            <a:pPr algn="l"/>
+            <a:r>
+              <a:rPr sz="1300" b="1">
+                <a:solidFill>
+                  <a:srgbClr val="F5670F"/>
+                </a:solidFill>
+              </a:rPr>
+              <a:t>docs/07 ADR-001 架构决策记录</a:t>
+            </a:r>
+          </a:p>
+        </p:txBody>
+      </p:sp>
+    </p:spTree>
+  </p:cSld>
+  <p:clrMapOvr>
+    <a:masterClrMapping/>
+  </p:clrMapOvr>
+</p:sld>
+</file>
+
+<file path=ppt/slides/slide14.xml><?xml version="1.0" encoding="utf-8"?>
+<p:sld xmlns:a="http://schemas.openxmlformats.org/drawingml/2006/main" xmlns:p="http://schemas.openxmlformats.org/presentationml/2006/main" xmlns:r="http://schemas.openxmlformats.org/officeDocument/2006/relationships">
+  <p:cSld>
+    <p:spTree>
+      <p:nvGrpSpPr>
+        <p:cNvPr id="1" name=""/>
+        <p:cNvGrpSpPr/>
+        <p:nvPr/>
+      </p:nvGrpSpPr>
+      <p:grpSpPr/>
+      <p:sp>
+        <p:nvSpPr>
+          <p:cNvPr id="2" name="Rectangle 1"/>
+          <p:cNvSpPr/>
+          <p:nvPr/>
+        </p:nvSpPr>
+        <p:spPr>
+          <a:xfrm>
+            <a:off x="0" y="0"/>
+            <a:ext cx="12192000" cy="1150000"/>
+          </a:xfrm>
+          <a:prstGeom prst="rect">
+            <a:avLst/>
+          </a:prstGeom>
+          <a:solidFill>
+            <a:srgbClr val="010328"/>
+          </a:solidFill>
+          <a:ln>
+            <a:noFill/>
+          </a:ln>
+          <a:effectLst/>
+        </p:spPr>
+        <p:style>
+          <a:lnRef idx="1">
+            <a:schemeClr val="accent1"/>
+          </a:lnRef>
+          <a:fillRef idx="3">
+            <a:schemeClr val="accent1"/>
+          </a:fillRef>
+          <a:effectRef idx="2">
+            <a:schemeClr val="accent1"/>
+          </a:effectRef>
+          <a:fontRef idx="minor">
+            <a:schemeClr val="lt1"/>
+          </a:fontRef>
+        </p:style>
+        <p:txBody>
+          <a:bodyPr rtlCol="0" anchor="ctr"/>
+          <a:lstStyle/>
+          <a:p>
+            <a:pPr algn="ctr"/>
+          </a:p>
+        </p:txBody>
+      </p:sp>
+      <p:sp>
+        <p:nvSpPr>
+          <p:cNvPr id="3" name="Rectangle 2"/>
+          <p:cNvSpPr/>
+          <p:nvPr/>
+        </p:nvSpPr>
+        <p:spPr>
+          <a:xfrm>
+            <a:off x="0" y="1150000"/>
+            <a:ext cx="2600000" cy="70000"/>
+          </a:xfrm>
+          <a:prstGeom prst="rect">
+            <a:avLst/>
+          </a:prstGeom>
+          <a:solidFill>
+            <a:srgbClr val="F5670F"/>
+          </a:solidFill>
+          <a:ln>
+            <a:noFill/>
+          </a:ln>
+          <a:effectLst/>
+        </p:spPr>
+        <p:style>
+          <a:lnRef idx="1">
+            <a:schemeClr val="accent1"/>
+          </a:lnRef>
+          <a:fillRef idx="3">
+            <a:schemeClr val="accent1"/>
+          </a:fillRef>
+          <a:effectRef idx="2">
+            <a:schemeClr val="accent1"/>
+          </a:effectRef>
+          <a:fontRef idx="minor">
+            <a:schemeClr val="lt1"/>
+          </a:fontRef>
+        </p:style>
+        <p:txBody>
+          <a:bodyPr rtlCol="0" anchor="ctr"/>
+          <a:lstStyle/>
+          <a:p>
+            <a:pPr algn="ctr"/>
+          </a:p>
+        </p:txBody>
+      </p:sp>
+      <p:sp>
+        <p:nvSpPr>
+          <p:cNvPr id="4" name="TextBox 3"/>
+          <p:cNvSpPr txBox="1"/>
+          <p:nvPr/>
+        </p:nvSpPr>
+        <p:spPr>
+          <a:xfrm>
+            <a:off x="700000" y="300000"/>
+            <a:ext cx="10792000" cy="700000"/>
+          </a:xfrm>
+          <a:prstGeom prst="rect">
+            <a:avLst/>
+          </a:prstGeom>
+          <a:noFill/>
+        </p:spPr>
+        <p:txBody>
+          <a:bodyPr wrap="square" anchor="t">
+            <a:spAutoFit/>
+          </a:bodyPr>
+          <a:lstStyle/>
+          <a:p>
+            <a:pPr algn="l">
+              <a:lnSpc>
+                <a:spcPct val="110000"/>
+              </a:lnSpc>
+              <a:spcAft>
+                <a:spcPts val="600"/>
+              </a:spcAft>
+            </a:pPr>
+            <a:r>
+              <a:rPr sz="2400" b="1">
+                <a:solidFill>
+                  <a:srgbClr val="FFFFFF"/>
+                </a:solidFill>
+                <a:latin typeface="微软雅黑"/>
+              </a:rPr>
+              <a:t>实测验收 · m31_transfer</a:t>
+            </a:r>
+          </a:p>
+        </p:txBody>
+      </p:sp>
+      <p:sp>
+        <p:nvSpPr>
+          <p:cNvPr id="11" name="Rectangle 10"/>
+          <p:cNvSpPr/>
+          <p:nvPr/>
+        </p:nvSpPr>
+        <p:spPr>
+          <a:xfrm>
+            <a:off x="500000" y="6500000"/>
+            <a:ext cx="11100000" cy="20000"/>
+          </a:xfrm>
+          <a:prstGeom prst="rect">
+            <a:avLst/>
+          </a:prstGeom>
+          <a:solidFill>
+            <a:srgbClr val="C9D4EE"/>
+          </a:solidFill>
+          <a:ln>
+            <a:noFill/>
+          </a:ln>
+          <a:effectLst/>
+        </p:spPr>
+        <p:style>
+          <a:lnRef idx="1">
+            <a:schemeClr val="accent1"/>
+          </a:lnRef>
+          <a:fillRef idx="3">
+            <a:schemeClr val="accent1"/>
+          </a:fillRef>
+          <a:effectRef idx="2">
+            <a:schemeClr val="accent1"/>
+          </a:effectRef>
+          <a:fontRef idx="minor">
+            <a:schemeClr val="lt1"/>
+          </a:fontRef>
+        </p:style>
+        <p:txBody>
+          <a:bodyPr rtlCol="0" anchor="ctr"/>
+          <a:lstStyle/>
+          <a:p>
+            <a:pPr algn="ctr"/>
+          </a:p>
+        </p:txBody>
+      </p:sp>
+      <p:sp>
+        <p:nvSpPr>
+          <p:cNvPr id="12" name="TextBox 11"/>
+          <p:cNvSpPr txBox="1"/>
+          <p:nvPr/>
+        </p:nvSpPr>
+        <p:spPr>
+          <a:xfrm>
+            <a:off x="500000" y="6540000"/>
+            <a:ext cx="7000000" cy="300000"/>
+          </a:xfrm>
+          <a:prstGeom prst="rect">
+            <a:avLst/>
+          </a:prstGeom>
+          <a:noFill/>
+        </p:spPr>
+        <p:txBody>
+          <a:bodyPr wrap="square" anchor="t">
+            <a:spAutoFit/>
+          </a:bodyPr>
+          <a:lstStyle/>
+          <a:p>
+            <a:pPr algn="l">
+              <a:lnSpc>
+                <a:spcPct val="110000"/>
+              </a:lnSpc>
+              <a:spcAft>
+                <a:spcPts val="600"/>
+              </a:spcAft>
+            </a:pPr>
+            <a:r>
+              <a:rPr sz="1000" b="0">
+                <a:solidFill>
+                  <a:srgbClr val="8A97B5"/>
+                </a:solidFill>
+                <a:latin typeface="微软雅黑"/>
+              </a:rPr>
+              <a:t>两江智造集团 · AI应用基础48课时版</a:t>
+            </a:r>
+          </a:p>
+        </p:txBody>
+      </p:sp>
+      <p:sp>
+        <p:nvSpPr>
+          <p:cNvPr id="13" name="TextBox 12"/>
+          <p:cNvSpPr txBox="1"/>
+          <p:nvPr/>
+        </p:nvSpPr>
+        <p:spPr>
+          <a:xfrm>
+            <a:off x="10600000" y="6540000"/>
+            <a:ext cx="1000000" cy="300000"/>
+          </a:xfrm>
+          <a:prstGeom prst="rect">
+            <a:avLst/>
+          </a:prstGeom>
+          <a:noFill/>
+        </p:spPr>
+        <p:txBody>
+          <a:bodyPr wrap="square" anchor="t">
+            <a:spAutoFit/>
+          </a:bodyPr>
+          <a:lstStyle/>
+          <a:p>
+            <a:pPr algn="r">
+              <a:lnSpc>
+                <a:spcPct val="110000"/>
+              </a:lnSpc>
+              <a:spcAft>
+                <a:spcPts val="600"/>
+              </a:spcAft>
+            </a:pPr>
+            <a:r>
+              <a:rPr sz="1000" b="0">
+                <a:solidFill>
+                  <a:srgbClr val="8A97B5"/>
+                </a:solidFill>
+                <a:latin typeface="微软雅黑"/>
+              </a:rPr>
+              <a:t>14 / 21</a:t>
             </a:r>
           </a:p>
         </p:txBody>
@@ -6907,1245 +8386,6 @@
 </p:sld>
 </file>
 
-<file path=ppt/slides/slide13.xml><?xml version="1.0" encoding="utf-8"?>
-<p:sld xmlns:a="http://schemas.openxmlformats.org/drawingml/2006/main" xmlns:p="http://schemas.openxmlformats.org/presentationml/2006/main" xmlns:r="http://schemas.openxmlformats.org/officeDocument/2006/relationships">
-  <p:cSld>
-    <p:spTree>
-      <p:nvGrpSpPr>
-        <p:cNvPr id="1" name=""/>
-        <p:cNvGrpSpPr/>
-        <p:nvPr/>
-      </p:nvGrpSpPr>
-      <p:grpSpPr/>
-      <p:sp>
-        <p:nvSpPr>
-          <p:cNvPr id="2" name="Rectangle 1"/>
-          <p:cNvSpPr/>
-          <p:nvPr/>
-        </p:nvSpPr>
-        <p:spPr>
-          <a:xfrm>
-            <a:off x="0" y="0"/>
-            <a:ext cx="12192000" cy="1150000"/>
-          </a:xfrm>
-          <a:prstGeom prst="rect">
-            <a:avLst/>
-          </a:prstGeom>
-          <a:solidFill>
-            <a:srgbClr val="010328"/>
-          </a:solidFill>
-          <a:ln>
-            <a:noFill/>
-          </a:ln>
-          <a:effectLst/>
-        </p:spPr>
-        <p:style>
-          <a:lnRef idx="1">
-            <a:schemeClr val="accent1"/>
-          </a:lnRef>
-          <a:fillRef idx="3">
-            <a:schemeClr val="accent1"/>
-          </a:fillRef>
-          <a:effectRef idx="2">
-            <a:schemeClr val="accent1"/>
-          </a:effectRef>
-          <a:fontRef idx="minor">
-            <a:schemeClr val="lt1"/>
-          </a:fontRef>
-        </p:style>
-        <p:txBody>
-          <a:bodyPr rtlCol="0" anchor="ctr"/>
-          <a:lstStyle/>
-          <a:p>
-            <a:pPr algn="ctr"/>
-          </a:p>
-        </p:txBody>
-      </p:sp>
-      <p:sp>
-        <p:nvSpPr>
-          <p:cNvPr id="3" name="Rectangle 2"/>
-          <p:cNvSpPr/>
-          <p:nvPr/>
-        </p:nvSpPr>
-        <p:spPr>
-          <a:xfrm>
-            <a:off x="0" y="1150000"/>
-            <a:ext cx="2600000" cy="70000"/>
-          </a:xfrm>
-          <a:prstGeom prst="rect">
-            <a:avLst/>
-          </a:prstGeom>
-          <a:solidFill>
-            <a:srgbClr val="F5670F"/>
-          </a:solidFill>
-          <a:ln>
-            <a:noFill/>
-          </a:ln>
-          <a:effectLst/>
-        </p:spPr>
-        <p:style>
-          <a:lnRef idx="1">
-            <a:schemeClr val="accent1"/>
-          </a:lnRef>
-          <a:fillRef idx="3">
-            <a:schemeClr val="accent1"/>
-          </a:fillRef>
-          <a:effectRef idx="2">
-            <a:schemeClr val="accent1"/>
-          </a:effectRef>
-          <a:fontRef idx="minor">
-            <a:schemeClr val="lt1"/>
-          </a:fontRef>
-        </p:style>
-        <p:txBody>
-          <a:bodyPr rtlCol="0" anchor="ctr"/>
-          <a:lstStyle/>
-          <a:p>
-            <a:pPr algn="ctr"/>
-          </a:p>
-        </p:txBody>
-      </p:sp>
-      <p:sp>
-        <p:nvSpPr>
-          <p:cNvPr id="4" name="TextBox 3"/>
-          <p:cNvSpPr txBox="1"/>
-          <p:nvPr/>
-        </p:nvSpPr>
-        <p:spPr>
-          <a:xfrm>
-            <a:off x="700000" y="300000"/>
-            <a:ext cx="10792000" cy="700000"/>
-          </a:xfrm>
-          <a:prstGeom prst="rect">
-            <a:avLst/>
-          </a:prstGeom>
-          <a:noFill/>
-        </p:spPr>
-        <p:txBody>
-          <a:bodyPr wrap="square" anchor="t">
-            <a:spAutoFit/>
-          </a:bodyPr>
-          <a:lstStyle/>
-          <a:p>
-            <a:pPr algn="l">
-              <a:lnSpc>
-                <a:spcPct val="110000"/>
-              </a:lnSpc>
-              <a:spcAft>
-                <a:spcPts val="600"/>
-              </a:spcAft>
-            </a:pPr>
-            <a:r>
-              <a:rPr sz="2400" b="1">
-                <a:solidFill>
-                  <a:srgbClr val="FFFFFF"/>
-                </a:solidFill>
-                <a:latin typeface="微软雅黑"/>
-              </a:rPr>
-              <a:t>实跑截图证据 · m31_transfer</a:t>
-            </a:r>
-          </a:p>
-        </p:txBody>
-      </p:sp>
-      <p:sp>
-        <p:nvSpPr>
-          <p:cNvPr id="11" name="Rectangle 10"/>
-          <p:cNvSpPr/>
-          <p:nvPr/>
-        </p:nvSpPr>
-        <p:spPr>
-          <a:xfrm>
-            <a:off x="500000" y="6500000"/>
-            <a:ext cx="11100000" cy="20000"/>
-          </a:xfrm>
-          <a:prstGeom prst="rect">
-            <a:avLst/>
-          </a:prstGeom>
-          <a:solidFill>
-            <a:srgbClr val="C9D4EE"/>
-          </a:solidFill>
-          <a:ln>
-            <a:noFill/>
-          </a:ln>
-          <a:effectLst/>
-        </p:spPr>
-        <p:style>
-          <a:lnRef idx="1">
-            <a:schemeClr val="accent1"/>
-          </a:lnRef>
-          <a:fillRef idx="3">
-            <a:schemeClr val="accent1"/>
-          </a:fillRef>
-          <a:effectRef idx="2">
-            <a:schemeClr val="accent1"/>
-          </a:effectRef>
-          <a:fontRef idx="minor">
-            <a:schemeClr val="lt1"/>
-          </a:fontRef>
-        </p:style>
-        <p:txBody>
-          <a:bodyPr rtlCol="0" anchor="ctr"/>
-          <a:lstStyle/>
-          <a:p>
-            <a:pPr algn="ctr"/>
-          </a:p>
-        </p:txBody>
-      </p:sp>
-      <p:sp>
-        <p:nvSpPr>
-          <p:cNvPr id="12" name="TextBox 11"/>
-          <p:cNvSpPr txBox="1"/>
-          <p:nvPr/>
-        </p:nvSpPr>
-        <p:spPr>
-          <a:xfrm>
-            <a:off x="500000" y="6540000"/>
-            <a:ext cx="7000000" cy="300000"/>
-          </a:xfrm>
-          <a:prstGeom prst="rect">
-            <a:avLst/>
-          </a:prstGeom>
-          <a:noFill/>
-        </p:spPr>
-        <p:txBody>
-          <a:bodyPr wrap="square" anchor="t">
-            <a:spAutoFit/>
-          </a:bodyPr>
-          <a:lstStyle/>
-          <a:p>
-            <a:pPr algn="l">
-              <a:lnSpc>
-                <a:spcPct val="110000"/>
-              </a:lnSpc>
-              <a:spcAft>
-                <a:spcPts val="600"/>
-              </a:spcAft>
-            </a:pPr>
-            <a:r>
-              <a:rPr sz="1000" b="0">
-                <a:solidFill>
-                  <a:srgbClr val="8A97B5"/>
-                </a:solidFill>
-                <a:latin typeface="微软雅黑"/>
-              </a:rPr>
-              <a:t>两江智造集团 · AI应用基础48课时版</a:t>
-            </a:r>
-          </a:p>
-        </p:txBody>
-      </p:sp>
-      <p:sp>
-        <p:nvSpPr>
-          <p:cNvPr id="13" name="TextBox 12"/>
-          <p:cNvSpPr txBox="1"/>
-          <p:nvPr/>
-        </p:nvSpPr>
-        <p:spPr>
-          <a:xfrm>
-            <a:off x="10600000" y="6540000"/>
-            <a:ext cx="1000000" cy="300000"/>
-          </a:xfrm>
-          <a:prstGeom prst="rect">
-            <a:avLst/>
-          </a:prstGeom>
-          <a:noFill/>
-        </p:spPr>
-        <p:txBody>
-          <a:bodyPr wrap="square" anchor="t">
-            <a:spAutoFit/>
-          </a:bodyPr>
-          <a:lstStyle/>
-          <a:p>
-            <a:pPr algn="r">
-              <a:lnSpc>
-                <a:spcPct val="110000"/>
-              </a:lnSpc>
-              <a:spcAft>
-                <a:spcPts val="600"/>
-              </a:spcAft>
-            </a:pPr>
-            <a:r>
-              <a:rPr sz="1000" b="0">
-                <a:solidFill>
-                  <a:srgbClr val="8A97B5"/>
-                </a:solidFill>
-                <a:latin typeface="微软雅黑"/>
-              </a:rPr>
-              <a:t>13 / 19</a:t>
-            </a:r>
-          </a:p>
-        </p:txBody>
-      </p:sp>
-      <p:sp>
-        <p:nvSpPr>
-          <p:cNvPr id="14" name="Rectangle 13"/>
-          <p:cNvSpPr/>
-          <p:nvPr/>
-        </p:nvSpPr>
-        <p:spPr>
-          <a:xfrm>
-            <a:off x="457200" y="1481328"/>
-            <a:ext cx="5486400" cy="2304288"/>
-          </a:xfrm>
-          <a:prstGeom prst="rect">
-            <a:avLst/>
-          </a:prstGeom>
-          <a:solidFill>
-            <a:srgbClr val="FFFFFF"/>
-          </a:solidFill>
-          <a:ln>
-            <a:solidFill>
-              <a:srgbClr val="D6DCE4"/>
-            </a:solidFill>
-          </a:ln>
-          <a:effectLst/>
-        </p:spPr>
-        <p:style>
-          <a:lnRef idx="1">
-            <a:schemeClr val="accent1"/>
-          </a:lnRef>
-          <a:fillRef idx="3">
-            <a:schemeClr val="accent1"/>
-          </a:fillRef>
-          <a:effectRef idx="2">
-            <a:schemeClr val="accent1"/>
-          </a:effectRef>
-          <a:fontRef idx="minor">
-            <a:schemeClr val="lt1"/>
-          </a:fontRef>
-        </p:style>
-        <p:txBody>
-          <a:bodyPr rtlCol="0" anchor="ctr" wrap="square"/>
-          <a:lstStyle/>
-          <a:p>
-            <a:pPr algn="ctr"/>
-          </a:p>
-        </p:txBody>
-      </p:sp>
-      <p:sp>
-        <p:nvSpPr>
-          <p:cNvPr id="15" name="TextBox 14"/>
-          <p:cNvSpPr txBox="1"/>
-          <p:nvPr/>
-        </p:nvSpPr>
-        <p:spPr>
-          <a:xfrm>
-            <a:off x="530352" y="1517904"/>
-            <a:ext cx="5340096" cy="237744"/>
-          </a:xfrm>
-          <a:prstGeom prst="rect">
-            <a:avLst/>
-          </a:prstGeom>
-          <a:noFill/>
-        </p:spPr>
-        <p:txBody>
-          <a:bodyPr wrap="square">
-            <a:spAutoFit/>
-          </a:bodyPr>
-          <a:lstStyle/>
-          <a:p>
-            <a:r>
-              <a:rPr sz="950" b="1">
-                <a:solidFill>
-                  <a:srgbClr val="010328"/>
-                </a:solidFill>
-                <a:latin typeface="微软雅黑"/>
-              </a:rPr>
-              <a:t>① run.py 实跑终端输出（逐字捕获）</a:t>
-            </a:r>
-          </a:p>
-        </p:txBody>
-      </p:sp>
-      <p:pic>
-        <p:nvPicPr>
-          <p:cNvPr id="16" name="Picture 15" descr="shot_run.png"/>
-          <p:cNvPicPr>
-            <a:picLocks noChangeAspect="1"/>
-          </p:cNvPicPr>
-          <p:nvPr/>
-        </p:nvPicPr>
-        <p:blipFill>
-          <a:blip r:embed="rId2"/>
-          <a:stretch>
-            <a:fillRect/>
-          </a:stretch>
-        </p:blipFill>
-        <p:spPr>
-          <a:xfrm>
-            <a:off x="964038" y="1773936"/>
-            <a:ext cx="4472722" cy="1956816"/>
-          </a:xfrm>
-          <a:prstGeom prst="rect">
-            <a:avLst/>
-          </a:prstGeom>
-        </p:spPr>
-      </p:pic>
-      <p:sp>
-        <p:nvSpPr>
-          <p:cNvPr id="17" name="Rectangle 16"/>
-          <p:cNvSpPr/>
-          <p:nvPr/>
-        </p:nvSpPr>
-        <p:spPr>
-          <a:xfrm>
-            <a:off x="6327648" y="1481328"/>
-            <a:ext cx="5486400" cy="2304288"/>
-          </a:xfrm>
-          <a:prstGeom prst="rect">
-            <a:avLst/>
-          </a:prstGeom>
-          <a:solidFill>
-            <a:srgbClr val="FFFFFF"/>
-          </a:solidFill>
-          <a:ln>
-            <a:solidFill>
-              <a:srgbClr val="D6DCE4"/>
-            </a:solidFill>
-          </a:ln>
-          <a:effectLst/>
-        </p:spPr>
-        <p:style>
-          <a:lnRef idx="1">
-            <a:schemeClr val="accent1"/>
-          </a:lnRef>
-          <a:fillRef idx="3">
-            <a:schemeClr val="accent1"/>
-          </a:fillRef>
-          <a:effectRef idx="2">
-            <a:schemeClr val="accent1"/>
-          </a:effectRef>
-          <a:fontRef idx="minor">
-            <a:schemeClr val="lt1"/>
-          </a:fontRef>
-        </p:style>
-        <p:txBody>
-          <a:bodyPr rtlCol="0" anchor="ctr" wrap="square"/>
-          <a:lstStyle/>
-          <a:p>
-            <a:pPr algn="ctr"/>
-          </a:p>
-        </p:txBody>
-      </p:sp>
-      <p:sp>
-        <p:nvSpPr>
-          <p:cNvPr id="18" name="TextBox 17"/>
-          <p:cNvSpPr txBox="1"/>
-          <p:nvPr/>
-        </p:nvSpPr>
-        <p:spPr>
-          <a:xfrm>
-            <a:off x="6400800" y="1517904"/>
-            <a:ext cx="5340096" cy="237744"/>
-          </a:xfrm>
-          <a:prstGeom prst="rect">
-            <a:avLst/>
-          </a:prstGeom>
-          <a:noFill/>
-        </p:spPr>
-        <p:txBody>
-          <a:bodyPr wrap="square">
-            <a:spAutoFit/>
-          </a:bodyPr>
-          <a:lstStyle/>
-          <a:p>
-            <a:r>
-              <a:rPr sz="950" b="1">
-                <a:solidFill>
-                  <a:srgbClr val="010328"/>
-                </a:solidFill>
-                <a:latin typeface="微软雅黑"/>
-              </a:rPr>
-              <a:t>② pytest 全绿终端输出（逐字捕获）</a:t>
-            </a:r>
-          </a:p>
-        </p:txBody>
-      </p:sp>
-      <p:pic>
-        <p:nvPicPr>
-          <p:cNvPr id="19" name="Picture 18" descr="shot_test.png"/>
-          <p:cNvPicPr>
-            <a:picLocks noChangeAspect="1"/>
-          </p:cNvPicPr>
-          <p:nvPr/>
-        </p:nvPicPr>
-        <p:blipFill>
-          <a:blip r:embed="rId3"/>
-          <a:stretch>
-            <a:fillRect/>
-          </a:stretch>
-        </p:blipFill>
-        <p:spPr>
-          <a:xfrm>
-            <a:off x="6834486" y="1773936"/>
-            <a:ext cx="4472722" cy="1956816"/>
-          </a:xfrm>
-          <a:prstGeom prst="rect">
-            <a:avLst/>
-          </a:prstGeom>
-        </p:spPr>
-      </p:pic>
-      <p:sp>
-        <p:nvSpPr>
-          <p:cNvPr id="20" name="Rectangle 19"/>
-          <p:cNvSpPr/>
-          <p:nvPr/>
-        </p:nvSpPr>
-        <p:spPr>
-          <a:xfrm>
-            <a:off x="457200" y="3877056"/>
-            <a:ext cx="5486400" cy="2304288"/>
-          </a:xfrm>
-          <a:prstGeom prst="rect">
-            <a:avLst/>
-          </a:prstGeom>
-          <a:solidFill>
-            <a:srgbClr val="FFFFFF"/>
-          </a:solidFill>
-          <a:ln>
-            <a:solidFill>
-              <a:srgbClr val="D6DCE4"/>
-            </a:solidFill>
-          </a:ln>
-          <a:effectLst/>
-        </p:spPr>
-        <p:style>
-          <a:lnRef idx="1">
-            <a:schemeClr val="accent1"/>
-          </a:lnRef>
-          <a:fillRef idx="3">
-            <a:schemeClr val="accent1"/>
-          </a:fillRef>
-          <a:effectRef idx="2">
-            <a:schemeClr val="accent1"/>
-          </a:effectRef>
-          <a:fontRef idx="minor">
-            <a:schemeClr val="lt1"/>
-          </a:fontRef>
-        </p:style>
-        <p:txBody>
-          <a:bodyPr rtlCol="0" anchor="ctr" wrap="square"/>
-          <a:lstStyle/>
-          <a:p>
-            <a:pPr algn="ctr"/>
-          </a:p>
-        </p:txBody>
-      </p:sp>
-      <p:sp>
-        <p:nvSpPr>
-          <p:cNvPr id="21" name="TextBox 20"/>
-          <p:cNvSpPr txBox="1"/>
-          <p:nvPr/>
-        </p:nvSpPr>
-        <p:spPr>
-          <a:xfrm>
-            <a:off x="530352" y="3913632"/>
-            <a:ext cx="5340096" cy="237744"/>
-          </a:xfrm>
-          <a:prstGeom prst="rect">
-            <a:avLst/>
-          </a:prstGeom>
-          <a:noFill/>
-        </p:spPr>
-        <p:txBody>
-          <a:bodyPr wrap="square">
-            <a:spAutoFit/>
-          </a:bodyPr>
-          <a:lstStyle/>
-          <a:p>
-            <a:r>
-              <a:rPr sz="950" b="1">
-                <a:solidFill>
-                  <a:srgbClr val="010328"/>
-                </a:solidFill>
-                <a:latin typeface="微软雅黑"/>
-              </a:rPr>
-              <a:t>③ report.txt「验收档位判定（实测）」段</a:t>
-            </a:r>
-          </a:p>
-        </p:txBody>
-      </p:sp>
-      <p:pic>
-        <p:nvPicPr>
-          <p:cNvPr id="22" name="Picture 21" descr="shot_report.png"/>
-          <p:cNvPicPr>
-            <a:picLocks noChangeAspect="1"/>
-          </p:cNvPicPr>
-          <p:nvPr/>
-        </p:nvPicPr>
-        <p:blipFill>
-          <a:blip r:embed="rId4"/>
-          <a:stretch>
-            <a:fillRect/>
-          </a:stretch>
-        </p:blipFill>
-        <p:spPr>
-          <a:xfrm>
-            <a:off x="964038" y="4169664"/>
-            <a:ext cx="4472722" cy="1956816"/>
-          </a:xfrm>
-          <a:prstGeom prst="rect">
-            <a:avLst/>
-          </a:prstGeom>
-        </p:spPr>
-      </p:pic>
-      <p:sp>
-        <p:nvSpPr>
-          <p:cNvPr id="23" name="Rectangle 22"/>
-          <p:cNvSpPr/>
-          <p:nvPr/>
-        </p:nvSpPr>
-        <p:spPr>
-          <a:xfrm>
-            <a:off x="6327648" y="3877056"/>
-            <a:ext cx="5486400" cy="2304288"/>
-          </a:xfrm>
-          <a:prstGeom prst="rect">
-            <a:avLst/>
-          </a:prstGeom>
-          <a:solidFill>
-            <a:srgbClr val="F7F9FB"/>
-          </a:solidFill>
-          <a:ln>
-            <a:solidFill>
-              <a:srgbClr val="D6DCE4"/>
-            </a:solidFill>
-          </a:ln>
-          <a:effectLst/>
-        </p:spPr>
-        <p:style>
-          <a:lnRef idx="1">
-            <a:schemeClr val="accent1"/>
-          </a:lnRef>
-          <a:fillRef idx="3">
-            <a:schemeClr val="accent1"/>
-          </a:fillRef>
-          <a:effectRef idx="2">
-            <a:schemeClr val="accent1"/>
-          </a:effectRef>
-          <a:fontRef idx="minor">
-            <a:schemeClr val="lt1"/>
-          </a:fontRef>
-        </p:style>
-        <p:txBody>
-          <a:bodyPr rtlCol="0" anchor="ctr" wrap="square"/>
-          <a:lstStyle/>
-          <a:p>
-            <a:pPr algn="ctr"/>
-          </a:p>
-        </p:txBody>
-      </p:sp>
-      <p:sp>
-        <p:nvSpPr>
-          <p:cNvPr id="24" name="TextBox 23"/>
-          <p:cNvSpPr txBox="1"/>
-          <p:nvPr/>
-        </p:nvSpPr>
-        <p:spPr>
-          <a:xfrm>
-            <a:off x="6400800" y="3913632"/>
-            <a:ext cx="5340096" cy="237744"/>
-          </a:xfrm>
-          <a:prstGeom prst="rect">
-            <a:avLst/>
-          </a:prstGeom>
-          <a:noFill/>
-        </p:spPr>
-        <p:txBody>
-          <a:bodyPr wrap="square">
-            <a:spAutoFit/>
-          </a:bodyPr>
-          <a:lstStyle/>
-          <a:p>
-            <a:r>
-              <a:rPr sz="950" b="1">
-                <a:solidFill>
-                  <a:srgbClr val="010328"/>
-                </a:solidFill>
-                <a:latin typeface="微软雅黑"/>
-              </a:rPr>
-              <a:t>④ 采集口径（可复现）</a:t>
-            </a:r>
-          </a:p>
-        </p:txBody>
-      </p:sp>
-      <p:sp>
-        <p:nvSpPr>
-          <p:cNvPr id="25" name="TextBox 24"/>
-          <p:cNvSpPr txBox="1"/>
-          <p:nvPr/>
-        </p:nvSpPr>
-        <p:spPr>
-          <a:xfrm>
-            <a:off x="6437376" y="4187952"/>
-            <a:ext cx="5266944" cy="1920240"/>
-          </a:xfrm>
-          <a:prstGeom prst="rect">
-            <a:avLst/>
-          </a:prstGeom>
-          <a:noFill/>
-        </p:spPr>
-        <p:txBody>
-          <a:bodyPr wrap="square">
-            <a:spAutoFit/>
-          </a:bodyPr>
-          <a:lstStyle/>
-          <a:p>
-            <a:r>
-              <a:rPr sz="950" b="0">
-                <a:solidFill>
-                  <a:srgbClr val="2B2F36"/>
-                </a:solidFill>
-                <a:latin typeface="微软雅黑"/>
-              </a:rPr>
-              <a:t>项目：05-AI应用基础48课时版/工程化项目/m31_transfer/</a:t>
-            </a:r>
-          </a:p>
-          <a:p>
-            <a:r>
-              <a:rPr sz="950" b="0">
-                <a:solidFill>
-                  <a:srgbClr val="2B2F36"/>
-                </a:solidFill>
-                <a:latin typeface="微软雅黑"/>
-              </a:rPr>
-              <a:t>命令：/opt/anaconda3/bin/python run.py ｜ /opt/anaconda3/bin/python -m pytest -q</a:t>
-            </a:r>
-          </a:p>
-          <a:p>
-            <a:r>
-              <a:rPr sz="950" b="0">
-                <a:solidFill>
-                  <a:srgbClr val="2B2F36"/>
-                </a:solidFill>
-                <a:latin typeface="微软雅黑"/>
-              </a:rPr>
-              <a:t>采集：工具/ppt97/capture97.py（2026-10-28 10:50 真跑逐字捕获输出）</a:t>
-            </a:r>
-          </a:p>
-          <a:p>
-            <a:r>
-              <a:rPr sz="950" b="0">
-                <a:solidFill>
-                  <a:srgbClr val="2B2F36"/>
-                </a:solidFill>
-                <a:latin typeface="微软雅黑"/>
-              </a:rPr>
-              <a:t>渲染：工具/ppt97/terminal_png.py（终端截图，不改写任何数字）</a:t>
-            </a:r>
-          </a:p>
-          <a:p>
-            <a:r>
-              <a:rPr sz="950" b="0">
-                <a:solidFill>
-                  <a:srgbClr val="2B2F36"/>
-                </a:solidFill>
-                <a:latin typeface="微软雅黑"/>
-              </a:rPr>
-              <a:t>退出码：run=0 ｜ pytest=0</a:t>
-            </a:r>
-          </a:p>
-          <a:p>
-            <a:r>
-              <a:rPr sz="950" b="0">
-                <a:solidFill>
-                  <a:srgbClr val="2B2F36"/>
-                </a:solidFill>
-                <a:latin typeface="微软雅黑"/>
-              </a:rPr>
-              <a:t>档位判定取自 output/report.txt「验收档位判定（实测）」段</a:t>
-            </a:r>
-          </a:p>
-        </p:txBody>
-      </p:sp>
-      <p:sp>
-        <p:nvSpPr>
-          <p:cNvPr id="26" name="TextBox 25"/>
-          <p:cNvSpPr txBox="1"/>
-          <p:nvPr/>
-        </p:nvSpPr>
-        <p:spPr>
-          <a:xfrm>
-            <a:off x="457200" y="6254496"/>
-            <a:ext cx="11247120" cy="201168"/>
-          </a:xfrm>
-          <a:prstGeom prst="rect">
-            <a:avLst/>
-          </a:prstGeom>
-          <a:noFill/>
-        </p:spPr>
-        <p:txBody>
-          <a:bodyPr wrap="square">
-            <a:spAutoFit/>
-          </a:bodyPr>
-          <a:lstStyle/>
-          <a:p>
-            <a:r>
-              <a:rPr sz="900" b="0">
-                <a:solidFill>
-                  <a:srgbClr val="7A8698"/>
-                </a:solidFill>
-                <a:latin typeface="微软雅黑"/>
-              </a:rPr>
-              <a:t>截图内容逐字取自 工具/ppt97/evidence/m31_transfer/（capture97.py 真跑捕获，未改写数字）</a:t>
-            </a:r>
-          </a:p>
-        </p:txBody>
-      </p:sp>
-    </p:spTree>
-  </p:cSld>
-  <p:clrMapOvr>
-    <a:masterClrMapping/>
-  </p:clrMapOvr>
-</p:sld>
-</file>
-
-<file path=ppt/slides/slide14.xml><?xml version="1.0" encoding="utf-8"?>
-<p:sld xmlns:a="http://schemas.openxmlformats.org/drawingml/2006/main" xmlns:p="http://schemas.openxmlformats.org/presentationml/2006/main" xmlns:r="http://schemas.openxmlformats.org/officeDocument/2006/relationships">
-  <p:cSld>
-    <p:spTree>
-      <p:nvGrpSpPr>
-        <p:cNvPr id="1" name=""/>
-        <p:cNvGrpSpPr/>
-        <p:nvPr/>
-      </p:nvGrpSpPr>
-      <p:grpSpPr/>
-      <p:sp>
-        <p:nvSpPr>
-          <p:cNvPr id="2" name="Rectangle 1"/>
-          <p:cNvSpPr/>
-          <p:nvPr/>
-        </p:nvSpPr>
-        <p:spPr>
-          <a:xfrm>
-            <a:off x="0" y="0"/>
-            <a:ext cx="12192000" cy="1150000"/>
-          </a:xfrm>
-          <a:prstGeom prst="rect">
-            <a:avLst/>
-          </a:prstGeom>
-          <a:solidFill>
-            <a:srgbClr val="010328"/>
-          </a:solidFill>
-          <a:ln>
-            <a:noFill/>
-          </a:ln>
-          <a:effectLst/>
-        </p:spPr>
-        <p:style>
-          <a:lnRef idx="1">
-            <a:schemeClr val="accent1"/>
-          </a:lnRef>
-          <a:fillRef idx="3">
-            <a:schemeClr val="accent1"/>
-          </a:fillRef>
-          <a:effectRef idx="2">
-            <a:schemeClr val="accent1"/>
-          </a:effectRef>
-          <a:fontRef idx="minor">
-            <a:schemeClr val="lt1"/>
-          </a:fontRef>
-        </p:style>
-        <p:txBody>
-          <a:bodyPr rtlCol="0" anchor="ctr"/>
-          <a:lstStyle/>
-          <a:p>
-            <a:pPr algn="ctr"/>
-          </a:p>
-        </p:txBody>
-      </p:sp>
-      <p:sp>
-        <p:nvSpPr>
-          <p:cNvPr id="3" name="Rectangle 2"/>
-          <p:cNvSpPr/>
-          <p:nvPr/>
-        </p:nvSpPr>
-        <p:spPr>
-          <a:xfrm>
-            <a:off x="0" y="1150000"/>
-            <a:ext cx="2600000" cy="70000"/>
-          </a:xfrm>
-          <a:prstGeom prst="rect">
-            <a:avLst/>
-          </a:prstGeom>
-          <a:solidFill>
-            <a:srgbClr val="F5670F"/>
-          </a:solidFill>
-          <a:ln>
-            <a:noFill/>
-          </a:ln>
-          <a:effectLst/>
-        </p:spPr>
-        <p:style>
-          <a:lnRef idx="1">
-            <a:schemeClr val="accent1"/>
-          </a:lnRef>
-          <a:fillRef idx="3">
-            <a:schemeClr val="accent1"/>
-          </a:fillRef>
-          <a:effectRef idx="2">
-            <a:schemeClr val="accent1"/>
-          </a:effectRef>
-          <a:fontRef idx="minor">
-            <a:schemeClr val="lt1"/>
-          </a:fontRef>
-        </p:style>
-        <p:txBody>
-          <a:bodyPr rtlCol="0" anchor="ctr"/>
-          <a:lstStyle/>
-          <a:p>
-            <a:pPr algn="ctr"/>
-          </a:p>
-        </p:txBody>
-      </p:sp>
-      <p:sp>
-        <p:nvSpPr>
-          <p:cNvPr id="4" name="TextBox 3"/>
-          <p:cNvSpPr txBox="1"/>
-          <p:nvPr/>
-        </p:nvSpPr>
-        <p:spPr>
-          <a:xfrm>
-            <a:off x="700000" y="300000"/>
-            <a:ext cx="10792000" cy="700000"/>
-          </a:xfrm>
-          <a:prstGeom prst="rect">
-            <a:avLst/>
-          </a:prstGeom>
-          <a:noFill/>
-        </p:spPr>
-        <p:txBody>
-          <a:bodyPr wrap="square" anchor="t">
-            <a:spAutoFit/>
-          </a:bodyPr>
-          <a:lstStyle/>
-          <a:p>
-            <a:pPr algn="l">
-              <a:lnSpc>
-                <a:spcPct val="110000"/>
-              </a:lnSpc>
-              <a:spcAft>
-                <a:spcPts val="600"/>
-              </a:spcAft>
-            </a:pPr>
-            <a:r>
-              <a:rPr sz="2400" b="1">
-                <a:solidFill>
-                  <a:srgbClr val="FFFFFF"/>
-                </a:solidFill>
-                <a:latin typeface="微软雅黑"/>
-              </a:rPr>
-              <a:t>产出图证据 · m31_transfer</a:t>
-            </a:r>
-          </a:p>
-        </p:txBody>
-      </p:sp>
-      <p:sp>
-        <p:nvSpPr>
-          <p:cNvPr id="11" name="Rectangle 10"/>
-          <p:cNvSpPr/>
-          <p:nvPr/>
-        </p:nvSpPr>
-        <p:spPr>
-          <a:xfrm>
-            <a:off x="500000" y="6500000"/>
-            <a:ext cx="11100000" cy="20000"/>
-          </a:xfrm>
-          <a:prstGeom prst="rect">
-            <a:avLst/>
-          </a:prstGeom>
-          <a:solidFill>
-            <a:srgbClr val="C9D4EE"/>
-          </a:solidFill>
-          <a:ln>
-            <a:noFill/>
-          </a:ln>
-          <a:effectLst/>
-        </p:spPr>
-        <p:style>
-          <a:lnRef idx="1">
-            <a:schemeClr val="accent1"/>
-          </a:lnRef>
-          <a:fillRef idx="3">
-            <a:schemeClr val="accent1"/>
-          </a:fillRef>
-          <a:effectRef idx="2">
-            <a:schemeClr val="accent1"/>
-          </a:effectRef>
-          <a:fontRef idx="minor">
-            <a:schemeClr val="lt1"/>
-          </a:fontRef>
-        </p:style>
-        <p:txBody>
-          <a:bodyPr rtlCol="0" anchor="ctr"/>
-          <a:lstStyle/>
-          <a:p>
-            <a:pPr algn="ctr"/>
-          </a:p>
-        </p:txBody>
-      </p:sp>
-      <p:sp>
-        <p:nvSpPr>
-          <p:cNvPr id="12" name="TextBox 11"/>
-          <p:cNvSpPr txBox="1"/>
-          <p:nvPr/>
-        </p:nvSpPr>
-        <p:spPr>
-          <a:xfrm>
-            <a:off x="500000" y="6540000"/>
-            <a:ext cx="7000000" cy="300000"/>
-          </a:xfrm>
-          <a:prstGeom prst="rect">
-            <a:avLst/>
-          </a:prstGeom>
-          <a:noFill/>
-        </p:spPr>
-        <p:txBody>
-          <a:bodyPr wrap="square" anchor="t">
-            <a:spAutoFit/>
-          </a:bodyPr>
-          <a:lstStyle/>
-          <a:p>
-            <a:pPr algn="l">
-              <a:lnSpc>
-                <a:spcPct val="110000"/>
-              </a:lnSpc>
-              <a:spcAft>
-                <a:spcPts val="600"/>
-              </a:spcAft>
-            </a:pPr>
-            <a:r>
-              <a:rPr sz="1000" b="0">
-                <a:solidFill>
-                  <a:srgbClr val="8A97B5"/>
-                </a:solidFill>
-                <a:latin typeface="微软雅黑"/>
-              </a:rPr>
-              <a:t>两江智造集团 · AI应用基础48课时版</a:t>
-            </a:r>
-          </a:p>
-        </p:txBody>
-      </p:sp>
-      <p:sp>
-        <p:nvSpPr>
-          <p:cNvPr id="13" name="TextBox 12"/>
-          <p:cNvSpPr txBox="1"/>
-          <p:nvPr/>
-        </p:nvSpPr>
-        <p:spPr>
-          <a:xfrm>
-            <a:off x="10600000" y="6540000"/>
-            <a:ext cx="1000000" cy="300000"/>
-          </a:xfrm>
-          <a:prstGeom prst="rect">
-            <a:avLst/>
-          </a:prstGeom>
-          <a:noFill/>
-        </p:spPr>
-        <p:txBody>
-          <a:bodyPr wrap="square" anchor="t">
-            <a:spAutoFit/>
-          </a:bodyPr>
-          <a:lstStyle/>
-          <a:p>
-            <a:pPr algn="r">
-              <a:lnSpc>
-                <a:spcPct val="110000"/>
-              </a:lnSpc>
-              <a:spcAft>
-                <a:spcPts val="600"/>
-              </a:spcAft>
-            </a:pPr>
-            <a:r>
-              <a:rPr sz="1000" b="0">
-                <a:solidFill>
-                  <a:srgbClr val="8A97B5"/>
-                </a:solidFill>
-                <a:latin typeface="微软雅黑"/>
-              </a:rPr>
-              <a:t>14 / 19</a:t>
-            </a:r>
-          </a:p>
-        </p:txBody>
-      </p:sp>
-      <p:sp>
-        <p:nvSpPr>
-          <p:cNvPr id="14" name="Rectangle 13"/>
-          <p:cNvSpPr/>
-          <p:nvPr/>
-        </p:nvSpPr>
-        <p:spPr>
-          <a:xfrm>
-            <a:off x="457200" y="1481328"/>
-            <a:ext cx="11356848" cy="4663440"/>
-          </a:xfrm>
-          <a:prstGeom prst="rect">
-            <a:avLst/>
-          </a:prstGeom>
-          <a:solidFill>
-            <a:srgbClr val="FFFFFF"/>
-          </a:solidFill>
-          <a:ln>
-            <a:solidFill>
-              <a:srgbClr val="D6DCE4"/>
-            </a:solidFill>
-          </a:ln>
-          <a:effectLst/>
-        </p:spPr>
-        <p:style>
-          <a:lnRef idx="1">
-            <a:schemeClr val="accent1"/>
-          </a:lnRef>
-          <a:fillRef idx="3">
-            <a:schemeClr val="accent1"/>
-          </a:fillRef>
-          <a:effectRef idx="2">
-            <a:schemeClr val="accent1"/>
-          </a:effectRef>
-          <a:fontRef idx="minor">
-            <a:schemeClr val="lt1"/>
-          </a:fontRef>
-        </p:style>
-        <p:txBody>
-          <a:bodyPr rtlCol="0" anchor="ctr" wrap="square"/>
-          <a:lstStyle/>
-          <a:p>
-            <a:pPr algn="ctr"/>
-          </a:p>
-        </p:txBody>
-      </p:sp>
-      <p:sp>
-        <p:nvSpPr>
-          <p:cNvPr id="15" name="TextBox 14"/>
-          <p:cNvSpPr txBox="1"/>
-          <p:nvPr/>
-        </p:nvSpPr>
-        <p:spPr>
-          <a:xfrm>
-            <a:off x="530352" y="1517904"/>
-            <a:ext cx="11210544" cy="237744"/>
-          </a:xfrm>
-          <a:prstGeom prst="rect">
-            <a:avLst/>
-          </a:prstGeom>
-          <a:noFill/>
-        </p:spPr>
-        <p:txBody>
-          <a:bodyPr wrap="square">
-            <a:spAutoFit/>
-          </a:bodyPr>
-          <a:lstStyle/>
-          <a:p>
-            <a:r>
-              <a:rPr sz="950" b="1">
-                <a:solidFill>
-                  <a:srgbClr val="010328"/>
-                </a:solidFill>
-                <a:latin typeface="微软雅黑"/>
-              </a:rPr>
-              <a:t>产出图 · training_curves.png</a:t>
-            </a:r>
-          </a:p>
-        </p:txBody>
-      </p:sp>
-      <p:sp>
-        <p:nvSpPr>
-          <p:cNvPr id="16" name="TextBox 15"/>
-          <p:cNvSpPr txBox="1"/>
-          <p:nvPr/>
-        </p:nvSpPr>
-        <p:spPr>
-          <a:xfrm>
-            <a:off x="530352" y="1755648"/>
-            <a:ext cx="11210544" cy="201168"/>
-          </a:xfrm>
-          <a:prstGeom prst="rect">
-            <a:avLst/>
-          </a:prstGeom>
-          <a:noFill/>
-        </p:spPr>
-        <p:txBody>
-          <a:bodyPr wrap="square">
-            <a:spAutoFit/>
-          </a:bodyPr>
-          <a:lstStyle/>
-          <a:p>
-            <a:r>
-              <a:rPr sz="850" b="0">
-                <a:solidFill>
-                  <a:srgbClr val="7A8698"/>
-                </a:solidFill>
-                <a:latin typeface="微软雅黑"/>
-              </a:rPr>
-              <a:t>output/training_curves.png ｜ 48 KB ｜ run.py 本次落盘</a:t>
-            </a:r>
-          </a:p>
-        </p:txBody>
-      </p:sp>
-      <p:pic>
-        <p:nvPicPr>
-          <p:cNvPr id="17" name="Picture 16" descr="training_curves.png"/>
-          <p:cNvPicPr>
-            <a:picLocks noChangeAspect="1"/>
-          </p:cNvPicPr>
-          <p:nvPr/>
-        </p:nvPicPr>
-        <p:blipFill>
-          <a:blip r:embed="rId2"/>
-          <a:stretch>
-            <a:fillRect/>
-          </a:stretch>
-        </p:blipFill>
-        <p:spPr>
-          <a:xfrm>
-            <a:off x="2963672" y="1993392"/>
-            <a:ext cx="6343904" cy="4078224"/>
-          </a:xfrm>
-          <a:prstGeom prst="rect">
-            <a:avLst/>
-          </a:prstGeom>
-        </p:spPr>
-      </p:pic>
-      <p:sp>
-        <p:nvSpPr>
-          <p:cNvPr id="18" name="TextBox 17"/>
-          <p:cNvSpPr txBox="1"/>
-          <p:nvPr/>
-        </p:nvSpPr>
-        <p:spPr>
-          <a:xfrm>
-            <a:off x="457200" y="6254496"/>
-            <a:ext cx="11247120" cy="201168"/>
-          </a:xfrm>
-          <a:prstGeom prst="rect">
-            <a:avLst/>
-          </a:prstGeom>
-          <a:noFill/>
-        </p:spPr>
-        <p:txBody>
-          <a:bodyPr wrap="square">
-            <a:spAutoFit/>
-          </a:bodyPr>
-          <a:lstStyle/>
-          <a:p>
-            <a:r>
-              <a:rPr sz="900" b="0">
-                <a:solidFill>
-                  <a:srgbClr val="7A8698"/>
-                </a:solidFill>
-                <a:latin typeface="微软雅黑"/>
-              </a:rPr>
-              <a:t>以上图像由 run.py 本次运行落盘到 output/，非外部素材。</a:t>
-            </a:r>
-          </a:p>
-        </p:txBody>
-      </p:sp>
-    </p:spTree>
-  </p:cSld>
-  <p:clrMapOvr>
-    <a:masterClrMapping/>
-  </p:clrMapOvr>
-</p:sld>
-</file>
-
 <file path=ppt/slides/slide15.xml><?xml version="1.0" encoding="utf-8"?>
 <p:sld xmlns:a="http://schemas.openxmlformats.org/drawingml/2006/main" xmlns:p="http://schemas.openxmlformats.org/presentationml/2006/main" xmlns:r="http://schemas.openxmlformats.org/officeDocument/2006/relationships">
   <p:cSld>
@@ -8281,7 +8521,7 @@
                 </a:solidFill>
                 <a:latin typeface="微软雅黑"/>
               </a:rPr>
-              <a:t>工单完成效果图 · 完成后长这样（真实运行 · 参考实现） · 课末对照</a:t>
+              <a:t>实跑截图证据 · m31_transfer</a:t>
             </a:r>
           </a:p>
         </p:txBody>
@@ -8409,33 +8649,31 @@
                 </a:solidFill>
                 <a:latin typeface="微软雅黑"/>
               </a:rPr>
-              <a:t>15 / 19</a:t>
-            </a:r>
-          </a:p>
-        </p:txBody>
-      </p:sp>
-      <p:sp>
-        <p:nvSpPr>
-          <p:cNvPr id="14" name="Rounded Rectangle 13"/>
+              <a:t>15 / 21</a:t>
+            </a:r>
+          </a:p>
+        </p:txBody>
+      </p:sp>
+      <p:sp>
+        <p:nvSpPr>
+          <p:cNvPr id="14" name="Rectangle 13"/>
           <p:cNvSpPr/>
           <p:nvPr/>
         </p:nvSpPr>
         <p:spPr>
           <a:xfrm>
-            <a:off x="758952" y="1801368"/>
-            <a:ext cx="10899648" cy="2286000"/>
-          </a:xfrm>
-          <a:prstGeom prst="roundRect">
-            <a:avLst>
-              <a:gd name="adj" fmla="val 6000"/>
-            </a:avLst>
+            <a:off x="457200" y="1481328"/>
+            <a:ext cx="5486400" cy="2304288"/>
+          </a:xfrm>
+          <a:prstGeom prst="rect">
+            <a:avLst/>
           </a:prstGeom>
           <a:solidFill>
-            <a:srgbClr val="F3F6FD"/>
+            <a:srgbClr val="FFFFFF"/>
           </a:solidFill>
-          <a:ln w="9525">
+          <a:ln>
             <a:solidFill>
-              <a:srgbClr val="C9D4EE"/>
+              <a:srgbClr val="D6DCE4"/>
             </a:solidFill>
           </a:ln>
           <a:effectLst/>
@@ -8455,33 +8693,91 @@
           </a:fontRef>
         </p:style>
         <p:txBody>
-          <a:bodyPr rtlCol="0" anchor="ctr"/>
-          <a:lstStyle/>
-          <a:p/>
-        </p:txBody>
-      </p:sp>
-      <p:sp>
-        <p:nvSpPr>
-          <p:cNvPr id="15" name="Rounded Rectangle 14"/>
+          <a:bodyPr rtlCol="0" anchor="ctr" wrap="square"/>
+          <a:lstStyle/>
+          <a:p>
+            <a:pPr algn="ctr"/>
+          </a:p>
+        </p:txBody>
+      </p:sp>
+      <p:sp>
+        <p:nvSpPr>
+          <p:cNvPr id="15" name="TextBox 14"/>
+          <p:cNvSpPr txBox="1"/>
+          <p:nvPr/>
+        </p:nvSpPr>
+        <p:spPr>
+          <a:xfrm>
+            <a:off x="530352" y="1517904"/>
+            <a:ext cx="5340096" cy="237744"/>
+          </a:xfrm>
+          <a:prstGeom prst="rect">
+            <a:avLst/>
+          </a:prstGeom>
+          <a:noFill/>
+        </p:spPr>
+        <p:txBody>
+          <a:bodyPr wrap="square">
+            <a:spAutoFit/>
+          </a:bodyPr>
+          <a:lstStyle/>
+          <a:p>
+            <a:r>
+              <a:rPr sz="950" b="1">
+                <a:solidFill>
+                  <a:srgbClr val="010328"/>
+                </a:solidFill>
+                <a:latin typeface="微软雅黑"/>
+              </a:rPr>
+              <a:t>① run.py 实跑终端输出（逐字捕获）</a:t>
+            </a:r>
+          </a:p>
+        </p:txBody>
+      </p:sp>
+      <p:pic>
+        <p:nvPicPr>
+          <p:cNvPr id="16" name="Picture 15" descr="shot_run.png"/>
+          <p:cNvPicPr>
+            <a:picLocks noChangeAspect="1"/>
+          </p:cNvPicPr>
+          <p:nvPr/>
+        </p:nvPicPr>
+        <p:blipFill>
+          <a:blip r:embed="rId2"/>
+          <a:stretch>
+            <a:fillRect/>
+          </a:stretch>
+        </p:blipFill>
+        <p:spPr>
+          <a:xfrm>
+            <a:off x="964038" y="1773936"/>
+            <a:ext cx="4472722" cy="1956816"/>
+          </a:xfrm>
+          <a:prstGeom prst="rect">
+            <a:avLst/>
+          </a:prstGeom>
+        </p:spPr>
+      </p:pic>
+      <p:sp>
+        <p:nvSpPr>
+          <p:cNvPr id="17" name="Rectangle 16"/>
           <p:cNvSpPr/>
           <p:nvPr/>
         </p:nvSpPr>
         <p:spPr>
           <a:xfrm>
-            <a:off x="758952" y="4178808"/>
-            <a:ext cx="10899648" cy="1051560"/>
-          </a:xfrm>
-          <a:prstGeom prst="roundRect">
-            <a:avLst>
-              <a:gd name="adj" fmla="val 6000"/>
-            </a:avLst>
+            <a:off x="6327648" y="1481328"/>
+            <a:ext cx="5486400" cy="2304288"/>
+          </a:xfrm>
+          <a:prstGeom prst="rect">
+            <a:avLst/>
           </a:prstGeom>
           <a:solidFill>
             <a:srgbClr val="FFFFFF"/>
           </a:solidFill>
-          <a:ln w="9525">
+          <a:ln>
             <a:solidFill>
-              <a:srgbClr val="C9D4EE"/>
+              <a:srgbClr val="D6DCE4"/>
             </a:solidFill>
           </a:ln>
           <a:effectLst/>
@@ -8501,33 +8797,91 @@
           </a:fontRef>
         </p:style>
         <p:txBody>
-          <a:bodyPr rtlCol="0" anchor="ctr"/>
-          <a:lstStyle/>
-          <a:p/>
-        </p:txBody>
-      </p:sp>
-      <p:sp>
-        <p:nvSpPr>
-          <p:cNvPr id="16" name="Rounded Rectangle 15"/>
+          <a:bodyPr rtlCol="0" anchor="ctr" wrap="square"/>
+          <a:lstStyle/>
+          <a:p>
+            <a:pPr algn="ctr"/>
+          </a:p>
+        </p:txBody>
+      </p:sp>
+      <p:sp>
+        <p:nvSpPr>
+          <p:cNvPr id="18" name="TextBox 17"/>
+          <p:cNvSpPr txBox="1"/>
+          <p:nvPr/>
+        </p:nvSpPr>
+        <p:spPr>
+          <a:xfrm>
+            <a:off x="6400800" y="1517904"/>
+            <a:ext cx="5340096" cy="237744"/>
+          </a:xfrm>
+          <a:prstGeom prst="rect">
+            <a:avLst/>
+          </a:prstGeom>
+          <a:noFill/>
+        </p:spPr>
+        <p:txBody>
+          <a:bodyPr wrap="square">
+            <a:spAutoFit/>
+          </a:bodyPr>
+          <a:lstStyle/>
+          <a:p>
+            <a:r>
+              <a:rPr sz="950" b="1">
+                <a:solidFill>
+                  <a:srgbClr val="010328"/>
+                </a:solidFill>
+                <a:latin typeface="微软雅黑"/>
+              </a:rPr>
+              <a:t>② pytest 全绿终端输出（逐字捕获）</a:t>
+            </a:r>
+          </a:p>
+        </p:txBody>
+      </p:sp>
+      <p:pic>
+        <p:nvPicPr>
+          <p:cNvPr id="19" name="Picture 18" descr="shot_test.png"/>
+          <p:cNvPicPr>
+            <a:picLocks noChangeAspect="1"/>
+          </p:cNvPicPr>
+          <p:nvPr/>
+        </p:nvPicPr>
+        <p:blipFill>
+          <a:blip r:embed="rId3"/>
+          <a:stretch>
+            <a:fillRect/>
+          </a:stretch>
+        </p:blipFill>
+        <p:spPr>
+          <a:xfrm>
+            <a:off x="6834486" y="1773936"/>
+            <a:ext cx="4472722" cy="1956816"/>
+          </a:xfrm>
+          <a:prstGeom prst="rect">
+            <a:avLst/>
+          </a:prstGeom>
+        </p:spPr>
+      </p:pic>
+      <p:sp>
+        <p:nvSpPr>
+          <p:cNvPr id="20" name="Rectangle 19"/>
           <p:cNvSpPr/>
           <p:nvPr/>
         </p:nvSpPr>
         <p:spPr>
           <a:xfrm>
-            <a:off x="758952" y="5321808"/>
-            <a:ext cx="10899648" cy="1005840"/>
-          </a:xfrm>
-          <a:prstGeom prst="roundRect">
-            <a:avLst>
-              <a:gd name="adj" fmla="val 6000"/>
-            </a:avLst>
+            <a:off x="457200" y="3877056"/>
+            <a:ext cx="5486400" cy="2304288"/>
+          </a:xfrm>
+          <a:prstGeom prst="rect">
+            <a:avLst/>
           </a:prstGeom>
           <a:solidFill>
             <a:srgbClr val="FFFFFF"/>
           </a:solidFill>
-          <a:ln w="9525">
+          <a:ln>
             <a:solidFill>
-              <a:srgbClr val="C9D4EE"/>
+              <a:srgbClr val="D6DCE4"/>
             </a:solidFill>
           </a:ln>
           <a:effectLst/>
@@ -8547,21 +8901,23 @@
           </a:fontRef>
         </p:style>
         <p:txBody>
-          <a:bodyPr rtlCol="0" anchor="ctr"/>
-          <a:lstStyle/>
-          <a:p/>
-        </p:txBody>
-      </p:sp>
-      <p:sp>
-        <p:nvSpPr>
-          <p:cNvPr id="17" name="TextBox 16"/>
+          <a:bodyPr rtlCol="0" anchor="ctr" wrap="square"/>
+          <a:lstStyle/>
+          <a:p>
+            <a:pPr algn="ctr"/>
+          </a:p>
+        </p:txBody>
+      </p:sp>
+      <p:sp>
+        <p:nvSpPr>
+          <p:cNvPr id="21" name="TextBox 20"/>
           <p:cNvSpPr txBox="1"/>
           <p:nvPr/>
         </p:nvSpPr>
         <p:spPr>
           <a:xfrm>
-            <a:off x="960120" y="1929384"/>
-            <a:ext cx="10469880" cy="2048256"/>
+            <a:off x="530352" y="3913632"/>
+            <a:ext cx="5340096" cy="237744"/>
           </a:xfrm>
           <a:prstGeom prst="rect">
             <a:avLst/>
@@ -8569,153 +8925,103 @@
           <a:noFill/>
         </p:spPr>
         <p:txBody>
-          <a:bodyPr wrap="square" anchor="t" lIns="0" rIns="0" tIns="0" bIns="0">
+          <a:bodyPr wrap="square">
             <a:spAutoFit/>
           </a:bodyPr>
           <a:lstStyle/>
           <a:p>
-            <a:pPr algn="l"/>
-            <a:r>
-              <a:rPr sz="1400" b="1">
-                <a:solidFill>
-                  <a:srgbClr val="0545E8"/>
-                </a:solidFill>
-              </a:rPr>
-              <a:t>① 参考实现真实运行输出（本工单完成态）</a:t>
-            </a:r>
-          </a:p>
-          <a:p>
-            <a:pPr algn="l">
-              <a:spcBef>
-                <a:spcPts val="100"/>
-              </a:spcBef>
-            </a:pPr>
-            <a:r>
-              <a:rPr sz="1000" b="0">
+            <a:r>
+              <a:rPr sz="950" b="1">
                 <a:solidFill>
                   <a:srgbClr val="010328"/>
                 </a:solidFill>
-              </a:rPr>
-              <a:t>=== 工单 M3-1 ResNet迁移学习（概念版）· 完成态 ===</a:t>
-            </a:r>
-          </a:p>
-          <a:p>
-            <a:pPr algn="l">
-              <a:spcBef>
-                <a:spcPts val="100"/>
-              </a:spcBef>
-            </a:pPr>
-            <a:r>
-              <a:rPr sz="1000" b="0">
-                <a:solidFill>
-                  <a:srgbClr val="010328"/>
-                </a:solidFill>
-              </a:rPr>
-              <a:t>世界: 海量无标注 2000 条 / 少量标注 16 条 / 测试 200 条</a:t>
-            </a:r>
-          </a:p>
-          <a:p>
-            <a:pPr algn="l">
-              <a:spcBef>
-                <a:spcPts val="100"/>
-              </a:spcBef>
-            </a:pPr>
-            <a:r>
-              <a:rPr sz="1000" b="0">
-                <a:solidFill>
-                  <a:srgbClr val="010328"/>
-                </a:solidFill>
-              </a:rPr>
-              <a:t>预训练特征提取器: PCA(8维) 在海量数据上一次性学成并**冻结**</a:t>
-            </a:r>
-          </a:p>
-          <a:p>
-            <a:pPr algn="l">
-              <a:spcBef>
-                <a:spcPts val="100"/>
-              </a:spcBef>
-            </a:pPr>
-            <a:r>
-              <a:rPr sz="1000" b="0">
-                <a:solidFill>
-                  <a:srgbClr val="010328"/>
-                </a:solidFill>
-              </a:rPr>
-              <a:t>  冻结特征累计解释方差 = 0.330</a:t>
-            </a:r>
-          </a:p>
-          <a:p>
-            <a:pPr algn="l">
-              <a:spcBef>
-                <a:spcPts val="100"/>
-              </a:spcBef>
-            </a:pPr>
-            <a:r>
-              <a:rPr sz="1000" b="0">
-                <a:solidFill>
-                  <a:srgbClr val="010328"/>
-                </a:solidFill>
-              </a:rPr>
-              <a:t>对照（16条样本直连 192 维训头）: 测试准确率 = 0.915</a:t>
-            </a:r>
-          </a:p>
-          <a:p>
-            <a:pPr algn="l">
-              <a:spcBef>
-                <a:spcPts val="100"/>
-              </a:spcBef>
-            </a:pPr>
-            <a:r>
-              <a:rPr sz="1000" b="0">
-                <a:solidFill>
-                  <a:srgbClr val="010328"/>
-                </a:solidFill>
-              </a:rPr>
-              <a:t>迁移（冻结8维特征 + 只训分类头）: 测试准确率 = 0.960</a:t>
-            </a:r>
-          </a:p>
-          <a:p>
-            <a:pPr algn="l">
-              <a:spcBef>
-                <a:spcPts val="100"/>
-              </a:spcBef>
-            </a:pPr>
-            <a:r>
-              <a:rPr sz="1000" b="0">
-                <a:solidFill>
-                  <a:srgbClr val="010328"/>
-                </a:solidFill>
-              </a:rPr>
-              <a:t>增益 = +0.045 → 迁移显著胜出，预训练特征是维度灾难的解药</a:t>
-            </a:r>
-          </a:p>
-          <a:p>
-            <a:pPr algn="l">
-              <a:spcBef>
-                <a:spcPts val="100"/>
-              </a:spcBef>
-            </a:pPr>
-            <a:r>
-              <a:rPr sz="1000" b="0">
-                <a:solidFill>
-                  <a:srgbClr val="010328"/>
-                </a:solidFill>
-              </a:rPr>
-              <a:t>结论: 真实规律仅藏在少数测点维（其余为环境噪声维）；冻结+小样本头 是 ResNet 微调思想的最小可运行模型。</a:t>
-            </a:r>
-          </a:p>
-        </p:txBody>
-      </p:sp>
-      <p:sp>
-        <p:nvSpPr>
-          <p:cNvPr id="18" name="TextBox 17"/>
+                <a:latin typeface="微软雅黑"/>
+              </a:rPr>
+              <a:t>③ report.txt「验收档位判定（实测）」段</a:t>
+            </a:r>
+          </a:p>
+        </p:txBody>
+      </p:sp>
+      <p:pic>
+        <p:nvPicPr>
+          <p:cNvPr id="22" name="Picture 21" descr="shot_report.png"/>
+          <p:cNvPicPr>
+            <a:picLocks noChangeAspect="1"/>
+          </p:cNvPicPr>
+          <p:nvPr/>
+        </p:nvPicPr>
+        <p:blipFill>
+          <a:blip r:embed="rId4"/>
+          <a:stretch>
+            <a:fillRect/>
+          </a:stretch>
+        </p:blipFill>
+        <p:spPr>
+          <a:xfrm>
+            <a:off x="964038" y="4169664"/>
+            <a:ext cx="4472722" cy="1956816"/>
+          </a:xfrm>
+          <a:prstGeom prst="rect">
+            <a:avLst/>
+          </a:prstGeom>
+        </p:spPr>
+      </p:pic>
+      <p:sp>
+        <p:nvSpPr>
+          <p:cNvPr id="23" name="Rectangle 22"/>
+          <p:cNvSpPr/>
+          <p:nvPr/>
+        </p:nvSpPr>
+        <p:spPr>
+          <a:xfrm>
+            <a:off x="6327648" y="3877056"/>
+            <a:ext cx="5486400" cy="2304288"/>
+          </a:xfrm>
+          <a:prstGeom prst="rect">
+            <a:avLst/>
+          </a:prstGeom>
+          <a:solidFill>
+            <a:srgbClr val="F7F9FB"/>
+          </a:solidFill>
+          <a:ln>
+            <a:solidFill>
+              <a:srgbClr val="D6DCE4"/>
+            </a:solidFill>
+          </a:ln>
+          <a:effectLst/>
+        </p:spPr>
+        <p:style>
+          <a:lnRef idx="1">
+            <a:schemeClr val="accent1"/>
+          </a:lnRef>
+          <a:fillRef idx="3">
+            <a:schemeClr val="accent1"/>
+          </a:fillRef>
+          <a:effectRef idx="2">
+            <a:schemeClr val="accent1"/>
+          </a:effectRef>
+          <a:fontRef idx="minor">
+            <a:schemeClr val="lt1"/>
+          </a:fontRef>
+        </p:style>
+        <p:txBody>
+          <a:bodyPr rtlCol="0" anchor="ctr" wrap="square"/>
+          <a:lstStyle/>
+          <a:p>
+            <a:pPr algn="ctr"/>
+          </a:p>
+        </p:txBody>
+      </p:sp>
+      <p:sp>
+        <p:nvSpPr>
+          <p:cNvPr id="24" name="TextBox 23"/>
           <p:cNvSpPr txBox="1"/>
           <p:nvPr/>
         </p:nvSpPr>
         <p:spPr>
           <a:xfrm>
-            <a:off x="960120" y="4297680"/>
-            <a:ext cx="10469880" cy="868680"/>
+            <a:off x="6400800" y="3913632"/>
+            <a:ext cx="5340096" cy="237744"/>
           </a:xfrm>
           <a:prstGeom prst="rect">
             <a:avLst/>
@@ -8723,48 +9029,33 @@
           <a:noFill/>
         </p:spPr>
         <p:txBody>
-          <a:bodyPr wrap="square" anchor="t" lIns="0" rIns="0" tIns="0" bIns="0">
+          <a:bodyPr wrap="square">
             <a:spAutoFit/>
           </a:bodyPr>
           <a:lstStyle/>
           <a:p>
-            <a:pPr algn="l"/>
-            <a:r>
-              <a:rPr sz="1300" b="1">
-                <a:solidFill>
-                  <a:srgbClr val="0545E8"/>
-                </a:solidFill>
-              </a:rPr>
-              <a:t>② 关键自检点（对照工单逐项核对）</a:t>
-            </a:r>
-          </a:p>
-          <a:p>
-            <a:pPr algn="l">
-              <a:spcBef>
-                <a:spcPts val="200"/>
-              </a:spcBef>
-            </a:pPr>
-            <a:r>
-              <a:rPr sz="1150" b="0">
+            <a:r>
+              <a:rPr sz="950" b="1">
                 <a:solidFill>
                   <a:srgbClr val="010328"/>
                 </a:solidFill>
-              </a:rPr>
-              <a:t>□ 代码从头跑到尾不报错　□ 指标与工单及格线逐项对齐　□ 随机种子已固定（可复现）</a:t>
-            </a:r>
-          </a:p>
-        </p:txBody>
-      </p:sp>
-      <p:sp>
-        <p:nvSpPr>
-          <p:cNvPr id="19" name="TextBox 18"/>
+                <a:latin typeface="微软雅黑"/>
+              </a:rPr>
+              <a:t>④ 采集口径（可复现）</a:t>
+            </a:r>
+          </a:p>
+        </p:txBody>
+      </p:sp>
+      <p:sp>
+        <p:nvSpPr>
+          <p:cNvPr id="25" name="TextBox 24"/>
           <p:cNvSpPr txBox="1"/>
           <p:nvPr/>
         </p:nvSpPr>
         <p:spPr>
           <a:xfrm>
-            <a:off x="960120" y="5431536"/>
-            <a:ext cx="10469880" cy="841248"/>
+            <a:off x="6437376" y="4187952"/>
+            <a:ext cx="5266944" cy="1920240"/>
           </a:xfrm>
           <a:prstGeom prst="rect">
             <a:avLst/>
@@ -8772,34 +9063,108 @@
           <a:noFill/>
         </p:spPr>
         <p:txBody>
-          <a:bodyPr wrap="square" anchor="t" lIns="0" rIns="0" tIns="0" bIns="0">
+          <a:bodyPr wrap="square">
             <a:spAutoFit/>
           </a:bodyPr>
           <a:lstStyle/>
           <a:p>
-            <a:pPr algn="l"/>
-            <a:r>
-              <a:rPr sz="1300" b="1">
-                <a:solidFill>
-                  <a:srgbClr val="F5670F"/>
-                </a:solidFill>
-              </a:rPr>
-              <a:t>③ 提交与达标（过程性证据）</a:t>
-            </a:r>
-          </a:p>
-          <a:p>
-            <a:pPr algn="l">
-              <a:spcBef>
-                <a:spcPts val="200"/>
-              </a:spcBef>
-            </a:pPr>
-            <a:r>
-              <a:rPr sz="1100" b="0">
-                <a:solidFill>
-                  <a:srgbClr val="010328"/>
-                </a:solidFill>
-              </a:rPr>
-              <a:t>达标线 D≥60 / C≥70 / B≥80 / A≥90　｜　提交 学号_姓名_工单号 + 运行截图 + 决策记录 + Git≥1次commit</a:t>
+            <a:r>
+              <a:rPr sz="950" b="0">
+                <a:solidFill>
+                  <a:srgbClr val="2B2F36"/>
+                </a:solidFill>
+                <a:latin typeface="微软雅黑"/>
+              </a:rPr>
+              <a:t>项目：05-AI应用基础48课时版/工程化项目/m31_transfer/</a:t>
+            </a:r>
+          </a:p>
+          <a:p>
+            <a:r>
+              <a:rPr sz="950" b="0">
+                <a:solidFill>
+                  <a:srgbClr val="2B2F36"/>
+                </a:solidFill>
+                <a:latin typeface="微软雅黑"/>
+              </a:rPr>
+              <a:t>命令：/opt/anaconda3/bin/python run.py ｜ /opt/anaconda3/bin/python -m pytest -q</a:t>
+            </a:r>
+          </a:p>
+          <a:p>
+            <a:r>
+              <a:rPr sz="950" b="0">
+                <a:solidFill>
+                  <a:srgbClr val="2B2F36"/>
+                </a:solidFill>
+                <a:latin typeface="微软雅黑"/>
+              </a:rPr>
+              <a:t>采集：工具/ppt97/capture97.py（2026-10-28 10:50 真跑逐字捕获输出）</a:t>
+            </a:r>
+          </a:p>
+          <a:p>
+            <a:r>
+              <a:rPr sz="950" b="0">
+                <a:solidFill>
+                  <a:srgbClr val="2B2F36"/>
+                </a:solidFill>
+                <a:latin typeface="微软雅黑"/>
+              </a:rPr>
+              <a:t>渲染：工具/ppt97/terminal_png.py（终端截图，不改写任何数字）</a:t>
+            </a:r>
+          </a:p>
+          <a:p>
+            <a:r>
+              <a:rPr sz="950" b="0">
+                <a:solidFill>
+                  <a:srgbClr val="2B2F36"/>
+                </a:solidFill>
+                <a:latin typeface="微软雅黑"/>
+              </a:rPr>
+              <a:t>退出码：run=0 ｜ pytest=0</a:t>
+            </a:r>
+          </a:p>
+          <a:p>
+            <a:r>
+              <a:rPr sz="950" b="0">
+                <a:solidFill>
+                  <a:srgbClr val="2B2F36"/>
+                </a:solidFill>
+                <a:latin typeface="微软雅黑"/>
+              </a:rPr>
+              <a:t>档位判定取自 output/report.txt「验收档位判定（实测）」段</a:t>
+            </a:r>
+          </a:p>
+        </p:txBody>
+      </p:sp>
+      <p:sp>
+        <p:nvSpPr>
+          <p:cNvPr id="26" name="TextBox 25"/>
+          <p:cNvSpPr txBox="1"/>
+          <p:nvPr/>
+        </p:nvSpPr>
+        <p:spPr>
+          <a:xfrm>
+            <a:off x="457200" y="6254496"/>
+            <a:ext cx="11247120" cy="201168"/>
+          </a:xfrm>
+          <a:prstGeom prst="rect">
+            <a:avLst/>
+          </a:prstGeom>
+          <a:noFill/>
+        </p:spPr>
+        <p:txBody>
+          <a:bodyPr wrap="square">
+            <a:spAutoFit/>
+          </a:bodyPr>
+          <a:lstStyle/>
+          <a:p>
+            <a:r>
+              <a:rPr sz="900" b="0">
+                <a:solidFill>
+                  <a:srgbClr val="7A8698"/>
+                </a:solidFill>
+                <a:latin typeface="微软雅黑"/>
+              </a:rPr>
+              <a:t>截图内容逐字取自 工具/ppt97/evidence/m31_transfer/（capture97.py 真跑捕获，未改写数字）</a:t>
             </a:r>
           </a:p>
         </p:txBody>
@@ -8831,7 +9196,7 @@
         <p:spPr>
           <a:xfrm>
             <a:off x="0" y="0"/>
-            <a:ext cx="12192000" cy="6858000"/>
+            <a:ext cx="12192000" cy="1150000"/>
           </a:xfrm>
           <a:prstGeom prst="rect">
             <a:avLst/>
@@ -8874,8 +9239,8 @@
         </p:nvSpPr>
         <p:spPr>
           <a:xfrm>
-            <a:off x="0" y="2880360"/>
-            <a:ext cx="12192000" cy="50000"/>
+            <a:off x="0" y="1150000"/>
+            <a:ext cx="2600000" cy="70000"/>
           </a:xfrm>
           <a:prstGeom prst="rect">
             <a:avLst/>
@@ -8918,178 +9283,8 @@
         </p:nvSpPr>
         <p:spPr>
           <a:xfrm>
-            <a:off x="0" y="1645920"/>
-            <a:ext cx="12192000" cy="1500000"/>
-          </a:xfrm>
-          <a:prstGeom prst="rect">
-            <a:avLst/>
-          </a:prstGeom>
-          <a:noFill/>
-        </p:spPr>
-        <p:txBody>
-          <a:bodyPr wrap="square" anchor="t">
-            <a:spAutoFit/>
-          </a:bodyPr>
-          <a:lstStyle/>
-          <a:p>
-            <a:pPr algn="ctr">
-              <a:lnSpc>
-                <a:spcPct val="110000"/>
-              </a:lnSpc>
-              <a:spcAft>
-                <a:spcPts val="600"/>
-              </a:spcAft>
-            </a:pPr>
-            <a:r>
-              <a:rPr sz="5400" b="1">
-                <a:solidFill>
-                  <a:srgbClr val="FFFFFF"/>
-                </a:solidFill>
-                <a:latin typeface="微软雅黑"/>
-              </a:rPr>
-              <a:t>THANKS</a:t>
-            </a:r>
-          </a:p>
-        </p:txBody>
-      </p:sp>
-      <p:sp>
-        <p:nvSpPr>
-          <p:cNvPr id="5" name="TextBox 4"/>
-          <p:cNvSpPr txBox="1"/>
-          <p:nvPr/>
-        </p:nvSpPr>
-        <p:spPr>
-          <a:xfrm>
-            <a:off x="0" y="3429000"/>
-            <a:ext cx="12192000" cy="800000"/>
-          </a:xfrm>
-          <a:prstGeom prst="rect">
-            <a:avLst/>
-          </a:prstGeom>
-          <a:noFill/>
-        </p:spPr>
-        <p:txBody>
-          <a:bodyPr wrap="square" anchor="t">
-            <a:spAutoFit/>
-          </a:bodyPr>
-          <a:lstStyle/>
-          <a:p>
-            <a:pPr algn="ctr">
-              <a:lnSpc>
-                <a:spcPct val="110000"/>
-              </a:lnSpc>
-              <a:spcAft>
-                <a:spcPts val="600"/>
-              </a:spcAft>
-            </a:pPr>
-            <a:r>
-              <a:rPr sz="2200" b="1">
-                <a:solidFill>
-                  <a:srgbClr val="F5670F"/>
-                </a:solidFill>
-                <a:latin typeface="微软雅黑"/>
-              </a:rPr>
-              <a:t>感谢聆听 · 动手实践出真知</a:t>
-            </a:r>
-          </a:p>
-        </p:txBody>
-      </p:sp>
-      <p:sp>
-        <p:nvSpPr>
-          <p:cNvPr id="6" name="TextBox 5"/>
-          <p:cNvSpPr txBox="1"/>
-          <p:nvPr/>
-        </p:nvSpPr>
-        <p:spPr>
-          <a:xfrm>
-            <a:off x="0" y="4526280"/>
-            <a:ext cx="12192000" cy="600000"/>
-          </a:xfrm>
-          <a:prstGeom prst="rect">
-            <a:avLst/>
-          </a:prstGeom>
-          <a:noFill/>
-        </p:spPr>
-        <p:txBody>
-          <a:bodyPr wrap="square" anchor="t">
-            <a:spAutoFit/>
-          </a:bodyPr>
-          <a:lstStyle/>
-          <a:p>
-            <a:pPr algn="ctr">
-              <a:lnSpc>
-                <a:spcPct val="110000"/>
-              </a:lnSpc>
-              <a:spcAft>
-                <a:spcPts val="600"/>
-              </a:spcAft>
-            </a:pPr>
-            <a:r>
-              <a:rPr sz="1400" b="0">
-                <a:solidFill>
-                  <a:srgbClr val="BBC6E6"/>
-                </a:solidFill>
-                <a:latin typeface="微软雅黑"/>
-              </a:rPr>
-              <a:t>以生为本   |   做中学 · 学中做</a:t>
-            </a:r>
-          </a:p>
-        </p:txBody>
-      </p:sp>
-      <p:sp>
-        <p:nvSpPr>
-          <p:cNvPr id="7" name="Rectangle 6"/>
-          <p:cNvSpPr/>
-          <p:nvPr/>
-        </p:nvSpPr>
-        <p:spPr>
-          <a:xfrm>
-            <a:off x="500000" y="6500000"/>
-            <a:ext cx="11100000" cy="20000"/>
-          </a:xfrm>
-          <a:prstGeom prst="rect">
-            <a:avLst/>
-          </a:prstGeom>
-          <a:solidFill>
-            <a:srgbClr val="C9D4EE"/>
-          </a:solidFill>
-          <a:ln>
-            <a:noFill/>
-          </a:ln>
-          <a:effectLst/>
-        </p:spPr>
-        <p:style>
-          <a:lnRef idx="1">
-            <a:schemeClr val="accent1"/>
-          </a:lnRef>
-          <a:fillRef idx="3">
-            <a:schemeClr val="accent1"/>
-          </a:fillRef>
-          <a:effectRef idx="2">
-            <a:schemeClr val="accent1"/>
-          </a:effectRef>
-          <a:fontRef idx="minor">
-            <a:schemeClr val="lt1"/>
-          </a:fontRef>
-        </p:style>
-        <p:txBody>
-          <a:bodyPr rtlCol="0" anchor="ctr"/>
-          <a:lstStyle/>
-          <a:p>
-            <a:pPr algn="ctr"/>
-          </a:p>
-        </p:txBody>
-      </p:sp>
-      <p:sp>
-        <p:nvSpPr>
-          <p:cNvPr id="8" name="TextBox 7"/>
-          <p:cNvSpPr txBox="1"/>
-          <p:nvPr/>
-        </p:nvSpPr>
-        <p:spPr>
-          <a:xfrm>
-            <a:off x="500000" y="6540000"/>
-            <a:ext cx="7000000" cy="300000"/>
+            <a:off x="700000" y="300000"/>
+            <a:ext cx="10792000" cy="700000"/>
           </a:xfrm>
           <a:prstGeom prst="rect">
             <a:avLst/>
@@ -9111,6 +9306,92 @@
               </a:spcAft>
             </a:pPr>
             <a:r>
+              <a:rPr sz="2400" b="1">
+                <a:solidFill>
+                  <a:srgbClr val="FFFFFF"/>
+                </a:solidFill>
+                <a:latin typeface="微软雅黑"/>
+              </a:rPr>
+              <a:t>产出图证据 · m31_transfer</a:t>
+            </a:r>
+          </a:p>
+        </p:txBody>
+      </p:sp>
+      <p:sp>
+        <p:nvSpPr>
+          <p:cNvPr id="11" name="Rectangle 10"/>
+          <p:cNvSpPr/>
+          <p:nvPr/>
+        </p:nvSpPr>
+        <p:spPr>
+          <a:xfrm>
+            <a:off x="500000" y="6500000"/>
+            <a:ext cx="11100000" cy="20000"/>
+          </a:xfrm>
+          <a:prstGeom prst="rect">
+            <a:avLst/>
+          </a:prstGeom>
+          <a:solidFill>
+            <a:srgbClr val="C9D4EE"/>
+          </a:solidFill>
+          <a:ln>
+            <a:noFill/>
+          </a:ln>
+          <a:effectLst/>
+        </p:spPr>
+        <p:style>
+          <a:lnRef idx="1">
+            <a:schemeClr val="accent1"/>
+          </a:lnRef>
+          <a:fillRef idx="3">
+            <a:schemeClr val="accent1"/>
+          </a:fillRef>
+          <a:effectRef idx="2">
+            <a:schemeClr val="accent1"/>
+          </a:effectRef>
+          <a:fontRef idx="minor">
+            <a:schemeClr val="lt1"/>
+          </a:fontRef>
+        </p:style>
+        <p:txBody>
+          <a:bodyPr rtlCol="0" anchor="ctr"/>
+          <a:lstStyle/>
+          <a:p>
+            <a:pPr algn="ctr"/>
+          </a:p>
+        </p:txBody>
+      </p:sp>
+      <p:sp>
+        <p:nvSpPr>
+          <p:cNvPr id="12" name="TextBox 11"/>
+          <p:cNvSpPr txBox="1"/>
+          <p:nvPr/>
+        </p:nvSpPr>
+        <p:spPr>
+          <a:xfrm>
+            <a:off x="500000" y="6540000"/>
+            <a:ext cx="7000000" cy="300000"/>
+          </a:xfrm>
+          <a:prstGeom prst="rect">
+            <a:avLst/>
+          </a:prstGeom>
+          <a:noFill/>
+        </p:spPr>
+        <p:txBody>
+          <a:bodyPr wrap="square" anchor="t">
+            <a:spAutoFit/>
+          </a:bodyPr>
+          <a:lstStyle/>
+          <a:p>
+            <a:pPr algn="l">
+              <a:lnSpc>
+                <a:spcPct val="110000"/>
+              </a:lnSpc>
+              <a:spcAft>
+                <a:spcPts val="600"/>
+              </a:spcAft>
+            </a:pPr>
+            <a:r>
               <a:rPr sz="1000" b="0">
                 <a:solidFill>
                   <a:srgbClr val="8A97B5"/>
@@ -9124,7 +9405,7 @@
       </p:sp>
       <p:sp>
         <p:nvSpPr>
-          <p:cNvPr id="9" name="TextBox 8"/>
+          <p:cNvPr id="13" name="TextBox 12"/>
           <p:cNvSpPr txBox="1"/>
           <p:nvPr/>
         </p:nvSpPr>
@@ -9139,7 +9420,7 @@
           <a:noFill/>
         </p:spPr>
         <p:txBody>
-          <a:bodyPr wrap="square" anchor="ctr">
+          <a:bodyPr wrap="square" anchor="t">
             <a:spAutoFit/>
           </a:bodyPr>
           <a:lstStyle/>
@@ -9159,7 +9440,179 @@
                 </a:solidFill>
                 <a:latin typeface="微软雅黑"/>
               </a:rPr>
-              <a:t>16 / 19</a:t>
+              <a:t>16 / 21</a:t>
+            </a:r>
+          </a:p>
+        </p:txBody>
+      </p:sp>
+      <p:sp>
+        <p:nvSpPr>
+          <p:cNvPr id="14" name="Rectangle 13"/>
+          <p:cNvSpPr/>
+          <p:nvPr/>
+        </p:nvSpPr>
+        <p:spPr>
+          <a:xfrm>
+            <a:off x="457200" y="1481328"/>
+            <a:ext cx="11356848" cy="4663440"/>
+          </a:xfrm>
+          <a:prstGeom prst="rect">
+            <a:avLst/>
+          </a:prstGeom>
+          <a:solidFill>
+            <a:srgbClr val="FFFFFF"/>
+          </a:solidFill>
+          <a:ln>
+            <a:solidFill>
+              <a:srgbClr val="D6DCE4"/>
+            </a:solidFill>
+          </a:ln>
+          <a:effectLst/>
+        </p:spPr>
+        <p:style>
+          <a:lnRef idx="1">
+            <a:schemeClr val="accent1"/>
+          </a:lnRef>
+          <a:fillRef idx="3">
+            <a:schemeClr val="accent1"/>
+          </a:fillRef>
+          <a:effectRef idx="2">
+            <a:schemeClr val="accent1"/>
+          </a:effectRef>
+          <a:fontRef idx="minor">
+            <a:schemeClr val="lt1"/>
+          </a:fontRef>
+        </p:style>
+        <p:txBody>
+          <a:bodyPr rtlCol="0" anchor="ctr" wrap="square"/>
+          <a:lstStyle/>
+          <a:p>
+            <a:pPr algn="ctr"/>
+          </a:p>
+        </p:txBody>
+      </p:sp>
+      <p:sp>
+        <p:nvSpPr>
+          <p:cNvPr id="15" name="TextBox 14"/>
+          <p:cNvSpPr txBox="1"/>
+          <p:nvPr/>
+        </p:nvSpPr>
+        <p:spPr>
+          <a:xfrm>
+            <a:off x="530352" y="1517904"/>
+            <a:ext cx="11210544" cy="237744"/>
+          </a:xfrm>
+          <a:prstGeom prst="rect">
+            <a:avLst/>
+          </a:prstGeom>
+          <a:noFill/>
+        </p:spPr>
+        <p:txBody>
+          <a:bodyPr wrap="square">
+            <a:spAutoFit/>
+          </a:bodyPr>
+          <a:lstStyle/>
+          <a:p>
+            <a:r>
+              <a:rPr sz="950" b="1">
+                <a:solidFill>
+                  <a:srgbClr val="010328"/>
+                </a:solidFill>
+                <a:latin typeface="微软雅黑"/>
+              </a:rPr>
+              <a:t>产出图 · training_curves.png</a:t>
+            </a:r>
+          </a:p>
+        </p:txBody>
+      </p:sp>
+      <p:sp>
+        <p:nvSpPr>
+          <p:cNvPr id="16" name="TextBox 15"/>
+          <p:cNvSpPr txBox="1"/>
+          <p:nvPr/>
+        </p:nvSpPr>
+        <p:spPr>
+          <a:xfrm>
+            <a:off x="530352" y="1755648"/>
+            <a:ext cx="11210544" cy="201168"/>
+          </a:xfrm>
+          <a:prstGeom prst="rect">
+            <a:avLst/>
+          </a:prstGeom>
+          <a:noFill/>
+        </p:spPr>
+        <p:txBody>
+          <a:bodyPr wrap="square">
+            <a:spAutoFit/>
+          </a:bodyPr>
+          <a:lstStyle/>
+          <a:p>
+            <a:r>
+              <a:rPr sz="900" b="0">
+                <a:solidFill>
+                  <a:srgbClr val="7A8698"/>
+                </a:solidFill>
+                <a:latin typeface="微软雅黑"/>
+              </a:rPr>
+              <a:t>output/training_curves.png ｜ 48 KB ｜ run.py 本次落盘</a:t>
+            </a:r>
+          </a:p>
+        </p:txBody>
+      </p:sp>
+      <p:pic>
+        <p:nvPicPr>
+          <p:cNvPr id="17" name="Picture 16" descr="training_curves.png"/>
+          <p:cNvPicPr>
+            <a:picLocks noChangeAspect="1"/>
+          </p:cNvPicPr>
+          <p:nvPr/>
+        </p:nvPicPr>
+        <p:blipFill>
+          <a:blip r:embed="rId2"/>
+          <a:stretch>
+            <a:fillRect/>
+          </a:stretch>
+        </p:blipFill>
+        <p:spPr>
+          <a:xfrm>
+            <a:off x="2963672" y="1993392"/>
+            <a:ext cx="6343904" cy="4078224"/>
+          </a:xfrm>
+          <a:prstGeom prst="rect">
+            <a:avLst/>
+          </a:prstGeom>
+        </p:spPr>
+      </p:pic>
+      <p:sp>
+        <p:nvSpPr>
+          <p:cNvPr id="18" name="TextBox 17"/>
+          <p:cNvSpPr txBox="1"/>
+          <p:nvPr/>
+        </p:nvSpPr>
+        <p:spPr>
+          <a:xfrm>
+            <a:off x="457200" y="6254496"/>
+            <a:ext cx="11247120" cy="201168"/>
+          </a:xfrm>
+          <a:prstGeom prst="rect">
+            <a:avLst/>
+          </a:prstGeom>
+          <a:noFill/>
+        </p:spPr>
+        <p:txBody>
+          <a:bodyPr wrap="square">
+            <a:spAutoFit/>
+          </a:bodyPr>
+          <a:lstStyle/>
+          <a:p>
+            <a:r>
+              <a:rPr sz="900" b="0">
+                <a:solidFill>
+                  <a:srgbClr val="7A8698"/>
+                </a:solidFill>
+                <a:latin typeface="微软雅黑"/>
+              </a:rPr>
+              <a:t>以上图像由 run.py 本次运行落盘到 output/，非外部素材。</a:t>
             </a:r>
           </a:p>
         </p:txBody>
@@ -9307,27 +9760,27 @@
                 </a:solidFill>
                 <a:latin typeface="微软雅黑"/>
               </a:rPr>
-              <a:t>下次课预告（第16周）</a:t>
-            </a:r>
-          </a:p>
-        </p:txBody>
-      </p:sp>
-      <p:sp>
-        <p:nvSpPr>
-          <p:cNvPr id="5" name="Rectangle 4"/>
+              <a:t>工单完成效果图 · 完成后长这样（真实运行 · 参考实现） · 课末对照</a:t>
+            </a:r>
+          </a:p>
+        </p:txBody>
+      </p:sp>
+      <p:sp>
+        <p:nvSpPr>
+          <p:cNvPr id="11" name="Rectangle 10"/>
           <p:cNvSpPr/>
           <p:nvPr/>
         </p:nvSpPr>
         <p:spPr>
           <a:xfrm>
-            <a:off x="760000" y="1900000"/>
-            <a:ext cx="10900000" cy="1600000"/>
+            <a:off x="500000" y="6500000"/>
+            <a:ext cx="11100000" cy="20000"/>
           </a:xfrm>
           <a:prstGeom prst="rect">
             <a:avLst/>
           </a:prstGeom>
           <a:solidFill>
-            <a:srgbClr val="F3F6FD"/>
+            <a:srgbClr val="C9D4EE"/>
           </a:solidFill>
           <a:ln>
             <a:noFill/>
@@ -9358,58 +9811,14 @@
       </p:sp>
       <p:sp>
         <p:nvSpPr>
-          <p:cNvPr id="6" name="Rectangle 5"/>
-          <p:cNvSpPr/>
-          <p:nvPr/>
-        </p:nvSpPr>
-        <p:spPr>
-          <a:xfrm>
-            <a:off x="760000" y="1900000"/>
-            <a:ext cx="150000" cy="1600000"/>
-          </a:xfrm>
-          <a:prstGeom prst="rect">
-            <a:avLst/>
-          </a:prstGeom>
-          <a:solidFill>
-            <a:srgbClr val="F5670F"/>
-          </a:solidFill>
-          <a:ln>
-            <a:noFill/>
-          </a:ln>
-          <a:effectLst/>
-        </p:spPr>
-        <p:style>
-          <a:lnRef idx="1">
-            <a:schemeClr val="accent1"/>
-          </a:lnRef>
-          <a:fillRef idx="3">
-            <a:schemeClr val="accent1"/>
-          </a:fillRef>
-          <a:effectRef idx="2">
-            <a:schemeClr val="accent1"/>
-          </a:effectRef>
-          <a:fontRef idx="minor">
-            <a:schemeClr val="lt1"/>
-          </a:fontRef>
-        </p:style>
-        <p:txBody>
-          <a:bodyPr rtlCol="0" anchor="ctr"/>
-          <a:lstStyle/>
-          <a:p>
-            <a:pPr algn="ctr"/>
-          </a:p>
-        </p:txBody>
-      </p:sp>
-      <p:sp>
-        <p:nvSpPr>
-          <p:cNvPr id="7" name="TextBox 6"/>
+          <p:cNvPr id="12" name="TextBox 11"/>
           <p:cNvSpPr txBox="1"/>
           <p:nvPr/>
         </p:nvSpPr>
         <p:spPr>
           <a:xfrm>
-            <a:off x="1020000" y="2050000"/>
-            <a:ext cx="10500000" cy="1400000"/>
+            <a:off x="500000" y="6540000"/>
+            <a:ext cx="7000000" cy="300000"/>
           </a:xfrm>
           <a:prstGeom prst="rect">
             <a:avLst/>
@@ -9431,17 +9840,40 @@
               </a:spcAft>
             </a:pPr>
             <a:r>
-              <a:rPr sz="1700" b="1">
-                <a:solidFill>
-                  <a:srgbClr val="010328"/>
-                </a:solidFill>
-                <a:latin typeface="微软雅黑"/>
-              </a:rPr>
-              <a:t>主题: 能部署CPU预训练YOLO推理——应用：见工单s</a:t>
-            </a:r>
-          </a:p>
-          <a:p>
-            <a:pPr algn="l">
+              <a:rPr sz="1000" b="0">
+                <a:solidFill>
+                  <a:srgbClr val="8A97B5"/>
+                </a:solidFill>
+                <a:latin typeface="微软雅黑"/>
+              </a:rPr>
+              <a:t>两江智造集团 · AI应用基础48课时版</a:t>
+            </a:r>
+          </a:p>
+        </p:txBody>
+      </p:sp>
+      <p:sp>
+        <p:nvSpPr>
+          <p:cNvPr id="13" name="TextBox 12"/>
+          <p:cNvSpPr txBox="1"/>
+          <p:nvPr/>
+        </p:nvSpPr>
+        <p:spPr>
+          <a:xfrm>
+            <a:off x="10600000" y="6540000"/>
+            <a:ext cx="1000000" cy="300000"/>
+          </a:xfrm>
+          <a:prstGeom prst="rect">
+            <a:avLst/>
+          </a:prstGeom>
+          <a:noFill/>
+        </p:spPr>
+        <p:txBody>
+          <a:bodyPr wrap="square" anchor="t">
+            <a:spAutoFit/>
+          </a:bodyPr>
+          <a:lstStyle/>
+          <a:p>
+            <a:pPr algn="r">
               <a:lnSpc>
                 <a:spcPct val="110000"/>
               </a:lnSpc>
@@ -9450,27 +9882,165 @@
               </a:spcAft>
             </a:pPr>
             <a:r>
-              <a:rPr sz="1300" b="0">
-                <a:solidFill>
-                  <a:srgbClr val="44546A"/>
-                </a:solidFill>
-                <a:latin typeface="微软雅黑"/>
-              </a:rPr>
-              <a:t>预习快问: 课中查①：'内存爆'这个报错怎么排查？</a:t>
-            </a:r>
-          </a:p>
-        </p:txBody>
-      </p:sp>
-      <p:sp>
-        <p:nvSpPr>
-          <p:cNvPr id="8" name="TextBox 7"/>
+              <a:rPr sz="1000" b="0">
+                <a:solidFill>
+                  <a:srgbClr val="8A97B5"/>
+                </a:solidFill>
+                <a:latin typeface="微软雅黑"/>
+              </a:rPr>
+              <a:t>17 / 21</a:t>
+            </a:r>
+          </a:p>
+        </p:txBody>
+      </p:sp>
+      <p:sp>
+        <p:nvSpPr>
+          <p:cNvPr id="14" name="Rounded Rectangle 13"/>
+          <p:cNvSpPr/>
+          <p:nvPr/>
+        </p:nvSpPr>
+        <p:spPr>
+          <a:xfrm>
+            <a:off x="758952" y="1801368"/>
+            <a:ext cx="10899648" cy="2286000"/>
+          </a:xfrm>
+          <a:prstGeom prst="roundRect">
+            <a:avLst>
+              <a:gd name="adj" fmla="val 6000"/>
+            </a:avLst>
+          </a:prstGeom>
+          <a:solidFill>
+            <a:srgbClr val="F3F6FD"/>
+          </a:solidFill>
+          <a:ln w="9525">
+            <a:solidFill>
+              <a:srgbClr val="C9D4EE"/>
+            </a:solidFill>
+          </a:ln>
+          <a:effectLst/>
+        </p:spPr>
+        <p:style>
+          <a:lnRef idx="1">
+            <a:schemeClr val="accent1"/>
+          </a:lnRef>
+          <a:fillRef idx="3">
+            <a:schemeClr val="accent1"/>
+          </a:fillRef>
+          <a:effectRef idx="2">
+            <a:schemeClr val="accent1"/>
+          </a:effectRef>
+          <a:fontRef idx="minor">
+            <a:schemeClr val="lt1"/>
+          </a:fontRef>
+        </p:style>
+        <p:txBody>
+          <a:bodyPr rtlCol="0" anchor="ctr"/>
+          <a:lstStyle/>
+          <a:p/>
+        </p:txBody>
+      </p:sp>
+      <p:sp>
+        <p:nvSpPr>
+          <p:cNvPr id="15" name="Rounded Rectangle 14"/>
+          <p:cNvSpPr/>
+          <p:nvPr/>
+        </p:nvSpPr>
+        <p:spPr>
+          <a:xfrm>
+            <a:off x="758952" y="4178808"/>
+            <a:ext cx="10899648" cy="1051560"/>
+          </a:xfrm>
+          <a:prstGeom prst="roundRect">
+            <a:avLst>
+              <a:gd name="adj" fmla="val 6000"/>
+            </a:avLst>
+          </a:prstGeom>
+          <a:solidFill>
+            <a:srgbClr val="FFFFFF"/>
+          </a:solidFill>
+          <a:ln w="9525">
+            <a:solidFill>
+              <a:srgbClr val="C9D4EE"/>
+            </a:solidFill>
+          </a:ln>
+          <a:effectLst/>
+        </p:spPr>
+        <p:style>
+          <a:lnRef idx="1">
+            <a:schemeClr val="accent1"/>
+          </a:lnRef>
+          <a:fillRef idx="3">
+            <a:schemeClr val="accent1"/>
+          </a:fillRef>
+          <a:effectRef idx="2">
+            <a:schemeClr val="accent1"/>
+          </a:effectRef>
+          <a:fontRef idx="minor">
+            <a:schemeClr val="lt1"/>
+          </a:fontRef>
+        </p:style>
+        <p:txBody>
+          <a:bodyPr rtlCol="0" anchor="ctr"/>
+          <a:lstStyle/>
+          <a:p/>
+        </p:txBody>
+      </p:sp>
+      <p:sp>
+        <p:nvSpPr>
+          <p:cNvPr id="16" name="Rounded Rectangle 15"/>
+          <p:cNvSpPr/>
+          <p:nvPr/>
+        </p:nvSpPr>
+        <p:spPr>
+          <a:xfrm>
+            <a:off x="758952" y="5321808"/>
+            <a:ext cx="10899648" cy="1005840"/>
+          </a:xfrm>
+          <a:prstGeom prst="roundRect">
+            <a:avLst>
+              <a:gd name="adj" fmla="val 6000"/>
+            </a:avLst>
+          </a:prstGeom>
+          <a:solidFill>
+            <a:srgbClr val="FFFFFF"/>
+          </a:solidFill>
+          <a:ln w="9525">
+            <a:solidFill>
+              <a:srgbClr val="C9D4EE"/>
+            </a:solidFill>
+          </a:ln>
+          <a:effectLst/>
+        </p:spPr>
+        <p:style>
+          <a:lnRef idx="1">
+            <a:schemeClr val="accent1"/>
+          </a:lnRef>
+          <a:fillRef idx="3">
+            <a:schemeClr val="accent1"/>
+          </a:fillRef>
+          <a:effectRef idx="2">
+            <a:schemeClr val="accent1"/>
+          </a:effectRef>
+          <a:fontRef idx="minor">
+            <a:schemeClr val="lt1"/>
+          </a:fontRef>
+        </p:style>
+        <p:txBody>
+          <a:bodyPr rtlCol="0" anchor="ctr"/>
+          <a:lstStyle/>
+          <a:p/>
+        </p:txBody>
+      </p:sp>
+      <p:sp>
+        <p:nvSpPr>
+          <p:cNvPr id="17" name="TextBox 16"/>
           <p:cNvSpPr txBox="1"/>
           <p:nvPr/>
         </p:nvSpPr>
         <p:spPr>
           <a:xfrm>
-            <a:off x="760000" y="3900000"/>
-            <a:ext cx="10900000" cy="900000"/>
+            <a:off x="960120" y="1929384"/>
+            <a:ext cx="10469880" cy="2048256"/>
           </a:xfrm>
           <a:prstGeom prst="rect">
             <a:avLst/>
@@ -9478,46 +10048,237 @@
           <a:noFill/>
         </p:spPr>
         <p:txBody>
-          <a:bodyPr wrap="square" anchor="t">
+          <a:bodyPr wrap="square" anchor="t" lIns="0" rIns="0" tIns="0" bIns="0">
             <a:spAutoFit/>
           </a:bodyPr>
           <a:lstStyle/>
           <a:p>
+            <a:pPr algn="l"/>
+            <a:r>
+              <a:rPr sz="1400" b="1">
+                <a:solidFill>
+                  <a:srgbClr val="0545E8"/>
+                </a:solidFill>
+              </a:rPr>
+              <a:t>① 参考实现真实运行输出（本工单完成态）</a:t>
+            </a:r>
+          </a:p>
+          <a:p>
             <a:pPr algn="l">
-              <a:lnSpc>
-                <a:spcPct val="110000"/>
-              </a:lnSpc>
-              <a:spcAft>
-                <a:spcPts val="600"/>
-              </a:spcAft>
+              <a:spcBef>
+                <a:spcPts val="100"/>
+              </a:spcBef>
             </a:pPr>
             <a:r>
-              <a:rPr sz="1400" b="1">
+              <a:rPr sz="1000" b="0">
+                <a:solidFill>
+                  <a:srgbClr val="010328"/>
+                </a:solidFill>
+              </a:rPr>
+              <a:t>=== 工单 M3-1 ResNet迁移学习（概念版）· 完成态 ===</a:t>
+            </a:r>
+          </a:p>
+          <a:p>
+            <a:pPr algn="l">
+              <a:spcBef>
+                <a:spcPts val="100"/>
+              </a:spcBef>
+            </a:pPr>
+            <a:r>
+              <a:rPr sz="1000" b="0">
+                <a:solidFill>
+                  <a:srgbClr val="010328"/>
+                </a:solidFill>
+              </a:rPr>
+              <a:t>世界: 海量无标注 2000 条 / 少量标注 16 条 / 测试 200 条</a:t>
+            </a:r>
+          </a:p>
+          <a:p>
+            <a:pPr algn="l">
+              <a:spcBef>
+                <a:spcPts val="100"/>
+              </a:spcBef>
+            </a:pPr>
+            <a:r>
+              <a:rPr sz="1000" b="0">
+                <a:solidFill>
+                  <a:srgbClr val="010328"/>
+                </a:solidFill>
+              </a:rPr>
+              <a:t>预训练特征提取器: PCA(8维) 在海量数据上一次性学成并**冻结**</a:t>
+            </a:r>
+          </a:p>
+          <a:p>
+            <a:pPr algn="l">
+              <a:spcBef>
+                <a:spcPts val="100"/>
+              </a:spcBef>
+            </a:pPr>
+            <a:r>
+              <a:rPr sz="1000" b="0">
+                <a:solidFill>
+                  <a:srgbClr val="010328"/>
+                </a:solidFill>
+              </a:rPr>
+              <a:t>  冻结特征累计解释方差 = 0.330</a:t>
+            </a:r>
+          </a:p>
+          <a:p>
+            <a:pPr algn="l">
+              <a:spcBef>
+                <a:spcPts val="100"/>
+              </a:spcBef>
+            </a:pPr>
+            <a:r>
+              <a:rPr sz="1000" b="0">
+                <a:solidFill>
+                  <a:srgbClr val="010328"/>
+                </a:solidFill>
+              </a:rPr>
+              <a:t>对照（16条样本直连 192 维训头）: 测试准确率 = 0.915</a:t>
+            </a:r>
+          </a:p>
+          <a:p>
+            <a:pPr algn="l">
+              <a:spcBef>
+                <a:spcPts val="100"/>
+              </a:spcBef>
+            </a:pPr>
+            <a:r>
+              <a:rPr sz="1000" b="0">
+                <a:solidFill>
+                  <a:srgbClr val="010328"/>
+                </a:solidFill>
+              </a:rPr>
+              <a:t>迁移（冻结8维特征 + 只训分类头）: 测试准确率 = 0.960</a:t>
+            </a:r>
+          </a:p>
+          <a:p>
+            <a:pPr algn="l">
+              <a:spcBef>
+                <a:spcPts val="100"/>
+              </a:spcBef>
+            </a:pPr>
+            <a:r>
+              <a:rPr sz="1000" b="0">
+                <a:solidFill>
+                  <a:srgbClr val="010328"/>
+                </a:solidFill>
+              </a:rPr>
+              <a:t>增益 = +0.045 → 迁移显著胜出，预训练特征是维度灾难的解药</a:t>
+            </a:r>
+          </a:p>
+          <a:p>
+            <a:pPr algn="l">
+              <a:spcBef>
+                <a:spcPts val="100"/>
+              </a:spcBef>
+            </a:pPr>
+            <a:r>
+              <a:rPr sz="1000" b="0">
+                <a:solidFill>
+                  <a:srgbClr val="010328"/>
+                </a:solidFill>
+              </a:rPr>
+              <a:t>结论: 真实规律仅藏在少数测点维（其余为环境噪声维）；冻结+小样本头 是 ResNet 微调思想的最小可运行模型。</a:t>
+            </a:r>
+          </a:p>
+        </p:txBody>
+      </p:sp>
+      <p:sp>
+        <p:nvSpPr>
+          <p:cNvPr id="18" name="TextBox 17"/>
+          <p:cNvSpPr txBox="1"/>
+          <p:nvPr/>
+        </p:nvSpPr>
+        <p:spPr>
+          <a:xfrm>
+            <a:off x="960120" y="4297680"/>
+            <a:ext cx="10469880" cy="868680"/>
+          </a:xfrm>
+          <a:prstGeom prst="rect">
+            <a:avLst/>
+          </a:prstGeom>
+          <a:noFill/>
+        </p:spPr>
+        <p:txBody>
+          <a:bodyPr wrap="square" anchor="t" lIns="0" rIns="0" tIns="0" bIns="0">
+            <a:spAutoFit/>
+          </a:bodyPr>
+          <a:lstStyle/>
+          <a:p>
+            <a:pPr algn="l"/>
+            <a:r>
+              <a:rPr sz="1300" b="1">
                 <a:solidFill>
                   <a:srgbClr val="0545E8"/>
                 </a:solidFill>
-                <a:latin typeface="微软雅黑"/>
-              </a:rPr>
-              <a:t>课前完成：导学单 + 预习自测 + starter环境自检</a:t>
+              </a:rPr>
+              <a:t>② 关键自检点（对照工单逐项核对）</a:t>
             </a:r>
           </a:p>
           <a:p>
             <a:pPr algn="l">
-              <a:lnSpc>
-                <a:spcPct val="110000"/>
-              </a:lnSpc>
-              <a:spcAft>
-                <a:spcPts val="600"/>
-              </a:spcAft>
+              <a:spcBef>
+                <a:spcPts val="200"/>
+              </a:spcBef>
             </a:pPr>
             <a:r>
-              <a:rPr sz="1250" b="0">
-                <a:solidFill>
-                  <a:srgbClr val="44546A"/>
-                </a:solidFill>
-                <a:latin typeface="微软雅黑"/>
-              </a:rPr>
-              <a:t>带着问题来上课——Predict先于Run</a:t>
+              <a:rPr sz="1150" b="0">
+                <a:solidFill>
+                  <a:srgbClr val="010328"/>
+                </a:solidFill>
+              </a:rPr>
+              <a:t>□ 代码从头跑到尾不报错　□ 指标与工单及格线逐项对齐　□ 随机种子已固定（可复现）</a:t>
+            </a:r>
+          </a:p>
+        </p:txBody>
+      </p:sp>
+      <p:sp>
+        <p:nvSpPr>
+          <p:cNvPr id="19" name="TextBox 18"/>
+          <p:cNvSpPr txBox="1"/>
+          <p:nvPr/>
+        </p:nvSpPr>
+        <p:spPr>
+          <a:xfrm>
+            <a:off x="960120" y="5431536"/>
+            <a:ext cx="10469880" cy="841248"/>
+          </a:xfrm>
+          <a:prstGeom prst="rect">
+            <a:avLst/>
+          </a:prstGeom>
+          <a:noFill/>
+        </p:spPr>
+        <p:txBody>
+          <a:bodyPr wrap="square" anchor="t" lIns="0" rIns="0" tIns="0" bIns="0">
+            <a:spAutoFit/>
+          </a:bodyPr>
+          <a:lstStyle/>
+          <a:p>
+            <a:pPr algn="l"/>
+            <a:r>
+              <a:rPr sz="1300" b="1">
+                <a:solidFill>
+                  <a:srgbClr val="F5670F"/>
+                </a:solidFill>
+              </a:rPr>
+              <a:t>③ 提交与达标（过程性证据）</a:t>
+            </a:r>
+          </a:p>
+          <a:p>
+            <a:pPr algn="l">
+              <a:spcBef>
+                <a:spcPts val="200"/>
+              </a:spcBef>
+            </a:pPr>
+            <a:r>
+              <a:rPr sz="1100" b="0">
+                <a:solidFill>
+                  <a:srgbClr val="010328"/>
+                </a:solidFill>
+              </a:rPr>
+              <a:t>达标线 D≥60 / C≥70 / B≥80 / A≥90　｜　提交 学号_姓名_工单号 + 运行截图 + 决策记录 + Git≥1次commit</a:t>
             </a:r>
           </a:p>
         </p:txBody>
@@ -9542,14 +10303,102 @@
       <p:grpSpPr/>
       <p:sp>
         <p:nvSpPr>
-          <p:cNvPr id="2" name="TextBox 1"/>
+          <p:cNvPr id="2" name="Rectangle 1"/>
+          <p:cNvSpPr/>
+          <p:nvPr/>
+        </p:nvSpPr>
+        <p:spPr>
+          <a:xfrm>
+            <a:off x="0" y="0"/>
+            <a:ext cx="12192000" cy="6858000"/>
+          </a:xfrm>
+          <a:prstGeom prst="rect">
+            <a:avLst/>
+          </a:prstGeom>
+          <a:solidFill>
+            <a:srgbClr val="010328"/>
+          </a:solidFill>
+          <a:ln>
+            <a:noFill/>
+          </a:ln>
+          <a:effectLst/>
+        </p:spPr>
+        <p:style>
+          <a:lnRef idx="1">
+            <a:schemeClr val="accent1"/>
+          </a:lnRef>
+          <a:fillRef idx="3">
+            <a:schemeClr val="accent1"/>
+          </a:fillRef>
+          <a:effectRef idx="2">
+            <a:schemeClr val="accent1"/>
+          </a:effectRef>
+          <a:fontRef idx="minor">
+            <a:schemeClr val="lt1"/>
+          </a:fontRef>
+        </p:style>
+        <p:txBody>
+          <a:bodyPr rtlCol="0" anchor="ctr"/>
+          <a:lstStyle/>
+          <a:p>
+            <a:pPr algn="ctr"/>
+          </a:p>
+        </p:txBody>
+      </p:sp>
+      <p:sp>
+        <p:nvSpPr>
+          <p:cNvPr id="3" name="Rectangle 2"/>
+          <p:cNvSpPr/>
+          <p:nvPr/>
+        </p:nvSpPr>
+        <p:spPr>
+          <a:xfrm>
+            <a:off x="0" y="2880360"/>
+            <a:ext cx="12192000" cy="50000"/>
+          </a:xfrm>
+          <a:prstGeom prst="rect">
+            <a:avLst/>
+          </a:prstGeom>
+          <a:solidFill>
+            <a:srgbClr val="F5670F"/>
+          </a:solidFill>
+          <a:ln>
+            <a:noFill/>
+          </a:ln>
+          <a:effectLst/>
+        </p:spPr>
+        <p:style>
+          <a:lnRef idx="1">
+            <a:schemeClr val="accent1"/>
+          </a:lnRef>
+          <a:fillRef idx="3">
+            <a:schemeClr val="accent1"/>
+          </a:fillRef>
+          <a:effectRef idx="2">
+            <a:schemeClr val="accent1"/>
+          </a:effectRef>
+          <a:fontRef idx="minor">
+            <a:schemeClr val="lt1"/>
+          </a:fontRef>
+        </p:style>
+        <p:txBody>
+          <a:bodyPr rtlCol="0" anchor="ctr"/>
+          <a:lstStyle/>
+          <a:p>
+            <a:pPr algn="ctr"/>
+          </a:p>
+        </p:txBody>
+      </p:sp>
+      <p:sp>
+        <p:nvSpPr>
+          <p:cNvPr id="4" name="TextBox 3"/>
           <p:cNvSpPr txBox="1"/>
           <p:nvPr/>
         </p:nvSpPr>
         <p:spPr>
           <a:xfrm>
-            <a:off x="548640" y="320040"/>
-            <a:ext cx="11094720" cy="914400"/>
+            <a:off x="0" y="1645920"/>
+            <a:ext cx="12192000" cy="1500000"/>
           </a:xfrm>
           <a:prstGeom prst="rect">
             <a:avLst/>
@@ -9557,28 +10406,41 @@
           <a:noFill/>
         </p:spPr>
         <p:txBody>
-          <a:bodyPr wrap="none">
+          <a:bodyPr wrap="square" anchor="t">
             <a:spAutoFit/>
           </a:bodyPr>
           <a:lstStyle/>
           <a:p>
-            <a:r>
-              <a:rPr sz="3000" b="1"/>
-              <a:t>本任务六步法导航</a:t>
-            </a:r>
-          </a:p>
-        </p:txBody>
-      </p:sp>
-      <p:sp>
-        <p:nvSpPr>
-          <p:cNvPr id="3" name="TextBox 2"/>
+            <a:pPr algn="ctr">
+              <a:lnSpc>
+                <a:spcPct val="110000"/>
+              </a:lnSpc>
+              <a:spcAft>
+                <a:spcPts val="600"/>
+              </a:spcAft>
+            </a:pPr>
+            <a:r>
+              <a:rPr sz="5400" b="1">
+                <a:solidFill>
+                  <a:srgbClr val="FFFFFF"/>
+                </a:solidFill>
+                <a:latin typeface="微软雅黑"/>
+              </a:rPr>
+              <a:t>THANKS</a:t>
+            </a:r>
+          </a:p>
+        </p:txBody>
+      </p:sp>
+      <p:sp>
+        <p:nvSpPr>
+          <p:cNvPr id="5" name="TextBox 4"/>
           <p:cNvSpPr txBox="1"/>
           <p:nvPr/>
         </p:nvSpPr>
         <p:spPr>
           <a:xfrm>
-            <a:off x="731520" y="1371600"/>
-            <a:ext cx="10728960" cy="4663440"/>
+            <a:off x="0" y="3429000"/>
+            <a:ext cx="12192000" cy="800000"/>
           </a:xfrm>
           <a:prstGeom prst="rect">
             <a:avLst/>
@@ -9586,52 +10448,197 @@
           <a:noFill/>
         </p:spPr>
         <p:txBody>
-          <a:bodyPr wrap="square">
+          <a:bodyPr wrap="square" anchor="t">
             <a:spAutoFit/>
           </a:bodyPr>
           <a:lstStyle/>
           <a:p>
-            <a:pPr>
+            <a:pPr algn="ctr">
+              <a:lnSpc>
+                <a:spcPct val="110000"/>
+              </a:lnSpc>
               <a:spcAft>
-                <a:spcPts val="1000"/>
+                <a:spcPts val="600"/>
               </a:spcAft>
             </a:pPr>
             <a:r>
-              <a:rPr sz="1800"/>
-              <a:t>六步法：资讯 → 计划 → 决策 → 实施 → 检查 → 评估</a:t>
-            </a:r>
-          </a:p>
-          <a:p>
-            <a:pPr>
+              <a:rPr sz="2200" b="1">
+                <a:solidFill>
+                  <a:srgbClr val="F5670F"/>
+                </a:solidFill>
+                <a:latin typeface="微软雅黑"/>
+              </a:rPr>
+              <a:t>感谢聆听 · 动手实践出真知</a:t>
+            </a:r>
+          </a:p>
+        </p:txBody>
+      </p:sp>
+      <p:sp>
+        <p:nvSpPr>
+          <p:cNvPr id="6" name="TextBox 5"/>
+          <p:cNvSpPr txBox="1"/>
+          <p:nvPr/>
+        </p:nvSpPr>
+        <p:spPr>
+          <a:xfrm>
+            <a:off x="0" y="4526280"/>
+            <a:ext cx="12192000" cy="600000"/>
+          </a:xfrm>
+          <a:prstGeom prst="rect">
+            <a:avLst/>
+          </a:prstGeom>
+          <a:noFill/>
+        </p:spPr>
+        <p:txBody>
+          <a:bodyPr wrap="square" anchor="t">
+            <a:spAutoFit/>
+          </a:bodyPr>
+          <a:lstStyle/>
+          <a:p>
+            <a:pPr algn="ctr">
+              <a:lnSpc>
+                <a:spcPct val="110000"/>
+              </a:lnSpc>
               <a:spcAft>
-                <a:spcPts val="1000"/>
+                <a:spcPts val="600"/>
               </a:spcAft>
             </a:pPr>
             <a:r>
-              <a:rPr sz="1800"/>
-              <a:t>本讲对应工单：《AI应用基础48课时版》分层任务工单</a:t>
-            </a:r>
-          </a:p>
-          <a:p>
-            <a:pPr>
+              <a:rPr sz="1400" b="0">
+                <a:solidFill>
+                  <a:srgbClr val="BBC6E6"/>
+                </a:solidFill>
+                <a:latin typeface="微软雅黑"/>
+              </a:rPr>
+              <a:t>以生为本   |   做中学 · 学中做</a:t>
+            </a:r>
+          </a:p>
+        </p:txBody>
+      </p:sp>
+      <p:sp>
+        <p:nvSpPr>
+          <p:cNvPr id="7" name="Rectangle 6"/>
+          <p:cNvSpPr/>
+          <p:nvPr/>
+        </p:nvSpPr>
+        <p:spPr>
+          <a:xfrm>
+            <a:off x="500000" y="6500000"/>
+            <a:ext cx="11100000" cy="20000"/>
+          </a:xfrm>
+          <a:prstGeom prst="rect">
+            <a:avLst/>
+          </a:prstGeom>
+          <a:solidFill>
+            <a:srgbClr val="C9D4EE"/>
+          </a:solidFill>
+          <a:ln>
+            <a:noFill/>
+          </a:ln>
+          <a:effectLst/>
+        </p:spPr>
+        <p:style>
+          <a:lnRef idx="1">
+            <a:schemeClr val="accent1"/>
+          </a:lnRef>
+          <a:fillRef idx="3">
+            <a:schemeClr val="accent1"/>
+          </a:fillRef>
+          <a:effectRef idx="2">
+            <a:schemeClr val="accent1"/>
+          </a:effectRef>
+          <a:fontRef idx="minor">
+            <a:schemeClr val="lt1"/>
+          </a:fontRef>
+        </p:style>
+        <p:txBody>
+          <a:bodyPr rtlCol="0" anchor="ctr"/>
+          <a:lstStyle/>
+          <a:p>
+            <a:pPr algn="ctr"/>
+          </a:p>
+        </p:txBody>
+      </p:sp>
+      <p:sp>
+        <p:nvSpPr>
+          <p:cNvPr id="8" name="TextBox 7"/>
+          <p:cNvSpPr txBox="1"/>
+          <p:nvPr/>
+        </p:nvSpPr>
+        <p:spPr>
+          <a:xfrm>
+            <a:off x="500000" y="6540000"/>
+            <a:ext cx="7000000" cy="300000"/>
+          </a:xfrm>
+          <a:prstGeom prst="rect">
+            <a:avLst/>
+          </a:prstGeom>
+          <a:noFill/>
+        </p:spPr>
+        <p:txBody>
+          <a:bodyPr wrap="square" anchor="t">
+            <a:spAutoFit/>
+          </a:bodyPr>
+          <a:lstStyle/>
+          <a:p>
+            <a:pPr algn="l">
+              <a:lnSpc>
+                <a:spcPct val="110000"/>
+              </a:lnSpc>
               <a:spcAft>
-                <a:spcPts val="1000"/>
+                <a:spcPts val="600"/>
               </a:spcAft>
             </a:pPr>
             <a:r>
-              <a:rPr sz="1800"/>
-              <a:t>课堂产出：工单第六节实施记录须当堂填写，含操作前安全打勾与学生本人签字。</a:t>
-            </a:r>
-          </a:p>
-          <a:p>
-            <a:pPr>
+              <a:rPr sz="1000" b="0">
+                <a:solidFill>
+                  <a:srgbClr val="8A97B5"/>
+                </a:solidFill>
+                <a:latin typeface="微软雅黑"/>
+              </a:rPr>
+              <a:t>两江智造集团 · AI应用基础48课时版</a:t>
+            </a:r>
+          </a:p>
+        </p:txBody>
+      </p:sp>
+      <p:sp>
+        <p:nvSpPr>
+          <p:cNvPr id="9" name="TextBox 8"/>
+          <p:cNvSpPr txBox="1"/>
+          <p:nvPr/>
+        </p:nvSpPr>
+        <p:spPr>
+          <a:xfrm>
+            <a:off x="10600000" y="6540000"/>
+            <a:ext cx="1000000" cy="300000"/>
+          </a:xfrm>
+          <a:prstGeom prst="rect">
+            <a:avLst/>
+          </a:prstGeom>
+          <a:noFill/>
+        </p:spPr>
+        <p:txBody>
+          <a:bodyPr wrap="square" anchor="ctr">
+            <a:spAutoFit/>
+          </a:bodyPr>
+          <a:lstStyle/>
+          <a:p>
+            <a:pPr algn="r">
+              <a:lnSpc>
+                <a:spcPct val="110000"/>
+              </a:lnSpc>
               <a:spcAft>
-                <a:spcPts val="1000"/>
+                <a:spcPts val="600"/>
               </a:spcAft>
             </a:pPr>
             <a:r>
-              <a:rPr sz="1800"/>
-              <a:t>课后交付：班组长／操作员／教师三方联签后交回，缺签视为未交付。</a:t>
+              <a:rPr sz="1000" b="0">
+                <a:solidFill>
+                  <a:srgbClr val="8A97B5"/>
+                </a:solidFill>
+                <a:latin typeface="微软雅黑"/>
+              </a:rPr>
+              <a:t>18 / 21</a:t>
             </a:r>
           </a:p>
         </p:txBody>
@@ -9656,14 +10663,102 @@
       <p:grpSpPr/>
       <p:sp>
         <p:nvSpPr>
-          <p:cNvPr id="2" name="TextBox 1"/>
+          <p:cNvPr id="2" name="Rectangle 1"/>
+          <p:cNvSpPr/>
+          <p:nvPr/>
+        </p:nvSpPr>
+        <p:spPr>
+          <a:xfrm>
+            <a:off x="0" y="0"/>
+            <a:ext cx="12192000" cy="1150000"/>
+          </a:xfrm>
+          <a:prstGeom prst="rect">
+            <a:avLst/>
+          </a:prstGeom>
+          <a:solidFill>
+            <a:srgbClr val="010328"/>
+          </a:solidFill>
+          <a:ln>
+            <a:noFill/>
+          </a:ln>
+          <a:effectLst/>
+        </p:spPr>
+        <p:style>
+          <a:lnRef idx="1">
+            <a:schemeClr val="accent1"/>
+          </a:lnRef>
+          <a:fillRef idx="3">
+            <a:schemeClr val="accent1"/>
+          </a:fillRef>
+          <a:effectRef idx="2">
+            <a:schemeClr val="accent1"/>
+          </a:effectRef>
+          <a:fontRef idx="minor">
+            <a:schemeClr val="lt1"/>
+          </a:fontRef>
+        </p:style>
+        <p:txBody>
+          <a:bodyPr rtlCol="0" anchor="ctr"/>
+          <a:lstStyle/>
+          <a:p>
+            <a:pPr algn="ctr"/>
+          </a:p>
+        </p:txBody>
+      </p:sp>
+      <p:sp>
+        <p:nvSpPr>
+          <p:cNvPr id="3" name="Rectangle 2"/>
+          <p:cNvSpPr/>
+          <p:nvPr/>
+        </p:nvSpPr>
+        <p:spPr>
+          <a:xfrm>
+            <a:off x="0" y="1150000"/>
+            <a:ext cx="2600000" cy="70000"/>
+          </a:xfrm>
+          <a:prstGeom prst="rect">
+            <a:avLst/>
+          </a:prstGeom>
+          <a:solidFill>
+            <a:srgbClr val="F5670F"/>
+          </a:solidFill>
+          <a:ln>
+            <a:noFill/>
+          </a:ln>
+          <a:effectLst/>
+        </p:spPr>
+        <p:style>
+          <a:lnRef idx="1">
+            <a:schemeClr val="accent1"/>
+          </a:lnRef>
+          <a:fillRef idx="3">
+            <a:schemeClr val="accent1"/>
+          </a:fillRef>
+          <a:effectRef idx="2">
+            <a:schemeClr val="accent1"/>
+          </a:effectRef>
+          <a:fontRef idx="minor">
+            <a:schemeClr val="lt1"/>
+          </a:fontRef>
+        </p:style>
+        <p:txBody>
+          <a:bodyPr rtlCol="0" anchor="ctr"/>
+          <a:lstStyle/>
+          <a:p>
+            <a:pPr algn="ctr"/>
+          </a:p>
+        </p:txBody>
+      </p:sp>
+      <p:sp>
+        <p:nvSpPr>
+          <p:cNvPr id="4" name="TextBox 3"/>
           <p:cNvSpPr txBox="1"/>
           <p:nvPr/>
         </p:nvSpPr>
         <p:spPr>
           <a:xfrm>
-            <a:off x="548640" y="320040"/>
-            <a:ext cx="11094720" cy="914400"/>
+            <a:off x="700000" y="300000"/>
+            <a:ext cx="10792000" cy="700000"/>
           </a:xfrm>
           <a:prstGeom prst="rect">
             <a:avLst/>
@@ -9671,28 +10766,129 @@
           <a:noFill/>
         </p:spPr>
         <p:txBody>
-          <a:bodyPr wrap="none">
+          <a:bodyPr wrap="square" anchor="t">
             <a:spAutoFit/>
           </a:bodyPr>
           <a:lstStyle/>
           <a:p>
-            <a:r>
-              <a:rPr sz="3000" b="1"/>
-              <a:t>本讲与岗位任务单的衔接</a:t>
-            </a:r>
-          </a:p>
-        </p:txBody>
-      </p:sp>
-      <p:sp>
-        <p:nvSpPr>
-          <p:cNvPr id="3" name="TextBox 2"/>
+            <a:pPr algn="l">
+              <a:lnSpc>
+                <a:spcPct val="110000"/>
+              </a:lnSpc>
+              <a:spcAft>
+                <a:spcPts val="600"/>
+              </a:spcAft>
+            </a:pPr>
+            <a:r>
+              <a:rPr sz="2400" b="1">
+                <a:solidFill>
+                  <a:srgbClr val="FFFFFF"/>
+                </a:solidFill>
+                <a:latin typeface="微软雅黑"/>
+              </a:rPr>
+              <a:t>下次课预告（第16周）</a:t>
+            </a:r>
+          </a:p>
+        </p:txBody>
+      </p:sp>
+      <p:sp>
+        <p:nvSpPr>
+          <p:cNvPr id="5" name="Rectangle 4"/>
+          <p:cNvSpPr/>
+          <p:nvPr/>
+        </p:nvSpPr>
+        <p:spPr>
+          <a:xfrm>
+            <a:off x="760000" y="1900000"/>
+            <a:ext cx="10900000" cy="1600000"/>
+          </a:xfrm>
+          <a:prstGeom prst="rect">
+            <a:avLst/>
+          </a:prstGeom>
+          <a:solidFill>
+            <a:srgbClr val="F3F6FD"/>
+          </a:solidFill>
+          <a:ln>
+            <a:noFill/>
+          </a:ln>
+          <a:effectLst/>
+        </p:spPr>
+        <p:style>
+          <a:lnRef idx="1">
+            <a:schemeClr val="accent1"/>
+          </a:lnRef>
+          <a:fillRef idx="3">
+            <a:schemeClr val="accent1"/>
+          </a:fillRef>
+          <a:effectRef idx="2">
+            <a:schemeClr val="accent1"/>
+          </a:effectRef>
+          <a:fontRef idx="minor">
+            <a:schemeClr val="lt1"/>
+          </a:fontRef>
+        </p:style>
+        <p:txBody>
+          <a:bodyPr rtlCol="0" anchor="ctr"/>
+          <a:lstStyle/>
+          <a:p>
+            <a:pPr algn="ctr"/>
+          </a:p>
+        </p:txBody>
+      </p:sp>
+      <p:sp>
+        <p:nvSpPr>
+          <p:cNvPr id="6" name="Rectangle 5"/>
+          <p:cNvSpPr/>
+          <p:nvPr/>
+        </p:nvSpPr>
+        <p:spPr>
+          <a:xfrm>
+            <a:off x="760000" y="1900000"/>
+            <a:ext cx="150000" cy="1600000"/>
+          </a:xfrm>
+          <a:prstGeom prst="rect">
+            <a:avLst/>
+          </a:prstGeom>
+          <a:solidFill>
+            <a:srgbClr val="F5670F"/>
+          </a:solidFill>
+          <a:ln>
+            <a:noFill/>
+          </a:ln>
+          <a:effectLst/>
+        </p:spPr>
+        <p:style>
+          <a:lnRef idx="1">
+            <a:schemeClr val="accent1"/>
+          </a:lnRef>
+          <a:fillRef idx="3">
+            <a:schemeClr val="accent1"/>
+          </a:fillRef>
+          <a:effectRef idx="2">
+            <a:schemeClr val="accent1"/>
+          </a:effectRef>
+          <a:fontRef idx="minor">
+            <a:schemeClr val="lt1"/>
+          </a:fontRef>
+        </p:style>
+        <p:txBody>
+          <a:bodyPr rtlCol="0" anchor="ctr"/>
+          <a:lstStyle/>
+          <a:p>
+            <a:pPr algn="ctr"/>
+          </a:p>
+        </p:txBody>
+      </p:sp>
+      <p:sp>
+        <p:nvSpPr>
+          <p:cNvPr id="7" name="TextBox 6"/>
           <p:cNvSpPr txBox="1"/>
           <p:nvPr/>
         </p:nvSpPr>
         <p:spPr>
           <a:xfrm>
-            <a:off x="731520" y="1371600"/>
-            <a:ext cx="10728960" cy="4663440"/>
+            <a:off x="1020000" y="2050000"/>
+            <a:ext cx="10500000" cy="1400000"/>
           </a:xfrm>
           <a:prstGeom prst="rect">
             <a:avLst/>
@@ -9700,52 +10896,107 @@
           <a:noFill/>
         </p:spPr>
         <p:txBody>
-          <a:bodyPr wrap="square">
+          <a:bodyPr wrap="square" anchor="t">
             <a:spAutoFit/>
           </a:bodyPr>
           <a:lstStyle/>
           <a:p>
-            <a:pPr>
+            <a:pPr algn="l">
+              <a:lnSpc>
+                <a:spcPct val="110000"/>
+              </a:lnSpc>
               <a:spcAft>
-                <a:spcPts val="1000"/>
+                <a:spcPts val="600"/>
               </a:spcAft>
             </a:pPr>
             <a:r>
-              <a:rPr sz="1800"/>
-              <a:t>本讲在工作过程系统化课程中承担的任务环节：任务实施</a:t>
-            </a:r>
-          </a:p>
-          <a:p>
-            <a:pPr>
+              <a:rPr sz="1700" b="1">
+                <a:solidFill>
+                  <a:srgbClr val="010328"/>
+                </a:solidFill>
+                <a:latin typeface="微软雅黑"/>
+              </a:rPr>
+              <a:t>主题: 能部署CPU预训练YOLO推理——应用：见工单s</a:t>
+            </a:r>
+          </a:p>
+          <a:p>
+            <a:pPr algn="l">
+              <a:lnSpc>
+                <a:spcPct val="110000"/>
+              </a:lnSpc>
               <a:spcAft>
-                <a:spcPts val="1000"/>
+                <a:spcPts val="600"/>
               </a:spcAft>
             </a:pPr>
             <a:r>
-              <a:rPr sz="1800"/>
-              <a:t>考核对齐：过程性成绩取自本讲工单第六节各模块得分合计（满分 100）。</a:t>
-            </a:r>
-          </a:p>
-          <a:p>
-            <a:pPr>
+              <a:rPr sz="1300" b="0">
+                <a:solidFill>
+                  <a:srgbClr val="44546A"/>
+                </a:solidFill>
+                <a:latin typeface="微软雅黑"/>
+              </a:rPr>
+              <a:t>预习快问: 课中查①：'内存爆'这个报错怎么排查？</a:t>
+            </a:r>
+          </a:p>
+        </p:txBody>
+      </p:sp>
+      <p:sp>
+        <p:nvSpPr>
+          <p:cNvPr id="8" name="TextBox 7"/>
+          <p:cNvSpPr txBox="1"/>
+          <p:nvPr/>
+        </p:nvSpPr>
+        <p:spPr>
+          <a:xfrm>
+            <a:off x="760000" y="3900000"/>
+            <a:ext cx="10900000" cy="900000"/>
+          </a:xfrm>
+          <a:prstGeom prst="rect">
+            <a:avLst/>
+          </a:prstGeom>
+          <a:noFill/>
+        </p:spPr>
+        <p:txBody>
+          <a:bodyPr wrap="square" anchor="t">
+            <a:spAutoFit/>
+          </a:bodyPr>
+          <a:lstStyle/>
+          <a:p>
+            <a:pPr algn="l">
+              <a:lnSpc>
+                <a:spcPct val="110000"/>
+              </a:lnSpc>
               <a:spcAft>
-                <a:spcPts val="1000"/>
+                <a:spcPts val="600"/>
               </a:spcAft>
             </a:pPr>
             <a:r>
-              <a:rPr sz="1800"/>
-              <a:t>达标线：综合成绩≥60 分，且无安全红线一票否决记录</a:t>
-            </a:r>
-          </a:p>
-          <a:p>
-            <a:pPr>
+              <a:rPr sz="1400" b="1">
+                <a:solidFill>
+                  <a:srgbClr val="0545E8"/>
+                </a:solidFill>
+                <a:latin typeface="微软雅黑"/>
+              </a:rPr>
+              <a:t>课前完成：导学单 + 预习自测 + starter环境自检</a:t>
+            </a:r>
+          </a:p>
+          <a:p>
+            <a:pPr algn="l">
+              <a:lnSpc>
+                <a:spcPct val="110000"/>
+              </a:lnSpc>
               <a:spcAft>
-                <a:spcPts val="1000"/>
+                <a:spcPts val="600"/>
               </a:spcAft>
             </a:pPr>
             <a:r>
-              <a:rPr sz="1800"/>
-              <a:t>无效工单判定：未打安全勾、无本人签字、无三方联签。</a:t>
+              <a:rPr sz="1250" b="0">
+                <a:solidFill>
+                  <a:srgbClr val="44546A"/>
+                </a:solidFill>
+                <a:latin typeface="微软雅黑"/>
+              </a:rPr>
+              <a:t>带着问题来上课——Predict先于Run</a:t>
             </a:r>
           </a:p>
         </p:txBody>
@@ -9889,6 +11140,234 @@
 </p:sld>
 </file>
 
+<file path=ppt/slides/slide20.xml><?xml version="1.0" encoding="utf-8"?>
+<p:sld xmlns:a="http://schemas.openxmlformats.org/drawingml/2006/main" xmlns:p="http://schemas.openxmlformats.org/presentationml/2006/main" xmlns:r="http://schemas.openxmlformats.org/officeDocument/2006/relationships">
+  <p:cSld>
+    <p:spTree>
+      <p:nvGrpSpPr>
+        <p:cNvPr id="1" name=""/>
+        <p:cNvGrpSpPr/>
+        <p:nvPr/>
+      </p:nvGrpSpPr>
+      <p:grpSpPr/>
+      <p:sp>
+        <p:nvSpPr>
+          <p:cNvPr id="2" name="TextBox 1"/>
+          <p:cNvSpPr txBox="1"/>
+          <p:nvPr/>
+        </p:nvSpPr>
+        <p:spPr>
+          <a:xfrm>
+            <a:off x="548640" y="320040"/>
+            <a:ext cx="11094720" cy="914400"/>
+          </a:xfrm>
+          <a:prstGeom prst="rect">
+            <a:avLst/>
+          </a:prstGeom>
+          <a:noFill/>
+        </p:spPr>
+        <p:txBody>
+          <a:bodyPr wrap="none">
+            <a:spAutoFit/>
+          </a:bodyPr>
+          <a:lstStyle/>
+          <a:p>
+            <a:r>
+              <a:rPr sz="3000" b="1"/>
+              <a:t>本任务六步法导航</a:t>
+            </a:r>
+          </a:p>
+        </p:txBody>
+      </p:sp>
+      <p:sp>
+        <p:nvSpPr>
+          <p:cNvPr id="3" name="TextBox 2"/>
+          <p:cNvSpPr txBox="1"/>
+          <p:nvPr/>
+        </p:nvSpPr>
+        <p:spPr>
+          <a:xfrm>
+            <a:off x="731520" y="1371600"/>
+            <a:ext cx="10728960" cy="4663440"/>
+          </a:xfrm>
+          <a:prstGeom prst="rect">
+            <a:avLst/>
+          </a:prstGeom>
+          <a:noFill/>
+        </p:spPr>
+        <p:txBody>
+          <a:bodyPr wrap="square">
+            <a:spAutoFit/>
+          </a:bodyPr>
+          <a:lstStyle/>
+          <a:p>
+            <a:pPr>
+              <a:spcAft>
+                <a:spcPts val="1000"/>
+              </a:spcAft>
+            </a:pPr>
+            <a:r>
+              <a:rPr sz="1800"/>
+              <a:t>六步法：资讯 → 计划 → 决策 → 实施 → 检查 → 评估</a:t>
+            </a:r>
+          </a:p>
+          <a:p>
+            <a:pPr>
+              <a:spcAft>
+                <a:spcPts val="1000"/>
+              </a:spcAft>
+            </a:pPr>
+            <a:r>
+              <a:rPr sz="1800"/>
+              <a:t>本讲对应工单：《AI应用基础48课时版》分层任务工单</a:t>
+            </a:r>
+          </a:p>
+          <a:p>
+            <a:pPr>
+              <a:spcAft>
+                <a:spcPts val="1000"/>
+              </a:spcAft>
+            </a:pPr>
+            <a:r>
+              <a:rPr sz="1800"/>
+              <a:t>课堂产出：工单第六节实施记录须当堂填写，含操作前安全打勾与学生本人签字。</a:t>
+            </a:r>
+          </a:p>
+          <a:p>
+            <a:pPr>
+              <a:spcAft>
+                <a:spcPts val="1000"/>
+              </a:spcAft>
+            </a:pPr>
+            <a:r>
+              <a:rPr sz="1800"/>
+              <a:t>课后交付：班组长／操作员／教师三方联签后交回，缺签视为未交付。</a:t>
+            </a:r>
+          </a:p>
+        </p:txBody>
+      </p:sp>
+    </p:spTree>
+  </p:cSld>
+  <p:clrMapOvr>
+    <a:masterClrMapping/>
+  </p:clrMapOvr>
+</p:sld>
+</file>
+
+<file path=ppt/slides/slide21.xml><?xml version="1.0" encoding="utf-8"?>
+<p:sld xmlns:a="http://schemas.openxmlformats.org/drawingml/2006/main" xmlns:p="http://schemas.openxmlformats.org/presentationml/2006/main" xmlns:r="http://schemas.openxmlformats.org/officeDocument/2006/relationships">
+  <p:cSld>
+    <p:spTree>
+      <p:nvGrpSpPr>
+        <p:cNvPr id="1" name=""/>
+        <p:cNvGrpSpPr/>
+        <p:nvPr/>
+      </p:nvGrpSpPr>
+      <p:grpSpPr/>
+      <p:sp>
+        <p:nvSpPr>
+          <p:cNvPr id="2" name="TextBox 1"/>
+          <p:cNvSpPr txBox="1"/>
+          <p:nvPr/>
+        </p:nvSpPr>
+        <p:spPr>
+          <a:xfrm>
+            <a:off x="548640" y="320040"/>
+            <a:ext cx="11094720" cy="914400"/>
+          </a:xfrm>
+          <a:prstGeom prst="rect">
+            <a:avLst/>
+          </a:prstGeom>
+          <a:noFill/>
+        </p:spPr>
+        <p:txBody>
+          <a:bodyPr wrap="none">
+            <a:spAutoFit/>
+          </a:bodyPr>
+          <a:lstStyle/>
+          <a:p>
+            <a:r>
+              <a:rPr sz="3000" b="1"/>
+              <a:t>本讲与岗位任务单的衔接</a:t>
+            </a:r>
+          </a:p>
+        </p:txBody>
+      </p:sp>
+      <p:sp>
+        <p:nvSpPr>
+          <p:cNvPr id="3" name="TextBox 2"/>
+          <p:cNvSpPr txBox="1"/>
+          <p:nvPr/>
+        </p:nvSpPr>
+        <p:spPr>
+          <a:xfrm>
+            <a:off x="731520" y="1371600"/>
+            <a:ext cx="10728960" cy="4663440"/>
+          </a:xfrm>
+          <a:prstGeom prst="rect">
+            <a:avLst/>
+          </a:prstGeom>
+          <a:noFill/>
+        </p:spPr>
+        <p:txBody>
+          <a:bodyPr wrap="square">
+            <a:spAutoFit/>
+          </a:bodyPr>
+          <a:lstStyle/>
+          <a:p>
+            <a:pPr>
+              <a:spcAft>
+                <a:spcPts val="1000"/>
+              </a:spcAft>
+            </a:pPr>
+            <a:r>
+              <a:rPr sz="1800"/>
+              <a:t>本讲在工作过程系统化课程中承担的任务环节：任务实施</a:t>
+            </a:r>
+          </a:p>
+          <a:p>
+            <a:pPr>
+              <a:spcAft>
+                <a:spcPts val="1000"/>
+              </a:spcAft>
+            </a:pPr>
+            <a:r>
+              <a:rPr sz="1800"/>
+              <a:t>考核对齐：过程性成绩取自本讲工单第六节各模块得分合计（满分 100）。</a:t>
+            </a:r>
+          </a:p>
+          <a:p>
+            <a:pPr>
+              <a:spcAft>
+                <a:spcPts val="1000"/>
+              </a:spcAft>
+            </a:pPr>
+            <a:r>
+              <a:rPr sz="1800"/>
+              <a:t>达标线：综合成绩≥60 分，且无安全红线一票否决记录</a:t>
+            </a:r>
+          </a:p>
+          <a:p>
+            <a:pPr>
+              <a:spcAft>
+                <a:spcPts val="1000"/>
+              </a:spcAft>
+            </a:pPr>
+            <a:r>
+              <a:rPr sz="1800"/>
+              <a:t>无效工单判定：未打安全勾、无本人签字、无三方联签。</a:t>
+            </a:r>
+          </a:p>
+        </p:txBody>
+      </p:sp>
+    </p:spTree>
+  </p:cSld>
+  <p:clrMapOvr>
+    <a:masterClrMapping/>
+  </p:clrMapOvr>
+</p:sld>
+</file>
+
 <file path=ppt/slides/slide3.xml><?xml version="1.0" encoding="utf-8"?>
 <p:sld xmlns:a="http://schemas.openxmlformats.org/drawingml/2006/main" xmlns:p="http://schemas.openxmlformats.org/presentationml/2006/main" xmlns:r="http://schemas.openxmlformats.org/officeDocument/2006/relationships">
   <p:cSld>
@@ -10362,7 +11841,7 @@
                 </a:solidFill>
                 <a:latin typeface="微软雅黑"/>
               </a:rPr>
-              <a:t>3 / 19</a:t>
+              <a:t>3 / 21</a:t>
             </a:r>
           </a:p>
         </p:txBody>
@@ -10836,7 +12315,7 @@
                 </a:solidFill>
                 <a:latin typeface="微软雅黑"/>
               </a:rPr>
-              <a:t>4 / 19</a:t>
+              <a:t>4 / 21</a:t>
             </a:r>
           </a:p>
         </p:txBody>
@@ -11628,7 +13107,7 @@
                 </a:solidFill>
                 <a:latin typeface="微软雅黑"/>
               </a:rPr>
-              <a:t>5 / 19</a:t>
+              <a:t>5 / 21</a:t>
             </a:r>
           </a:p>
         </p:txBody>
@@ -11904,7 +13383,7 @@
                 </a:solidFill>
                 <a:latin typeface="微软雅黑"/>
               </a:rPr>
-              <a:t>6 / 19</a:t>
+              <a:t>6 / 21</a:t>
             </a:r>
           </a:p>
         </p:txBody>
@@ -12730,7 +14209,7 @@
           <a:lstStyle/>
           <a:p>
             <a:r>
-              <a:rPr sz="750" b="0">
+              <a:rPr sz="900" b="0">
                 <a:solidFill>
                   <a:srgbClr val="6B7280"/>
                 </a:solidFill>
@@ -13012,7 +14491,7 @@
                 </a:solidFill>
                 <a:latin typeface="微软雅黑"/>
               </a:rPr>
-              <a:t>7 / 19</a:t>
+              <a:t>7 / 21</a:t>
             </a:r>
           </a:p>
         </p:txBody>
@@ -13232,7 +14711,7 @@
           <a:lstStyle/>
           <a:p>
             <a:r>
-              <a:rPr sz="850" b="0">
+              <a:rPr sz="900" b="0">
                 <a:solidFill>
                   <a:srgbClr val="2B2F36"/>
                 </a:solidFill>
@@ -13300,7 +14779,7 @@
           <a:lstStyle/>
           <a:p>
             <a:r>
-              <a:rPr sz="850" b="0">
+              <a:rPr sz="900" b="0">
                 <a:solidFill>
                   <a:srgbClr val="2B2F36"/>
                 </a:solidFill>
@@ -13368,7 +14847,7 @@
           <a:lstStyle/>
           <a:p>
             <a:r>
-              <a:rPr sz="850" b="0">
+              <a:rPr sz="900" b="0">
                 <a:solidFill>
                   <a:srgbClr val="2B2F36"/>
                 </a:solidFill>
@@ -13560,7 +15039,7 @@
           <a:lstStyle/>
           <a:p>
             <a:r>
-              <a:rPr sz="850" b="0">
+              <a:rPr sz="900" b="0">
                 <a:solidFill>
                   <a:srgbClr val="2B2F36"/>
                 </a:solidFill>
@@ -13628,7 +15107,7 @@
           <a:lstStyle/>
           <a:p>
             <a:r>
-              <a:rPr sz="850" b="0">
+              <a:rPr sz="900" b="0">
                 <a:solidFill>
                   <a:srgbClr val="2B2F36"/>
                 </a:solidFill>
@@ -13696,7 +15175,7 @@
           <a:lstStyle/>
           <a:p>
             <a:r>
-              <a:rPr sz="850" b="0">
+              <a:rPr sz="900" b="0">
                 <a:solidFill>
                   <a:srgbClr val="2B2F36"/>
                 </a:solidFill>
@@ -13888,7 +15367,7 @@
           <a:lstStyle/>
           <a:p>
             <a:r>
-              <a:rPr sz="850" b="0">
+              <a:rPr sz="900" b="0">
                 <a:solidFill>
                   <a:srgbClr val="2B2F36"/>
                 </a:solidFill>
@@ -13956,7 +15435,7 @@
           <a:lstStyle/>
           <a:p>
             <a:r>
-              <a:rPr sz="850" b="0">
+              <a:rPr sz="900" b="0">
                 <a:solidFill>
                   <a:srgbClr val="2B2F36"/>
                 </a:solidFill>
@@ -14024,7 +15503,7 @@
           <a:lstStyle/>
           <a:p>
             <a:r>
-              <a:rPr sz="850" b="0">
+              <a:rPr sz="900" b="0">
                 <a:solidFill>
                   <a:srgbClr val="2B2F36"/>
                 </a:solidFill>
@@ -14306,7 +15785,7 @@
                 </a:solidFill>
                 <a:latin typeface="微软雅黑"/>
               </a:rPr>
-              <a:t>8 / 19</a:t>
+              <a:t>8 / 21</a:t>
             </a:r>
           </a:p>
         </p:txBody>
@@ -14875,7 +16354,7 @@
           <a:lstStyle/>
           <a:p>
             <a:r>
-              <a:rPr sz="750" b="0">
+              <a:rPr sz="900" b="0">
                 <a:solidFill>
                   <a:srgbClr val="6B7280"/>
                 </a:solidFill>
@@ -14994,14 +16473,14 @@
       </p:sp>
       <p:sp>
         <p:nvSpPr>
-          <p:cNvPr id="4" name="TextBox 3"/>
+          <p:cNvPr id="6" name="TextBox 5"/>
           <p:cNvSpPr txBox="1"/>
           <p:nvPr/>
         </p:nvSpPr>
         <p:spPr>
           <a:xfrm>
-            <a:off x="700000" y="300000"/>
-            <a:ext cx="10792000" cy="700000"/>
+            <a:off x="1500000" y="300000"/>
+            <a:ext cx="9992000" cy="700000"/>
           </a:xfrm>
           <a:prstGeom prst="rect">
             <a:avLst/>
@@ -15029,27 +16508,27 @@
                 </a:solidFill>
                 <a:latin typeface="微软雅黑"/>
               </a:rPr>
-              <a:t>实施任务：工单M3-1《ResNet迁移学习（下）：优化与评价》</a:t>
-            </a:r>
-          </a:p>
-        </p:txBody>
-      </p:sp>
-      <p:sp>
-        <p:nvSpPr>
-          <p:cNvPr id="5" name="Rectangle 4"/>
+              <a:t>本课知识速览卡 · 边做边对照</a:t>
+            </a:r>
+          </a:p>
+        </p:txBody>
+      </p:sp>
+      <p:sp>
+        <p:nvSpPr>
+          <p:cNvPr id="17" name="Rectangle 16"/>
           <p:cNvSpPr/>
           <p:nvPr/>
         </p:nvSpPr>
         <p:spPr>
           <a:xfrm>
-            <a:off x="800000" y="1950000"/>
-            <a:ext cx="6300000" cy="3900000"/>
+            <a:off x="500000" y="6500000"/>
+            <a:ext cx="11100000" cy="20000"/>
           </a:xfrm>
           <a:prstGeom prst="rect">
             <a:avLst/>
           </a:prstGeom>
           <a:solidFill>
-            <a:srgbClr val="F3F6FD"/>
+            <a:srgbClr val="C9D4EE"/>
           </a:solidFill>
           <a:ln>
             <a:noFill/>
@@ -15080,197 +16559,14 @@
       </p:sp>
       <p:sp>
         <p:nvSpPr>
-          <p:cNvPr id="6" name="TextBox 5"/>
+          <p:cNvPr id="18" name="TextBox 17"/>
           <p:cNvSpPr txBox="1"/>
           <p:nvPr/>
         </p:nvSpPr>
         <p:spPr>
           <a:xfrm>
-            <a:off x="1000000" y="2100000"/>
-            <a:ext cx="5900000" cy="3600000"/>
-          </a:xfrm>
-          <a:prstGeom prst="rect">
-            <a:avLst/>
-          </a:prstGeom>
-          <a:noFill/>
-        </p:spPr>
-        <p:txBody>
-          <a:bodyPr wrap="square" anchor="t">
-            <a:spAutoFit/>
-          </a:bodyPr>
-          <a:lstStyle/>
-          <a:p>
-            <a:pPr algn="l">
-              <a:lnSpc>
-                <a:spcPct val="130000"/>
-              </a:lnSpc>
-              <a:spcAft>
-                <a:spcPts val="600"/>
-              </a:spcAft>
-            </a:pPr>
-            <a:r>
-              <a:rPr sz="1500" b="1">
-                <a:solidFill>
-                  <a:srgbClr val="0545E8"/>
-                </a:solidFill>
-                <a:latin typeface="微软雅黑"/>
-              </a:rPr>
-              <a:t>实施步骤</a:t>
-            </a:r>
-          </a:p>
-          <a:p>
-            <a:pPr algn="l">
-              <a:lnSpc>
-                <a:spcPct val="130000"/>
-              </a:lnSpc>
-              <a:spcAft>
-                <a:spcPts val="600"/>
-              </a:spcAft>
-            </a:pPr>
-            <a:r>
-              <a:rPr sz="1400" b="0">
-                <a:solidFill>
-                  <a:srgbClr val="010328"/>
-                </a:solidFill>
-                <a:latin typeface="微软雅黑"/>
-              </a:rPr>
-              <a:t>1. 错误速查复盘</a:t>
-            </a:r>
-          </a:p>
-          <a:p>
-            <a:pPr algn="l">
-              <a:lnSpc>
-                <a:spcPct val="130000"/>
-              </a:lnSpc>
-              <a:spcAft>
-                <a:spcPts val="600"/>
-              </a:spcAft>
-            </a:pPr>
-            <a:r>
-              <a:rPr sz="1400" b="0">
-                <a:solidFill>
-                  <a:srgbClr val="010328"/>
-                </a:solidFill>
-                <a:latin typeface="微软雅黑"/>
-              </a:rPr>
-              <a:t>2. 优化冲刺（B/A层）</a:t>
-            </a:r>
-          </a:p>
-          <a:p>
-            <a:pPr algn="l">
-              <a:lnSpc>
-                <a:spcPct val="130000"/>
-              </a:lnSpc>
-              <a:spcAft>
-                <a:spcPts val="600"/>
-              </a:spcAft>
-            </a:pPr>
-            <a:r>
-              <a:rPr sz="1400" b="0">
-                <a:solidFill>
-                  <a:srgbClr val="010328"/>
-                </a:solidFill>
-                <a:latin typeface="微软雅黑"/>
-              </a:rPr>
-              <a:t>3. 三层质检互查</a:t>
-            </a:r>
-          </a:p>
-          <a:p>
-            <a:pPr algn="l">
-              <a:lnSpc>
-                <a:spcPct val="130000"/>
-              </a:lnSpc>
-              <a:spcAft>
-                <a:spcPts val="600"/>
-              </a:spcAft>
-            </a:pPr>
-            <a:r>
-              <a:rPr sz="1400" b="0">
-                <a:solidFill>
-                  <a:srgbClr val="010328"/>
-                </a:solidFill>
-                <a:latin typeface="微软雅黑"/>
-              </a:rPr>
-              <a:t>4. 当堂评分与反馈</a:t>
-            </a:r>
-          </a:p>
-          <a:p>
-            <a:pPr algn="l">
-              <a:lnSpc>
-                <a:spcPct val="130000"/>
-              </a:lnSpc>
-              <a:spcAft>
-                <a:spcPts val="600"/>
-              </a:spcAft>
-            </a:pPr>
-            <a:r>
-              <a:rPr sz="1400" b="0">
-                <a:solidFill>
-                  <a:srgbClr val="010328"/>
-                </a:solidFill>
-                <a:latin typeface="微软雅黑"/>
-              </a:rPr>
-              <a:t>5. 下次课预告+微课</a:t>
-            </a:r>
-          </a:p>
-        </p:txBody>
-      </p:sp>
-      <p:sp>
-        <p:nvSpPr>
-          <p:cNvPr id="7" name="Rectangle 6"/>
-          <p:cNvSpPr/>
-          <p:nvPr/>
-        </p:nvSpPr>
-        <p:spPr>
-          <a:xfrm>
-            <a:off x="7400000" y="1950000"/>
-            <a:ext cx="4000000" cy="1850000"/>
-          </a:xfrm>
-          <a:prstGeom prst="rect">
-            <a:avLst/>
-          </a:prstGeom>
-          <a:solidFill>
-            <a:srgbClr val="E8F1E8"/>
-          </a:solidFill>
-          <a:ln>
-            <a:solidFill>
-              <a:srgbClr val="0475B6"/>
-            </a:solidFill>
-          </a:ln>
-          <a:effectLst/>
-        </p:spPr>
-        <p:style>
-          <a:lnRef idx="1">
-            <a:schemeClr val="accent1"/>
-          </a:lnRef>
-          <a:fillRef idx="3">
-            <a:schemeClr val="accent1"/>
-          </a:fillRef>
-          <a:effectRef idx="2">
-            <a:schemeClr val="accent1"/>
-          </a:effectRef>
-          <a:fontRef idx="minor">
-            <a:schemeClr val="lt1"/>
-          </a:fontRef>
-        </p:style>
-        <p:txBody>
-          <a:bodyPr rtlCol="0" anchor="ctr"/>
-          <a:lstStyle/>
-          <a:p>
-            <a:pPr algn="ctr"/>
-          </a:p>
-        </p:txBody>
-      </p:sp>
-      <p:sp>
-        <p:nvSpPr>
-          <p:cNvPr id="8" name="TextBox 7"/>
-          <p:cNvSpPr txBox="1"/>
-          <p:nvPr/>
-        </p:nvSpPr>
-        <p:spPr>
-          <a:xfrm>
-            <a:off x="7550000" y="2080000"/>
-            <a:ext cx="3750000" cy="1650000"/>
+            <a:off x="500000" y="6540000"/>
+            <a:ext cx="7000000" cy="300000"/>
           </a:xfrm>
           <a:prstGeom prst="rect">
             <a:avLst/>
@@ -15292,218 +16588,6 @@
               </a:spcAft>
             </a:pPr>
             <a:r>
-              <a:rPr sz="1400" b="1">
-                <a:solidFill>
-                  <a:srgbClr val="0475B6"/>
-                </a:solidFill>
-                <a:latin typeface="微软雅黑"/>
-              </a:rPr>
-              <a:t>及格标准（D）</a:t>
-            </a:r>
-          </a:p>
-          <a:p>
-            <a:pPr algn="l">
-              <a:lnSpc>
-                <a:spcPct val="110000"/>
-              </a:lnSpc>
-              <a:spcAft>
-                <a:spcPts val="600"/>
-              </a:spcAft>
-            </a:pPr>
-            <a:r>
-              <a:rPr sz="1300" b="0">
-                <a:solidFill>
-                  <a:srgbClr val="010328"/>
-                </a:solidFill>
-                <a:latin typeface="微软雅黑"/>
-              </a:rPr>
-              <a:t>准确率≥75%+对比表</a:t>
-            </a:r>
-          </a:p>
-        </p:txBody>
-      </p:sp>
-      <p:sp>
-        <p:nvSpPr>
-          <p:cNvPr id="9" name="Rectangle 8"/>
-          <p:cNvSpPr/>
-          <p:nvPr/>
-        </p:nvSpPr>
-        <p:spPr>
-          <a:xfrm>
-            <a:off x="7400000" y="3950000"/>
-            <a:ext cx="4000000" cy="1850000"/>
-          </a:xfrm>
-          <a:prstGeom prst="rect">
-            <a:avLst/>
-          </a:prstGeom>
-          <a:solidFill>
-            <a:srgbClr val="FDF0E6"/>
-          </a:solidFill>
-          <a:ln>
-            <a:solidFill>
-              <a:srgbClr val="F5670F"/>
-            </a:solidFill>
-          </a:ln>
-          <a:effectLst/>
-        </p:spPr>
-        <p:style>
-          <a:lnRef idx="1">
-            <a:schemeClr val="accent1"/>
-          </a:lnRef>
-          <a:fillRef idx="3">
-            <a:schemeClr val="accent1"/>
-          </a:fillRef>
-          <a:effectRef idx="2">
-            <a:schemeClr val="accent1"/>
-          </a:effectRef>
-          <a:fontRef idx="minor">
-            <a:schemeClr val="lt1"/>
-          </a:fontRef>
-        </p:style>
-        <p:txBody>
-          <a:bodyPr rtlCol="0" anchor="ctr"/>
-          <a:lstStyle/>
-          <a:p>
-            <a:pPr algn="ctr"/>
-          </a:p>
-        </p:txBody>
-      </p:sp>
-      <p:sp>
-        <p:nvSpPr>
-          <p:cNvPr id="10" name="TextBox 9"/>
-          <p:cNvSpPr txBox="1"/>
-          <p:nvPr/>
-        </p:nvSpPr>
-        <p:spPr>
-          <a:xfrm>
-            <a:off x="7550000" y="4080000"/>
-            <a:ext cx="3750000" cy="1650000"/>
-          </a:xfrm>
-          <a:prstGeom prst="rect">
-            <a:avLst/>
-          </a:prstGeom>
-          <a:noFill/>
-        </p:spPr>
-        <p:txBody>
-          <a:bodyPr wrap="square" anchor="t">
-            <a:spAutoFit/>
-          </a:bodyPr>
-          <a:lstStyle/>
-          <a:p>
-            <a:pPr algn="l">
-              <a:lnSpc>
-                <a:spcPct val="110000"/>
-              </a:lnSpc>
-              <a:spcAft>
-                <a:spcPts val="600"/>
-              </a:spcAft>
-            </a:pPr>
-            <a:r>
-              <a:rPr sz="1400" b="1">
-                <a:solidFill>
-                  <a:srgbClr val="F5670F"/>
-                </a:solidFill>
-                <a:latin typeface="微软雅黑"/>
-              </a:rPr>
-              <a:t>优秀标准（B+）</a:t>
-            </a:r>
-          </a:p>
-          <a:p>
-            <a:pPr algn="l">
-              <a:lnSpc>
-                <a:spcPct val="110000"/>
-              </a:lnSpc>
-              <a:spcAft>
-                <a:spcPts val="600"/>
-              </a:spcAft>
-            </a:pPr>
-            <a:r>
-              <a:rPr sz="1300" b="0">
-                <a:solidFill>
-                  <a:srgbClr val="010328"/>
-                </a:solidFill>
-                <a:latin typeface="微软雅黑"/>
-              </a:rPr>
-              <a:t>准确率≥85%</a:t>
-            </a:r>
-          </a:p>
-        </p:txBody>
-      </p:sp>
-      <p:sp>
-        <p:nvSpPr>
-          <p:cNvPr id="11" name="Rectangle 10"/>
-          <p:cNvSpPr/>
-          <p:nvPr/>
-        </p:nvSpPr>
-        <p:spPr>
-          <a:xfrm>
-            <a:off x="500000" y="6500000"/>
-            <a:ext cx="11100000" cy="20000"/>
-          </a:xfrm>
-          <a:prstGeom prst="rect">
-            <a:avLst/>
-          </a:prstGeom>
-          <a:solidFill>
-            <a:srgbClr val="C9D4EE"/>
-          </a:solidFill>
-          <a:ln>
-            <a:noFill/>
-          </a:ln>
-          <a:effectLst/>
-        </p:spPr>
-        <p:style>
-          <a:lnRef idx="1">
-            <a:schemeClr val="accent1"/>
-          </a:lnRef>
-          <a:fillRef idx="3">
-            <a:schemeClr val="accent1"/>
-          </a:fillRef>
-          <a:effectRef idx="2">
-            <a:schemeClr val="accent1"/>
-          </a:effectRef>
-          <a:fontRef idx="minor">
-            <a:schemeClr val="lt1"/>
-          </a:fontRef>
-        </p:style>
-        <p:txBody>
-          <a:bodyPr rtlCol="0" anchor="ctr"/>
-          <a:lstStyle/>
-          <a:p>
-            <a:pPr algn="ctr"/>
-          </a:p>
-        </p:txBody>
-      </p:sp>
-      <p:sp>
-        <p:nvSpPr>
-          <p:cNvPr id="12" name="TextBox 11"/>
-          <p:cNvSpPr txBox="1"/>
-          <p:nvPr/>
-        </p:nvSpPr>
-        <p:spPr>
-          <a:xfrm>
-            <a:off x="500000" y="6540000"/>
-            <a:ext cx="7000000" cy="300000"/>
-          </a:xfrm>
-          <a:prstGeom prst="rect">
-            <a:avLst/>
-          </a:prstGeom>
-          <a:noFill/>
-        </p:spPr>
-        <p:txBody>
-          <a:bodyPr wrap="square" anchor="t">
-            <a:spAutoFit/>
-          </a:bodyPr>
-          <a:lstStyle/>
-          <a:p>
-            <a:pPr algn="l">
-              <a:lnSpc>
-                <a:spcPct val="110000"/>
-              </a:lnSpc>
-              <a:spcAft>
-                <a:spcPts val="600"/>
-              </a:spcAft>
-            </a:pPr>
-            <a:r>
               <a:rPr sz="1000" b="0">
                 <a:solidFill>
                   <a:srgbClr val="8A97B5"/>
@@ -15517,7 +16601,7 @@
       </p:sp>
       <p:sp>
         <p:nvSpPr>
-          <p:cNvPr id="13" name="TextBox 12"/>
+          <p:cNvPr id="19" name="TextBox 18"/>
           <p:cNvSpPr txBox="1"/>
           <p:nvPr/>
         </p:nvSpPr>
@@ -15552,7 +16636,637 @@
                 </a:solidFill>
                 <a:latin typeface="微软雅黑"/>
               </a:rPr>
-              <a:t>9 / 19</a:t>
+              <a:t>9 / 21</a:t>
+            </a:r>
+          </a:p>
+        </p:txBody>
+      </p:sp>
+      <p:sp>
+        <p:nvSpPr>
+          <p:cNvPr id="20" name="TextBox 19"/>
+          <p:cNvSpPr txBox="1"/>
+          <p:nvPr/>
+        </p:nvSpPr>
+        <p:spPr>
+          <a:xfrm>
+            <a:off x="457200" y="1389888"/>
+            <a:ext cx="11274552" cy="274320"/>
+          </a:xfrm>
+          <a:prstGeom prst="rect">
+            <a:avLst/>
+          </a:prstGeom>
+          <a:noFill/>
+        </p:spPr>
+        <p:txBody>
+          <a:bodyPr wrap="square">
+            <a:spAutoFit/>
+          </a:bodyPr>
+          <a:lstStyle/>
+          <a:p>
+            <a:r>
+              <a:rPr sz="1050" b="0">
+                <a:solidFill>
+                  <a:srgbClr val="6B7280"/>
+                </a:solidFill>
+                <a:latin typeface="微软雅黑"/>
+              </a:rPr>
+              <a:t>本讲是动手冲刺课：知识点在完整讲解课已细讲——这页把它们浓缩成一张速览卡，边做边对照。</a:t>
+            </a:r>
+          </a:p>
+        </p:txBody>
+      </p:sp>
+      <p:sp>
+        <p:nvSpPr>
+          <p:cNvPr id="21" name="Rectangle 20"/>
+          <p:cNvSpPr/>
+          <p:nvPr/>
+        </p:nvSpPr>
+        <p:spPr>
+          <a:xfrm>
+            <a:off x="457200" y="1783080"/>
+            <a:ext cx="6309360" cy="4114800"/>
+          </a:xfrm>
+          <a:prstGeom prst="rect">
+            <a:avLst/>
+          </a:prstGeom>
+          <a:solidFill>
+            <a:srgbClr val="FFFFFF"/>
+          </a:solidFill>
+          <a:ln>
+            <a:solidFill>
+              <a:srgbClr val="D6DCE4"/>
+            </a:solidFill>
+          </a:ln>
+          <a:effectLst/>
+        </p:spPr>
+        <p:style>
+          <a:lnRef idx="1">
+            <a:schemeClr val="accent1"/>
+          </a:lnRef>
+          <a:fillRef idx="3">
+            <a:schemeClr val="accent1"/>
+          </a:fillRef>
+          <a:effectRef idx="2">
+            <a:schemeClr val="accent1"/>
+          </a:effectRef>
+          <a:fontRef idx="minor">
+            <a:schemeClr val="lt1"/>
+          </a:fontRef>
+        </p:style>
+        <p:txBody>
+          <a:bodyPr rtlCol="0" anchor="ctr" wrap="square"/>
+          <a:lstStyle/>
+          <a:p>
+            <a:pPr algn="ctr"/>
+          </a:p>
+        </p:txBody>
+      </p:sp>
+      <p:sp>
+        <p:nvSpPr>
+          <p:cNvPr id="22" name="Rectangle 21"/>
+          <p:cNvSpPr/>
+          <p:nvPr/>
+        </p:nvSpPr>
+        <p:spPr>
+          <a:xfrm>
+            <a:off x="457200" y="1783080"/>
+            <a:ext cx="6309360" cy="365760"/>
+          </a:xfrm>
+          <a:prstGeom prst="rect">
+            <a:avLst/>
+          </a:prstGeom>
+          <a:solidFill>
+            <a:srgbClr val="2F5D8C"/>
+          </a:solidFill>
+          <a:ln>
+            <a:noFill/>
+          </a:ln>
+          <a:effectLst/>
+        </p:spPr>
+        <p:style>
+          <a:lnRef idx="1">
+            <a:schemeClr val="accent1"/>
+          </a:lnRef>
+          <a:fillRef idx="3">
+            <a:schemeClr val="accent1"/>
+          </a:fillRef>
+          <a:effectRef idx="2">
+            <a:schemeClr val="accent1"/>
+          </a:effectRef>
+          <a:fontRef idx="minor">
+            <a:schemeClr val="lt1"/>
+          </a:fontRef>
+        </p:style>
+        <p:txBody>
+          <a:bodyPr rtlCol="0" anchor="ctr" wrap="square"/>
+          <a:lstStyle/>
+          <a:p>
+            <a:pPr algn="ctr"/>
+          </a:p>
+        </p:txBody>
+      </p:sp>
+      <p:sp>
+        <p:nvSpPr>
+          <p:cNvPr id="23" name="TextBox 22"/>
+          <p:cNvSpPr txBox="1"/>
+          <p:nvPr/>
+        </p:nvSpPr>
+        <p:spPr>
+          <a:xfrm>
+            <a:off x="566928" y="1819656"/>
+            <a:ext cx="6089904" cy="292608"/>
+          </a:xfrm>
+          <a:prstGeom prst="rect">
+            <a:avLst/>
+          </a:prstGeom>
+          <a:noFill/>
+        </p:spPr>
+        <p:txBody>
+          <a:bodyPr wrap="square">
+            <a:spAutoFit/>
+          </a:bodyPr>
+          <a:lstStyle/>
+          <a:p>
+            <a:r>
+              <a:rPr sz="1150" b="1">
+                <a:solidFill>
+                  <a:srgbClr val="FFFFFF"/>
+                </a:solidFill>
+                <a:latin typeface="微软雅黑"/>
+              </a:rPr>
+              <a:t>知识点速览（逐字摘自同周完整讲解课知识卡）</a:t>
+            </a:r>
+          </a:p>
+        </p:txBody>
+      </p:sp>
+      <p:sp>
+        <p:nvSpPr>
+          <p:cNvPr id="24" name="TextBox 23"/>
+          <p:cNvSpPr txBox="1"/>
+          <p:nvPr/>
+        </p:nvSpPr>
+        <p:spPr>
+          <a:xfrm>
+            <a:off x="621792" y="2267712"/>
+            <a:ext cx="6035040" cy="3474720"/>
+          </a:xfrm>
+          <a:prstGeom prst="rect">
+            <a:avLst/>
+          </a:prstGeom>
+          <a:noFill/>
+        </p:spPr>
+        <p:txBody>
+          <a:bodyPr wrap="square">
+            <a:spAutoFit/>
+          </a:bodyPr>
+          <a:lstStyle/>
+          <a:p>
+            <a:r>
+              <a:rPr sz="950" b="0">
+                <a:solidFill>
+                  <a:srgbClr val="2B2F36"/>
+                </a:solidFill>
+                <a:latin typeface="微软雅黑"/>
+              </a:rPr>
+              <a:t>◆ B01 迁移学习｜站在巨人肩上——ImageNet学过的视觉知识直接复用</a:t>
+            </a:r>
+          </a:p>
+          <a:p>
+            <a:r>
+              <a:rPr sz="950" b="0">
+                <a:solidFill>
+                  <a:srgbClr val="2B2F36"/>
+                </a:solidFill>
+                <a:latin typeface="微软雅黑"/>
+              </a:rPr>
+              <a:t>◆ B02 冻结backbone｜锁死预训练层只训分类头——小样本第一选择</a:t>
+            </a:r>
+          </a:p>
+          <a:p>
+            <a:r>
+              <a:rPr sz="950" b="0">
+                <a:solidFill>
+                  <a:srgbClr val="2B2F36"/>
+                </a:solidFill>
+                <a:latin typeface="微软雅黑"/>
+              </a:rPr>
+              <a:t>◆ B03 分层学习率｜底层通用特征小步、任务层大步——各层各走各的</a:t>
+            </a:r>
+          </a:p>
+          <a:p>
+            <a:r>
+              <a:rPr sz="950" b="0">
+                <a:solidFill>
+                  <a:srgbClr val="2B2F36"/>
+                </a:solidFill>
+                <a:latin typeface="微软雅黑"/>
+              </a:rPr>
+              <a:t>◆ B04 数据增强｜翻转/裁剪/旋转让200张变2000张有效样本</a:t>
+            </a:r>
+          </a:p>
+          <a:p>
+            <a:r>
+              <a:rPr sz="950" b="0">
+                <a:solidFill>
+                  <a:srgbClr val="2B2F36"/>
+                </a:solidFill>
+                <a:latin typeface="微软雅黑"/>
+              </a:rPr>
+              <a:t>◆ B05 小样本陷阱｜测试集也小指标波动大——多seed取均值才可信</a:t>
+            </a:r>
+          </a:p>
+          <a:p>
+            <a:r>
+              <a:rPr sz="950" b="0">
+                <a:solidFill>
+                  <a:srgbClr val="2B2F36"/>
+                </a:solidFill>
+                <a:latin typeface="微软雅黑"/>
+              </a:rPr>
+              <a:t>◆ B06 CPU友好策略｜小图+冻结层几分钟出结果——没GPU也能练CNN</a:t>
+            </a:r>
+          </a:p>
+        </p:txBody>
+      </p:sp>
+      <p:sp>
+        <p:nvSpPr>
+          <p:cNvPr id="25" name="Rectangle 24"/>
+          <p:cNvSpPr/>
+          <p:nvPr/>
+        </p:nvSpPr>
+        <p:spPr>
+          <a:xfrm>
+            <a:off x="6903720" y="1783080"/>
+            <a:ext cx="4828032" cy="1965960"/>
+          </a:xfrm>
+          <a:prstGeom prst="rect">
+            <a:avLst/>
+          </a:prstGeom>
+          <a:solidFill>
+            <a:srgbClr val="FFFFFF"/>
+          </a:solidFill>
+          <a:ln>
+            <a:solidFill>
+              <a:srgbClr val="D6DCE4"/>
+            </a:solidFill>
+          </a:ln>
+          <a:effectLst/>
+        </p:spPr>
+        <p:style>
+          <a:lnRef idx="1">
+            <a:schemeClr val="accent1"/>
+          </a:lnRef>
+          <a:fillRef idx="3">
+            <a:schemeClr val="accent1"/>
+          </a:fillRef>
+          <a:effectRef idx="2">
+            <a:schemeClr val="accent1"/>
+          </a:effectRef>
+          <a:fontRef idx="minor">
+            <a:schemeClr val="lt1"/>
+          </a:fontRef>
+        </p:style>
+        <p:txBody>
+          <a:bodyPr rtlCol="0" anchor="ctr" wrap="square"/>
+          <a:lstStyle/>
+          <a:p>
+            <a:pPr algn="ctr"/>
+          </a:p>
+        </p:txBody>
+      </p:sp>
+      <p:sp>
+        <p:nvSpPr>
+          <p:cNvPr id="26" name="Rectangle 25"/>
+          <p:cNvSpPr/>
+          <p:nvPr/>
+        </p:nvSpPr>
+        <p:spPr>
+          <a:xfrm>
+            <a:off x="6903720" y="1783080"/>
+            <a:ext cx="4828032" cy="365760"/>
+          </a:xfrm>
+          <a:prstGeom prst="rect">
+            <a:avLst/>
+          </a:prstGeom>
+          <a:solidFill>
+            <a:srgbClr val="2E7D46"/>
+          </a:solidFill>
+          <a:ln>
+            <a:noFill/>
+          </a:ln>
+          <a:effectLst/>
+        </p:spPr>
+        <p:style>
+          <a:lnRef idx="1">
+            <a:schemeClr val="accent1"/>
+          </a:lnRef>
+          <a:fillRef idx="3">
+            <a:schemeClr val="accent1"/>
+          </a:fillRef>
+          <a:effectRef idx="2">
+            <a:schemeClr val="accent1"/>
+          </a:effectRef>
+          <a:fontRef idx="minor">
+            <a:schemeClr val="lt1"/>
+          </a:fontRef>
+        </p:style>
+        <p:txBody>
+          <a:bodyPr rtlCol="0" anchor="ctr" wrap="square"/>
+          <a:lstStyle/>
+          <a:p>
+            <a:pPr algn="ctr"/>
+          </a:p>
+        </p:txBody>
+      </p:sp>
+      <p:sp>
+        <p:nvSpPr>
+          <p:cNvPr id="27" name="TextBox 26"/>
+          <p:cNvSpPr txBox="1"/>
+          <p:nvPr/>
+        </p:nvSpPr>
+        <p:spPr>
+          <a:xfrm>
+            <a:off x="7013448" y="1819656"/>
+            <a:ext cx="4608576" cy="292608"/>
+          </a:xfrm>
+          <a:prstGeom prst="rect">
+            <a:avLst/>
+          </a:prstGeom>
+          <a:noFill/>
+        </p:spPr>
+        <p:txBody>
+          <a:bodyPr wrap="square">
+            <a:spAutoFit/>
+          </a:bodyPr>
+          <a:lstStyle/>
+          <a:p>
+            <a:r>
+              <a:rPr sz="1150" b="1">
+                <a:solidFill>
+                  <a:srgbClr val="FFFFFF"/>
+                </a:solidFill>
+                <a:latin typeface="微软雅黑"/>
+              </a:rPr>
+              <a:t>本讲达标线（当堂评分同口径）</a:t>
+            </a:r>
+          </a:p>
+        </p:txBody>
+      </p:sp>
+      <p:sp>
+        <p:nvSpPr>
+          <p:cNvPr id="28" name="TextBox 27"/>
+          <p:cNvSpPr txBox="1"/>
+          <p:nvPr/>
+        </p:nvSpPr>
+        <p:spPr>
+          <a:xfrm>
+            <a:off x="7068312" y="2249424"/>
+            <a:ext cx="4526280" cy="1371600"/>
+          </a:xfrm>
+          <a:prstGeom prst="rect">
+            <a:avLst/>
+          </a:prstGeom>
+          <a:noFill/>
+        </p:spPr>
+        <p:txBody>
+          <a:bodyPr wrap="square">
+            <a:spAutoFit/>
+          </a:bodyPr>
+          <a:lstStyle/>
+          <a:p>
+            <a:r>
+              <a:rPr sz="900" b="0">
+                <a:solidFill>
+                  <a:srgbClr val="2B2F36"/>
+                </a:solidFill>
+                <a:latin typeface="微软雅黑"/>
+              </a:rPr>
+              <a:t>① 及格(D)：准确率≥75%+对比表</a:t>
+            </a:r>
+          </a:p>
+          <a:p>
+            <a:r>
+              <a:rPr sz="900" b="0">
+                <a:solidFill>
+                  <a:srgbClr val="2B2F36"/>
+                </a:solidFill>
+                <a:latin typeface="微软雅黑"/>
+              </a:rPr>
+              <a:t>② 优秀(B+)：准确率≥85%</a:t>
+            </a:r>
+          </a:p>
+        </p:txBody>
+      </p:sp>
+      <p:sp>
+        <p:nvSpPr>
+          <p:cNvPr id="29" name="Rectangle 28"/>
+          <p:cNvSpPr/>
+          <p:nvPr/>
+        </p:nvSpPr>
+        <p:spPr>
+          <a:xfrm>
+            <a:off x="6903720" y="3886200"/>
+            <a:ext cx="4828032" cy="2011680"/>
+          </a:xfrm>
+          <a:prstGeom prst="rect">
+            <a:avLst/>
+          </a:prstGeom>
+          <a:solidFill>
+            <a:srgbClr val="FFFFFF"/>
+          </a:solidFill>
+          <a:ln>
+            <a:solidFill>
+              <a:srgbClr val="D6DCE4"/>
+            </a:solidFill>
+          </a:ln>
+          <a:effectLst/>
+        </p:spPr>
+        <p:style>
+          <a:lnRef idx="1">
+            <a:schemeClr val="accent1"/>
+          </a:lnRef>
+          <a:fillRef idx="3">
+            <a:schemeClr val="accent1"/>
+          </a:fillRef>
+          <a:effectRef idx="2">
+            <a:schemeClr val="accent1"/>
+          </a:effectRef>
+          <a:fontRef idx="minor">
+            <a:schemeClr val="lt1"/>
+          </a:fontRef>
+        </p:style>
+        <p:txBody>
+          <a:bodyPr rtlCol="0" anchor="ctr" wrap="square"/>
+          <a:lstStyle/>
+          <a:p>
+            <a:pPr algn="ctr"/>
+          </a:p>
+        </p:txBody>
+      </p:sp>
+      <p:sp>
+        <p:nvSpPr>
+          <p:cNvPr id="30" name="Rectangle 29"/>
+          <p:cNvSpPr/>
+          <p:nvPr/>
+        </p:nvSpPr>
+        <p:spPr>
+          <a:xfrm>
+            <a:off x="6903720" y="3886200"/>
+            <a:ext cx="4828032" cy="365760"/>
+          </a:xfrm>
+          <a:prstGeom prst="rect">
+            <a:avLst/>
+          </a:prstGeom>
+          <a:solidFill>
+            <a:srgbClr val="8A4B2D"/>
+          </a:solidFill>
+          <a:ln>
+            <a:noFill/>
+          </a:ln>
+          <a:effectLst/>
+        </p:spPr>
+        <p:style>
+          <a:lnRef idx="1">
+            <a:schemeClr val="accent1"/>
+          </a:lnRef>
+          <a:fillRef idx="3">
+            <a:schemeClr val="accent1"/>
+          </a:fillRef>
+          <a:effectRef idx="2">
+            <a:schemeClr val="accent1"/>
+          </a:effectRef>
+          <a:fontRef idx="minor">
+            <a:schemeClr val="lt1"/>
+          </a:fontRef>
+        </p:style>
+        <p:txBody>
+          <a:bodyPr rtlCol="0" anchor="ctr" wrap="square"/>
+          <a:lstStyle/>
+          <a:p>
+            <a:pPr algn="ctr"/>
+          </a:p>
+        </p:txBody>
+      </p:sp>
+      <p:sp>
+        <p:nvSpPr>
+          <p:cNvPr id="31" name="TextBox 30"/>
+          <p:cNvSpPr txBox="1"/>
+          <p:nvPr/>
+        </p:nvSpPr>
+        <p:spPr>
+          <a:xfrm>
+            <a:off x="7013448" y="3922776"/>
+            <a:ext cx="4608576" cy="292608"/>
+          </a:xfrm>
+          <a:prstGeom prst="rect">
+            <a:avLst/>
+          </a:prstGeom>
+          <a:noFill/>
+        </p:spPr>
+        <p:txBody>
+          <a:bodyPr wrap="square">
+            <a:spAutoFit/>
+          </a:bodyPr>
+          <a:lstStyle/>
+          <a:p>
+            <a:r>
+              <a:rPr sz="1150" b="1">
+                <a:solidFill>
+                  <a:srgbClr val="FFFFFF"/>
+                </a:solidFill>
+                <a:latin typeface="微软雅黑"/>
+              </a:rPr>
+              <a:t>动手前三个提醒（踩坑点摘录）</a:t>
+            </a:r>
+          </a:p>
+        </p:txBody>
+      </p:sp>
+      <p:sp>
+        <p:nvSpPr>
+          <p:cNvPr id="32" name="TextBox 31"/>
+          <p:cNvSpPr txBox="1"/>
+          <p:nvPr/>
+        </p:nvSpPr>
+        <p:spPr>
+          <a:xfrm>
+            <a:off x="7068312" y="4352544"/>
+            <a:ext cx="4526280" cy="1463040"/>
+          </a:xfrm>
+          <a:prstGeom prst="rect">
+            <a:avLst/>
+          </a:prstGeom>
+          <a:noFill/>
+        </p:spPr>
+        <p:txBody>
+          <a:bodyPr wrap="square">
+            <a:spAutoFit/>
+          </a:bodyPr>
+          <a:lstStyle/>
+          <a:p>
+            <a:r>
+              <a:rPr sz="900" b="0">
+                <a:solidFill>
+                  <a:srgbClr val="2B2F36"/>
+                </a:solidFill>
+                <a:latin typeface="微软雅黑"/>
+              </a:rPr>
+              <a:t>⚠ 冻结加resize到128</a:t>
+            </a:r>
+          </a:p>
+          <a:p>
+            <a:r>
+              <a:rPr sz="900" b="0">
+                <a:solidFill>
+                  <a:srgbClr val="2B2F36"/>
+                </a:solidFill>
+                <a:latin typeface="微软雅黑"/>
+              </a:rPr>
+              <a:t>⚠ 分层lr且末段1e-5</a:t>
+            </a:r>
+          </a:p>
+          <a:p>
+            <a:r>
+              <a:rPr sz="900" b="0">
+                <a:solidFill>
+                  <a:srgbClr val="2B2F36"/>
+                </a:solidFill>
+                <a:latin typeface="微软雅黑"/>
+              </a:rPr>
+              <a:t>⚠ 3个seed取均值</a:t>
+            </a:r>
+          </a:p>
+        </p:txBody>
+      </p:sp>
+      <p:sp>
+        <p:nvSpPr>
+          <p:cNvPr id="33" name="TextBox 32"/>
+          <p:cNvSpPr txBox="1"/>
+          <p:nvPr/>
+        </p:nvSpPr>
+        <p:spPr>
+          <a:xfrm>
+            <a:off x="457200" y="6281928"/>
+            <a:ext cx="9601200" cy="182880"/>
+          </a:xfrm>
+          <a:prstGeom prst="rect">
+            <a:avLst/>
+          </a:prstGeom>
+          <a:noFill/>
+        </p:spPr>
+        <p:txBody>
+          <a:bodyPr wrap="square">
+            <a:spAutoFit/>
+          </a:bodyPr>
+          <a:lstStyle/>
+          <a:p>
+            <a:r>
+              <a:rPr sz="900" b="0">
+                <a:solidFill>
+                  <a:srgbClr val="6B7280"/>
+                </a:solidFill>
+                <a:latin typeface="微软雅黑"/>
+              </a:rPr>
+              <a:t>素材来源：同周《第13次课-ResNet迁移学习（上》知识卡与避坑清单（逐字摘录）</a:t>
             </a:r>
           </a:p>
         </p:txBody>
